--- a/library/b03-computational-thinking/b03-computational-thinking.pptx
+++ b/library/b03-computational-thinking/b03-computational-thinking.pptx
@@ -8,8 +8,8 @@
     <p:notesMasterId r:id="rId17"/>
   </p:notesMasterIdLst>
   <p:sldIdLst>
+    <p:sldId id="270" r:id="rId12"/>
     <p:sldId id="271" r:id="rId22"/>
-    <p:sldId id="272" r:id="rId23"/>
     <p:sldId id="256" r:id="rId2"/>
     <p:sldId id="257" r:id="rId3"/>
     <p:sldId id="258" r:id="rId4"/>
@@ -20,12 +20,11 @@
     <p:sldId id="263" r:id="rId9"/>
     <p:sldId id="264" r:id="rId10"/>
     <p:sldId id="265" r:id="rId11"/>
-    <p:sldId id="270" r:id="rId12"/>
     <p:sldId id="266" r:id="rId13"/>
     <p:sldId id="267" r:id="rId14"/>
     <p:sldId id="268" r:id="rId15"/>
     <p:sldId id="269" r:id="rId16"/>
-    <p:sldId id="273" r:id="rId24"/>
+    <p:sldId id="272" r:id="rId23"/>
   </p:sldIdLst>
   <p:sldSz cx="12192000" cy="6858000"/>
   <p:notesSz cx="6858000" cy="12192000"/>
@@ -413,114 +412,6 @@
     <p:extLst>
       <p:ext uri="{BB962C8B-B14F-4D97-AF65-F5344CB8AC3E}">
         <p14:creationId xmlns:p14="http://schemas.microsoft.com/office/powerpoint/2010/main" val="1024086991"/>
-      </p:ext>
-    </p:extLst>
-  </p:cSld>
-  <p:clrMapOvr>
-    <a:masterClrMapping/>
-  </p:clrMapOvr>
-</p:notes>
-</file>
-
-<file path=ppt/notesSlides/notesSlide11.xml><?xml version="1.0" encoding="utf-8"?>
-<p:notes xmlns:a="http://schemas.openxmlformats.org/drawingml/2006/main" xmlns:r="http://schemas.openxmlformats.org/officeDocument/2006/relationships" xmlns:p="http://schemas.openxmlformats.org/presentationml/2006/main">
-  <p:cSld>
-    <p:spTree>
-      <p:nvGrpSpPr>
-        <p:cNvPr id="1" name="">
-          <a:extLst>
-            <a:ext uri="{FF2B5EF4-FFF2-40B4-BE49-F238E27FC236}">
-              <a16:creationId xmlns:a16="http://schemas.microsoft.com/office/drawing/2014/main" id="{06C207F9-7237-948C-2266-D2CB6C71A139}"/>
-            </a:ext>
-          </a:extLst>
-        </p:cNvPr>
-        <p:cNvGrpSpPr/>
-        <p:nvPr/>
-      </p:nvGrpSpPr>
-      <p:grpSpPr>
-        <a:xfrm>
-          <a:off x="0" y="0"/>
-          <a:ext cx="0" cy="0"/>
-          <a:chOff x="0" y="0"/>
-          <a:chExt cx="0" cy="0"/>
-        </a:xfrm>
-      </p:grpSpPr>
-      <p:sp>
-        <p:nvSpPr>
-          <p:cNvPr id="2" name="Slide Image Placeholder 1">
-            <a:extLst>
-              <a:ext uri="{FF2B5EF4-FFF2-40B4-BE49-F238E27FC236}">
-                <a16:creationId xmlns:a16="http://schemas.microsoft.com/office/drawing/2014/main" id="{31538221-2CEC-319B-E2A2-97CD6BDA57C1}"/>
-              </a:ext>
-            </a:extLst>
-          </p:cNvPr>
-          <p:cNvSpPr>
-            <a:spLocks noGrp="1" noRot="1" noChangeAspect="1"/>
-          </p:cNvSpPr>
-          <p:nvPr>
-            <p:ph type="sldImg"/>
-          </p:nvPr>
-        </p:nvSpPr>
-        <p:spPr/>
-      </p:sp>
-      <p:sp>
-        <p:nvSpPr>
-          <p:cNvPr id="3" name="Notes Placeholder 2">
-            <a:extLst>
-              <a:ext uri="{FF2B5EF4-FFF2-40B4-BE49-F238E27FC236}">
-                <a16:creationId xmlns:a16="http://schemas.microsoft.com/office/drawing/2014/main" id="{5FFF8FA7-C6EB-3DE6-E14E-68D0B30F6698}"/>
-              </a:ext>
-            </a:extLst>
-          </p:cNvPr>
-          <p:cNvSpPr>
-            <a:spLocks noGrp="1"/>
-          </p:cNvSpPr>
-          <p:nvPr>
-            <p:ph type="body" idx="1"/>
-          </p:nvPr>
-        </p:nvSpPr>
-        <p:spPr/>
-        <p:txBody>
-          <a:bodyPr/>
-          <a:lstStyle/>
-          <a:p>
-            <a:endParaRPr lang="en-US" dirty="0"/>
-          </a:p>
-        </p:txBody>
-      </p:sp>
-      <p:sp>
-        <p:nvSpPr>
-          <p:cNvPr id="4" name="Slide Number Placeholder 3">
-            <a:extLst>
-              <a:ext uri="{FF2B5EF4-FFF2-40B4-BE49-F238E27FC236}">
-                <a16:creationId xmlns:a16="http://schemas.microsoft.com/office/drawing/2014/main" id="{A4849810-64AC-B452-88C8-38BDAD83BD7F}"/>
-              </a:ext>
-            </a:extLst>
-          </p:cNvPr>
-          <p:cNvSpPr>
-            <a:spLocks noGrp="1"/>
-          </p:cNvSpPr>
-          <p:nvPr>
-            <p:ph type="sldNum" sz="quarter" idx="10"/>
-          </p:nvPr>
-        </p:nvSpPr>
-        <p:spPr/>
-        <p:txBody>
-          <a:bodyPr/>
-          <a:lstStyle/>
-          <a:p>
-            <a:fld id="{F7021451-1387-4CA6-816F-3879F97B5CBC}" type="slidenum">
-              <a:rPr lang="en-US"/>
-              <a:t>11</a:t>
-            </a:fld>
-            <a:endParaRPr lang="en-US"/>
-          </a:p>
-        </p:txBody>
-      </p:sp>
-    </p:spTree>
-    <p:extLst>
-      <p:ext uri="{BB962C8B-B14F-4D97-AF65-F5344CB8AC3E}">
-        <p14:creationId xmlns:p14="http://schemas.microsoft.com/office/powerpoint/2010/main" val="2650853933"/>
       </p:ext>
     </p:extLst>
   </p:cSld>
@@ -3275,7 +3166,7 @@
                 <a:latin typeface="Noto Sans KR" pitchFamily="34" charset="0"/>
                 <a:ea typeface="Noto Sans KR" pitchFamily="34" charset="-122"/>
               </a:rPr>
-              <a:t>이 애 본</a:t>
+              <a:t>이애본</a:t>
             </a:r>
             <a:br>
               <a:rPr lang="en-US" altLang="ko-KR" sz="1500" b="1" dirty="0">
@@ -3294,7 +3185,7 @@
                 <a:latin typeface="Noto Sans KR" pitchFamily="34" charset="0"/>
                 <a:ea typeface="Noto Sans KR" pitchFamily="34" charset="-122"/>
               </a:rPr>
-              <a:t>한신대학교 </a:t>
+              <a:t>드림아이티비즈(DreamIT Biz)</a:t>
             </a:r>
             <a:r>
               <a:rPr lang="en-US" altLang="ko-KR" sz="1500" b="1" dirty="0">
@@ -3304,9 +3195,9 @@
                 <a:latin typeface="Noto Sans KR" pitchFamily="34" charset="0"/>
                 <a:ea typeface="Noto Sans KR" pitchFamily="34" charset="-122"/>
               </a:rPr>
-              <a:t>AI.SW</a:t>
-            </a:r>
-            <a:r>
+              <a:t/>
+            </a:r>
+            <a:br>
               <a:rPr lang="ko-KR" altLang="en-US" sz="1500" b="1" dirty="0">
                 <a:solidFill>
                   <a:srgbClr val="FFFFFF"/>
@@ -3314,8 +3205,7 @@
                 <a:latin typeface="Noto Sans KR" pitchFamily="34" charset="0"/>
                 <a:ea typeface="Noto Sans KR" pitchFamily="34" charset="-122"/>
               </a:rPr>
-              <a:t>대학 </a:t>
-            </a:r>
+            </a:br>
             <a:r>
               <a:rPr lang="en-US" altLang="ko-KR" sz="1500" b="1" dirty="0">
                 <a:solidFill>
@@ -3325,7 +3215,7 @@
                 <a:ea typeface="Noto Sans KR" pitchFamily="34" charset="-122"/>
                 <a:hlinkClick r:id="rId8"/>
               </a:rPr>
-              <a:t>aebon@hs.ac.kr</a:t>
+              <a:t>aebon@dreamitbiz.com</a:t>
             </a:r>
             <a:r>
               <a:rPr lang="ko-KR" altLang="en-US" sz="1500" b="1" dirty="0">
@@ -3381,7 +3271,7 @@
                 </a:solidFill>
                 <a:latin typeface="Pretendard"/>
               </a:rPr>
-              <a:t>© 2026 이애본(드림아이티비즈) · useful-ai.dreamitbiz.com · 교육 목적 비영리 이용 · 출처 표기</a:t>
+              <a:t>© 2026 이애본 · 홍문원(洪文院) 발행 · CC BY-NC-ND 4.0 · useful-ai.dreamitbiz.com</a:t>
             </a:r>
           </a:p>
         </p:txBody>
@@ -5578,7 +5468,43 @@
       </p:sp>
       <p:sp>
         <p:nvSpPr>
-          <p:cNvPr id="56" name="deckgen:wrap:footer"/>
+          <p:cNvPr id="56" name="Stage3 Note"/>
+          <p:cNvSpPr txBox="1"/>
+          <p:nvPr/>
+        </p:nvSpPr>
+        <p:spPr>
+          <a:xfrm>
+            <a:off x="427482" y="4650000"/>
+            <a:ext cx="11300000" cy="500000"/>
+          </a:xfrm>
+          <a:prstGeom prst="rect">
+            <a:avLst/>
+          </a:prstGeom>
+          <a:noFill/>
+        </p:spPr>
+        <p:txBody>
+          <a:bodyPr wrap="square" lIns="0" rIns="0" tIns="0" bIns="0" anchor="t">
+            <a:spAutoFit/>
+          </a:bodyPr>
+          <a:lstStyle/>
+          <a:p>
+            <a:r>
+              <a:rPr sz="1200">
+                <a:solidFill>
+                  <a:srgbClr val="C9D1DD"/>
+                </a:solidFill>
+                <a:latin typeface="Noto Sans KR"/>
+                <a:ea typeface="Noto Sans KR"/>
+                <a:cs typeface="Noto Sans KR"/>
+              </a:rPr>
+              <a:t>디자인씽킹 6단계와의 비교는 B02 「디자인씽킹과 생성형 AI」의 「디자인씽킹 6단계 프로세스」를 참고한다. 두 과정 모두 검증·테스트에서 막히면 앞 단계로 돌아가 다시 설계한다.</a:t>
+            </a:r>
+          </a:p>
+        </p:txBody>
+      </p:sp>
+      <p:sp>
+        <p:nvSpPr>
+          <p:cNvPr id="57" name="deckgen:wrap:footer"/>
           <p:cNvSpPr txBox="1"/>
           <p:nvPr/>
         </p:nvSpPr>
@@ -5610,7 +5536,7 @@
                 </a:solidFill>
                 <a:latin typeface="Pretendard"/>
               </a:rPr>
-              <a:t>© 2026 이애본(드림아이티비즈) · useful-ai.dreamitbiz.com · 교육 목적 비영리 이용 · 출처 표기</a:t>
+              <a:t>© 2026 이애본 · 홍문원(洪文院) 발행 · CC BY-NC-ND 4.0 · useful-ai.dreamitbiz.com</a:t>
             </a:r>
           </a:p>
         </p:txBody>
@@ -5624,3838 +5550,6 @@
 </file>
 
 <file path=ppt/slides/slide11.xml><?xml version="1.0" encoding="utf-8"?>
-<p:sld xmlns:a="http://schemas.openxmlformats.org/drawingml/2006/main" xmlns:r="http://schemas.openxmlformats.org/officeDocument/2006/relationships" xmlns:p="http://schemas.openxmlformats.org/presentationml/2006/main">
-  <p:cSld>
-    <p:spTree>
-      <p:nvGrpSpPr>
-        <p:cNvPr id="1" name="">
-          <a:extLst>
-            <a:ext uri="{FF2B5EF4-FFF2-40B4-BE49-F238E27FC236}">
-              <a16:creationId xmlns:a16="http://schemas.microsoft.com/office/drawing/2014/main" id="{7513AB96-12DA-68E0-69D7-D37F8C155C6F}"/>
-            </a:ext>
-          </a:extLst>
-        </p:cNvPr>
-        <p:cNvGrpSpPr/>
-        <p:nvPr/>
-      </p:nvGrpSpPr>
-      <p:grpSpPr>
-        <a:xfrm>
-          <a:off x="0" y="0"/>
-          <a:ext cx="0" cy="0"/>
-          <a:chOff x="0" y="0"/>
-          <a:chExt cx="0" cy="0"/>
-        </a:xfrm>
-      </p:grpSpPr>
-      <p:sp>
-        <p:nvSpPr>
-          <p:cNvPr id="2" name="Shape 0">
-            <a:extLst>
-              <a:ext uri="{FF2B5EF4-FFF2-40B4-BE49-F238E27FC236}">
-                <a16:creationId xmlns:a16="http://schemas.microsoft.com/office/drawing/2014/main" id="{4D2D1490-8626-DD4E-9FDF-D315355F2BB5}"/>
-              </a:ext>
-            </a:extLst>
-          </p:cNvPr>
-          <p:cNvSpPr/>
-          <p:nvPr/>
-        </p:nvSpPr>
-        <p:spPr>
-          <a:xfrm>
-            <a:off x="0" y="0"/>
-            <a:ext cx="12191695" cy="6858000"/>
-          </a:xfrm>
-          <a:prstGeom prst="rect">
-            <a:avLst/>
-          </a:prstGeom>
-          <a:solidFill>
-            <a:srgbClr val="0F172A"/>
-          </a:solidFill>
-          <a:ln w="12700">
-            <a:solidFill>
-              <a:srgbClr val="FFFFFF">
-                <a:alpha val="0"/>
-              </a:srgbClr>
-            </a:solidFill>
-            <a:prstDash val="solid"/>
-          </a:ln>
-        </p:spPr>
-        <p:txBody>
-          <a:bodyPr/>
-          <a:lstStyle/>
-          <a:p>
-            <a:endParaRPr lang="ko-KR" altLang="en-US"/>
-          </a:p>
-        </p:txBody>
-      </p:sp>
-      <p:sp>
-        <p:nvSpPr>
-          <p:cNvPr id="3" name="Shape 1">
-            <a:extLst>
-              <a:ext uri="{FF2B5EF4-FFF2-40B4-BE49-F238E27FC236}">
-                <a16:creationId xmlns:a16="http://schemas.microsoft.com/office/drawing/2014/main" id="{E71A647C-A3C2-B5F2-F13A-7BBB67EA6C83}"/>
-              </a:ext>
-            </a:extLst>
-          </p:cNvPr>
-          <p:cNvSpPr/>
-          <p:nvPr/>
-        </p:nvSpPr>
-        <p:spPr>
-          <a:xfrm>
-            <a:off x="305" y="0"/>
-            <a:ext cx="12191695" cy="6858000"/>
-          </a:xfrm>
-          <a:prstGeom prst="rect">
-            <a:avLst/>
-          </a:prstGeom>
-          <a:solidFill>
-            <a:srgbClr val="0B1120"/>
-          </a:solidFill>
-          <a:ln w="12700">
-            <a:solidFill>
-              <a:srgbClr val="FFFFFF">
-                <a:alpha val="0"/>
-              </a:srgbClr>
-            </a:solidFill>
-            <a:prstDash val="solid"/>
-          </a:ln>
-        </p:spPr>
-        <p:txBody>
-          <a:bodyPr/>
-          <a:lstStyle/>
-          <a:p>
-            <a:endParaRPr lang="ko-KR" altLang="en-US"/>
-          </a:p>
-        </p:txBody>
-      </p:sp>
-      <p:sp>
-        <p:nvSpPr>
-          <p:cNvPr id="4" name="Text 2">
-            <a:extLst>
-              <a:ext uri="{FF2B5EF4-FFF2-40B4-BE49-F238E27FC236}">
-                <a16:creationId xmlns:a16="http://schemas.microsoft.com/office/drawing/2014/main" id="{6B68667E-F727-6462-1240-FA1C79FE6BB3}"/>
-              </a:ext>
-            </a:extLst>
-          </p:cNvPr>
-          <p:cNvSpPr txBox="1"/>
-          <p:nvPr/>
-        </p:nvSpPr>
-        <p:spPr>
-          <a:xfrm>
-            <a:off x="381305" y="381305"/>
-            <a:ext cx="2981858" cy="267005"/>
-          </a:xfrm>
-          <a:prstGeom prst="rect">
-            <a:avLst/>
-          </a:prstGeom>
-          <a:noFill/>
-          <a:ln/>
-        </p:spPr>
-        <p:txBody>
-          <a:bodyPr wrap="square" lIns="0" tIns="0" rIns="0" bIns="0" rtlCol="0" anchor="ctr"/>
-          <a:lstStyle/>
-          <a:p>
-            <a:pPr marL="0" indent="0" algn="l">
-              <a:buNone/>
-            </a:pPr>
-            <a:r>
-              <a:rPr lang="en-US" sz="1300" b="1" kern="0" spc="68" dirty="0">
-                <a:solidFill>
-                  <a:srgbClr val="FFFFFF"/>
-                </a:solidFill>
-                <a:latin typeface="Noto Sans KR" pitchFamily="34" charset="0"/>
-                <a:ea typeface="Noto Sans KR" pitchFamily="34" charset="-122"/>
-                <a:cs typeface="Noto Sans KR" pitchFamily="34" charset="-120"/>
-              </a:rPr>
-              <a:t>Assignment Design Process</a:t>
-            </a:r>
-            <a:endParaRPr lang="en-US" sz="1300" dirty="0"/>
-          </a:p>
-        </p:txBody>
-      </p:sp>
-      <p:sp>
-        <p:nvSpPr>
-          <p:cNvPr id="5" name="Text 3">
-            <a:extLst>
-              <a:ext uri="{FF2B5EF4-FFF2-40B4-BE49-F238E27FC236}">
-                <a16:creationId xmlns:a16="http://schemas.microsoft.com/office/drawing/2014/main" id="{84F222CD-D74E-B160-8D30-D1A790856738}"/>
-              </a:ext>
-            </a:extLst>
-          </p:cNvPr>
-          <p:cNvSpPr txBox="1"/>
-          <p:nvPr/>
-        </p:nvSpPr>
-        <p:spPr>
-          <a:xfrm>
-            <a:off x="381305" y="685800"/>
-            <a:ext cx="11621110" cy="342900"/>
-          </a:xfrm>
-          <a:prstGeom prst="rect">
-            <a:avLst/>
-          </a:prstGeom>
-          <a:noFill/>
-          <a:ln/>
-        </p:spPr>
-        <p:txBody>
-          <a:bodyPr wrap="square" lIns="0" tIns="0" rIns="0" bIns="0" rtlCol="0" anchor="ctr"/>
-          <a:lstStyle/>
-          <a:p>
-            <a:pPr marL="0" indent="0" algn="l">
-              <a:buNone/>
-            </a:pPr>
-            <a:r>
-              <a:rPr lang="en-US" sz="2200" b="1" dirty="0" err="1">
-                <a:solidFill>
-                  <a:srgbClr val="FFFFFF"/>
-                </a:solidFill>
-                <a:latin typeface="Noto Sans KR" pitchFamily="34" charset="0"/>
-                <a:ea typeface="Noto Sans KR" pitchFamily="34" charset="-122"/>
-                <a:cs typeface="Noto Sans KR" pitchFamily="34" charset="-120"/>
-              </a:rPr>
-              <a:t>과제설계</a:t>
-            </a:r>
-            <a:r>
-              <a:rPr lang="en-US" sz="2200" b="1" dirty="0">
-                <a:solidFill>
-                  <a:srgbClr val="FFFFFF"/>
-                </a:solidFill>
-                <a:latin typeface="Noto Sans KR" pitchFamily="34" charset="0"/>
-                <a:ea typeface="Noto Sans KR" pitchFamily="34" charset="-122"/>
-                <a:cs typeface="Noto Sans KR" pitchFamily="34" charset="-120"/>
-              </a:rPr>
-              <a:t> </a:t>
-            </a:r>
-            <a:r>
-              <a:rPr lang="en-US" sz="2200" b="1" dirty="0" err="1">
-                <a:solidFill>
-                  <a:srgbClr val="FFFFFF"/>
-                </a:solidFill>
-                <a:latin typeface="Noto Sans KR" pitchFamily="34" charset="0"/>
-                <a:ea typeface="Noto Sans KR" pitchFamily="34" charset="-122"/>
-                <a:cs typeface="Noto Sans KR" pitchFamily="34" charset="-120"/>
-              </a:rPr>
-              <a:t>프로세스</a:t>
-            </a:r>
-            <a:r>
-              <a:rPr lang="en-US" sz="2200" b="1" dirty="0">
-                <a:solidFill>
-                  <a:srgbClr val="FFFFFF"/>
-                </a:solidFill>
-                <a:latin typeface="Noto Sans KR" pitchFamily="34" charset="0"/>
-                <a:ea typeface="Noto Sans KR" pitchFamily="34" charset="-122"/>
-                <a:cs typeface="Noto Sans KR" pitchFamily="34" charset="-120"/>
-              </a:rPr>
-              <a:t> - CT 6단계</a:t>
-            </a:r>
-            <a:r>
-              <a:rPr lang="ko-KR" altLang="en-US" sz="2200" b="1" dirty="0">
-                <a:solidFill>
-                  <a:srgbClr val="FFFFFF"/>
-                </a:solidFill>
-                <a:latin typeface="Noto Sans KR" pitchFamily="34" charset="0"/>
-                <a:ea typeface="Noto Sans KR" pitchFamily="34" charset="-122"/>
-                <a:cs typeface="Noto Sans KR" pitchFamily="34" charset="-120"/>
-              </a:rPr>
-              <a:t>와 </a:t>
-            </a:r>
-            <a:r>
-              <a:rPr lang="ko-KR" altLang="en-US" sz="2200" b="1" dirty="0" err="1">
-                <a:solidFill>
-                  <a:srgbClr val="FFFFFF"/>
-                </a:solidFill>
-                <a:latin typeface="Noto Sans KR" pitchFamily="34" charset="0"/>
-                <a:ea typeface="Noto Sans KR" pitchFamily="34" charset="-122"/>
-                <a:cs typeface="Noto Sans KR" pitchFamily="34" charset="-120"/>
-              </a:rPr>
-              <a:t>디자인씽킹</a:t>
-            </a:r>
-            <a:r>
-              <a:rPr lang="ko-KR" altLang="en-US" sz="2200" b="1" dirty="0">
-                <a:solidFill>
-                  <a:srgbClr val="FFFFFF"/>
-                </a:solidFill>
-                <a:latin typeface="Noto Sans KR" pitchFamily="34" charset="0"/>
-                <a:ea typeface="Noto Sans KR" pitchFamily="34" charset="-122"/>
-                <a:cs typeface="Noto Sans KR" pitchFamily="34" charset="-120"/>
-              </a:rPr>
-              <a:t> 비교</a:t>
-            </a:r>
-            <a:endParaRPr lang="en-US" sz="2200" dirty="0"/>
-          </a:p>
-        </p:txBody>
-      </p:sp>
-      <p:sp>
-        <p:nvSpPr>
-          <p:cNvPr id="6" name="Shape 4">
-            <a:extLst>
-              <a:ext uri="{FF2B5EF4-FFF2-40B4-BE49-F238E27FC236}">
-                <a16:creationId xmlns:a16="http://schemas.microsoft.com/office/drawing/2014/main" id="{79EFCB86-9985-C92F-DB70-0B4136B7F97E}"/>
-              </a:ext>
-            </a:extLst>
-          </p:cNvPr>
-          <p:cNvSpPr/>
-          <p:nvPr/>
-        </p:nvSpPr>
-        <p:spPr>
-          <a:xfrm>
-            <a:off x="381305" y="1143000"/>
-            <a:ext cx="761695" cy="38405"/>
-          </a:xfrm>
-          <a:prstGeom prst="rect">
-            <a:avLst/>
-          </a:prstGeom>
-          <a:solidFill>
-            <a:srgbClr val="38BDF8"/>
-          </a:solidFill>
-          <a:ln w="12700">
-            <a:solidFill>
-              <a:srgbClr val="FFFFFF">
-                <a:alpha val="0"/>
-              </a:srgbClr>
-            </a:solidFill>
-            <a:prstDash val="solid"/>
-          </a:ln>
-        </p:spPr>
-        <p:txBody>
-          <a:bodyPr/>
-          <a:lstStyle/>
-          <a:p>
-            <a:endParaRPr lang="ko-KR" altLang="en-US"/>
-          </a:p>
-        </p:txBody>
-      </p:sp>
-      <p:sp>
-        <p:nvSpPr>
-          <p:cNvPr id="7" name="Shape 5">
-            <a:extLst>
-              <a:ext uri="{FF2B5EF4-FFF2-40B4-BE49-F238E27FC236}">
-                <a16:creationId xmlns:a16="http://schemas.microsoft.com/office/drawing/2014/main" id="{213609FC-E7F5-8F97-DD11-C9573922C427}"/>
-              </a:ext>
-            </a:extLst>
-          </p:cNvPr>
-          <p:cNvSpPr/>
-          <p:nvPr/>
-        </p:nvSpPr>
-        <p:spPr>
-          <a:xfrm>
-            <a:off x="953720" y="1536014"/>
-            <a:ext cx="10287000" cy="38405"/>
-          </a:xfrm>
-          <a:prstGeom prst="rect">
-            <a:avLst/>
-          </a:prstGeom>
-          <a:solidFill>
-            <a:srgbClr val="1E293B"/>
-          </a:solidFill>
-          <a:ln w="12700">
-            <a:solidFill>
-              <a:srgbClr val="FFFFFF">
-                <a:alpha val="0"/>
-              </a:srgbClr>
-            </a:solidFill>
-            <a:prstDash val="solid"/>
-          </a:ln>
-        </p:spPr>
-        <p:txBody>
-          <a:bodyPr/>
-          <a:lstStyle/>
-          <a:p>
-            <a:pPr>
-              <a:lnSpc>
-                <a:spcPct val="200000"/>
-              </a:lnSpc>
-            </a:pPr>
-            <a:endParaRPr lang="ko-KR" altLang="en-US" sz="3200"/>
-          </a:p>
-        </p:txBody>
-      </p:sp>
-      <p:sp>
-        <p:nvSpPr>
-          <p:cNvPr id="26" name="Shape 19">
-            <a:extLst>
-              <a:ext uri="{FF2B5EF4-FFF2-40B4-BE49-F238E27FC236}">
-                <a16:creationId xmlns:a16="http://schemas.microsoft.com/office/drawing/2014/main" id="{6A044204-C98A-1EDD-EA53-9434519EF9F6}"/>
-              </a:ext>
-            </a:extLst>
-          </p:cNvPr>
-          <p:cNvSpPr/>
-          <p:nvPr/>
-        </p:nvSpPr>
-        <p:spPr>
-          <a:xfrm>
-            <a:off x="876910" y="1383309"/>
-            <a:ext cx="609905" cy="609905"/>
-          </a:xfrm>
-          <a:prstGeom prst="ellipse">
-            <a:avLst/>
-          </a:prstGeom>
-          <a:solidFill>
-            <a:srgbClr val="0F172A"/>
-          </a:solidFill>
-          <a:ln w="38100">
-            <a:solidFill>
-              <a:srgbClr val="38BDF8"/>
-            </a:solidFill>
-            <a:prstDash val="solid"/>
-          </a:ln>
-          <a:effectLst>
-            <a:outerShdw blurRad="63500" dist="38100" dir="16200000" algn="bl" rotWithShape="0">
-              <a:srgbClr val="000000">
-                <a:alpha val="50000"/>
-              </a:srgbClr>
-            </a:outerShdw>
-          </a:effectLst>
-        </p:spPr>
-        <p:txBody>
-          <a:bodyPr/>
-          <a:lstStyle/>
-          <a:p>
-            <a:pPr>
-              <a:lnSpc>
-                <a:spcPct val="200000"/>
-              </a:lnSpc>
-            </a:pPr>
-            <a:endParaRPr lang="ko-KR" altLang="en-US" sz="3200"/>
-          </a:p>
-        </p:txBody>
-      </p:sp>
-      <p:sp>
-        <p:nvSpPr>
-          <p:cNvPr id="27" name="Shape 20">
-            <a:extLst>
-              <a:ext uri="{FF2B5EF4-FFF2-40B4-BE49-F238E27FC236}">
-                <a16:creationId xmlns:a16="http://schemas.microsoft.com/office/drawing/2014/main" id="{62008172-61B5-C892-6ADA-55704B7BA70D}"/>
-              </a:ext>
-            </a:extLst>
-          </p:cNvPr>
-          <p:cNvSpPr/>
-          <p:nvPr/>
-        </p:nvSpPr>
-        <p:spPr>
-          <a:xfrm>
-            <a:off x="382220" y="2145004"/>
-            <a:ext cx="1600200" cy="1333195"/>
-          </a:xfrm>
-          <a:prstGeom prst="roundRect">
-            <a:avLst>
-              <a:gd name="adj" fmla="val 5879"/>
-            </a:avLst>
-          </a:prstGeom>
-          <a:solidFill>
-            <a:srgbClr val="1E293B"/>
-          </a:solidFill>
-          <a:ln w="12700">
-            <a:solidFill>
-              <a:srgbClr val="334155"/>
-            </a:solidFill>
-            <a:prstDash val="solid"/>
-          </a:ln>
-        </p:spPr>
-        <p:txBody>
-          <a:bodyPr/>
-          <a:lstStyle/>
-          <a:p>
-            <a:pPr>
-              <a:lnSpc>
-                <a:spcPct val="200000"/>
-              </a:lnSpc>
-            </a:pPr>
-            <a:endParaRPr lang="ko-KR" altLang="en-US" sz="3200"/>
-          </a:p>
-        </p:txBody>
-      </p:sp>
-      <p:sp>
-        <p:nvSpPr>
-          <p:cNvPr id="28" name="Text 21">
-            <a:extLst>
-              <a:ext uri="{FF2B5EF4-FFF2-40B4-BE49-F238E27FC236}">
-                <a16:creationId xmlns:a16="http://schemas.microsoft.com/office/drawing/2014/main" id="{60F8A99D-4807-8E74-07C7-2E6C0036A74C}"/>
-              </a:ext>
-            </a:extLst>
-          </p:cNvPr>
-          <p:cNvSpPr txBox="1"/>
-          <p:nvPr/>
-        </p:nvSpPr>
-        <p:spPr>
-          <a:xfrm>
-            <a:off x="451714" y="2269363"/>
-            <a:ext cx="1461211" cy="228600"/>
-          </a:xfrm>
-          <a:prstGeom prst="rect">
-            <a:avLst/>
-          </a:prstGeom>
-          <a:noFill/>
-          <a:ln/>
-        </p:spPr>
-        <p:txBody>
-          <a:bodyPr wrap="square" lIns="0" tIns="0" rIns="0" bIns="0" rtlCol="0" anchor="ctr"/>
-          <a:lstStyle/>
-          <a:p>
-            <a:pPr marL="0" indent="0" algn="ctr">
-              <a:lnSpc>
-                <a:spcPct val="200000"/>
-              </a:lnSpc>
-              <a:buNone/>
-            </a:pPr>
-            <a:r>
-              <a:rPr lang="en-US" sz="2000" b="1" dirty="0">
-                <a:solidFill>
-                  <a:srgbClr val="FFFFFF"/>
-                </a:solidFill>
-                <a:latin typeface="Noto Sans KR" pitchFamily="34" charset="0"/>
-                <a:ea typeface="Noto Sans KR" pitchFamily="34" charset="-122"/>
-                <a:cs typeface="Noto Sans KR" pitchFamily="34" charset="-120"/>
-              </a:rPr>
-              <a:t>문제 정의</a:t>
-            </a:r>
-            <a:endParaRPr lang="en-US" sz="2000" dirty="0"/>
-          </a:p>
-        </p:txBody>
-      </p:sp>
-      <p:sp>
-        <p:nvSpPr>
-          <p:cNvPr id="29" name="Text 22">
-            <a:extLst>
-              <a:ext uri="{FF2B5EF4-FFF2-40B4-BE49-F238E27FC236}">
-                <a16:creationId xmlns:a16="http://schemas.microsoft.com/office/drawing/2014/main" id="{03817147-56FB-3A37-EC3B-05BFA498DFC7}"/>
-              </a:ext>
-            </a:extLst>
-          </p:cNvPr>
-          <p:cNvSpPr txBox="1"/>
-          <p:nvPr/>
-        </p:nvSpPr>
-        <p:spPr>
-          <a:xfrm>
-            <a:off x="467259" y="2720819"/>
-            <a:ext cx="1429207" cy="781812"/>
-          </a:xfrm>
-          <a:prstGeom prst="rect">
-            <a:avLst/>
-          </a:prstGeom>
-          <a:noFill/>
-          <a:ln/>
-        </p:spPr>
-        <p:txBody>
-          <a:bodyPr wrap="square" lIns="0" tIns="0" rIns="0" bIns="0" rtlCol="0" anchor="t"/>
-          <a:lstStyle/>
-          <a:p>
-            <a:pPr marL="0" indent="0" algn="ctr">
-              <a:lnSpc>
-                <a:spcPct val="150000"/>
-              </a:lnSpc>
-              <a:buNone/>
-            </a:pPr>
-            <a:r>
-              <a:rPr lang="en-US" sz="1200" dirty="0">
-                <a:solidFill>
-                  <a:srgbClr val="E2E8F0"/>
-                </a:solidFill>
-                <a:latin typeface="Noto Sans KR" pitchFamily="34" charset="0"/>
-                <a:ea typeface="Noto Sans KR" pitchFamily="34" charset="-122"/>
-                <a:cs typeface="Noto Sans KR" pitchFamily="34" charset="-120"/>
-              </a:rPr>
-              <a:t>목표, 성공기준,</a:t>
-            </a:r>
-            <a:endParaRPr lang="en-US" sz="1200" dirty="0"/>
-          </a:p>
-          <a:p>
-            <a:pPr marL="0" indent="0" algn="ctr">
-              <a:lnSpc>
-                <a:spcPct val="150000"/>
-              </a:lnSpc>
-              <a:buNone/>
-            </a:pPr>
-            <a:r>
-              <a:rPr lang="en-US" sz="1200" dirty="0">
-                <a:solidFill>
-                  <a:srgbClr val="E2E8F0"/>
-                </a:solidFill>
-                <a:latin typeface="Noto Sans KR" pitchFamily="34" charset="0"/>
-                <a:ea typeface="Noto Sans KR" pitchFamily="34" charset="-122"/>
-                <a:cs typeface="Noto Sans KR" pitchFamily="34" charset="-120"/>
-              </a:rPr>
-              <a:t>제약사항 명확화</a:t>
-            </a:r>
-            <a:endParaRPr lang="en-US" sz="1200" dirty="0"/>
-          </a:p>
-        </p:txBody>
-      </p:sp>
-      <p:sp>
-        <p:nvSpPr>
-          <p:cNvPr id="30" name="Text 23">
-            <a:extLst>
-              <a:ext uri="{FF2B5EF4-FFF2-40B4-BE49-F238E27FC236}">
-                <a16:creationId xmlns:a16="http://schemas.microsoft.com/office/drawing/2014/main" id="{BB5BBB92-25FB-C56E-AFEA-F44DEB2BCD75}"/>
-              </a:ext>
-            </a:extLst>
-          </p:cNvPr>
-          <p:cNvSpPr txBox="1"/>
-          <p:nvPr/>
-        </p:nvSpPr>
-        <p:spPr>
-          <a:xfrm>
-            <a:off x="1085697" y="1436302"/>
-            <a:ext cx="200254" cy="277063"/>
-          </a:xfrm>
-          <a:prstGeom prst="rect">
-            <a:avLst/>
-          </a:prstGeom>
-          <a:noFill/>
-          <a:ln/>
-        </p:spPr>
-        <p:txBody>
-          <a:bodyPr wrap="square" lIns="0" tIns="0" rIns="0" bIns="0" rtlCol="0" anchor="ctr"/>
-          <a:lstStyle/>
-          <a:p>
-            <a:pPr marL="0" indent="0" algn="l">
-              <a:lnSpc>
-                <a:spcPct val="200000"/>
-              </a:lnSpc>
-              <a:buNone/>
-            </a:pPr>
-            <a:r>
-              <a:rPr lang="en-US" sz="2400" b="1" dirty="0">
-                <a:solidFill>
-                  <a:srgbClr val="38BDF8"/>
-                </a:solidFill>
-                <a:latin typeface="Noto Sans KR" pitchFamily="34" charset="0"/>
-                <a:ea typeface="Noto Sans KR" pitchFamily="34" charset="-122"/>
-                <a:cs typeface="Noto Sans KR" pitchFamily="34" charset="-120"/>
-              </a:rPr>
-              <a:t>1</a:t>
-            </a:r>
-            <a:endParaRPr lang="en-US" sz="2400" dirty="0"/>
-          </a:p>
-        </p:txBody>
-      </p:sp>
-      <p:sp>
-        <p:nvSpPr>
-          <p:cNvPr id="31" name="Shape 24">
-            <a:extLst>
-              <a:ext uri="{FF2B5EF4-FFF2-40B4-BE49-F238E27FC236}">
-                <a16:creationId xmlns:a16="http://schemas.microsoft.com/office/drawing/2014/main" id="{579BF2BE-7162-9D29-EE3F-4DB58B90AA20}"/>
-              </a:ext>
-            </a:extLst>
-          </p:cNvPr>
-          <p:cNvSpPr/>
-          <p:nvPr/>
-        </p:nvSpPr>
-        <p:spPr>
-          <a:xfrm>
-            <a:off x="2842870" y="1383309"/>
-            <a:ext cx="609905" cy="609905"/>
-          </a:xfrm>
-          <a:prstGeom prst="ellipse">
-            <a:avLst/>
-          </a:prstGeom>
-          <a:solidFill>
-            <a:srgbClr val="0F172A"/>
-          </a:solidFill>
-          <a:ln w="38100">
-            <a:solidFill>
-              <a:srgbClr val="38BDF8"/>
-            </a:solidFill>
-            <a:prstDash val="solid"/>
-          </a:ln>
-          <a:effectLst>
-            <a:outerShdw blurRad="63500" dist="38100" dir="16200000" algn="bl" rotWithShape="0">
-              <a:srgbClr val="000000">
-                <a:alpha val="50000"/>
-              </a:srgbClr>
-            </a:outerShdw>
-          </a:effectLst>
-        </p:spPr>
-        <p:txBody>
-          <a:bodyPr/>
-          <a:lstStyle/>
-          <a:p>
-            <a:pPr>
-              <a:lnSpc>
-                <a:spcPct val="200000"/>
-              </a:lnSpc>
-            </a:pPr>
-            <a:endParaRPr lang="ko-KR" altLang="en-US" sz="3200"/>
-          </a:p>
-        </p:txBody>
-      </p:sp>
-      <p:sp>
-        <p:nvSpPr>
-          <p:cNvPr id="32" name="Shape 25">
-            <a:extLst>
-              <a:ext uri="{FF2B5EF4-FFF2-40B4-BE49-F238E27FC236}">
-                <a16:creationId xmlns:a16="http://schemas.microsoft.com/office/drawing/2014/main" id="{4898E171-2A70-C392-3E04-65042F86EE38}"/>
-              </a:ext>
-            </a:extLst>
-          </p:cNvPr>
-          <p:cNvSpPr/>
-          <p:nvPr/>
-        </p:nvSpPr>
-        <p:spPr>
-          <a:xfrm>
-            <a:off x="2348180" y="2145004"/>
-            <a:ext cx="1600200" cy="1333195"/>
-          </a:xfrm>
-          <a:prstGeom prst="roundRect">
-            <a:avLst>
-              <a:gd name="adj" fmla="val 5879"/>
-            </a:avLst>
-          </a:prstGeom>
-          <a:solidFill>
-            <a:srgbClr val="1E293B"/>
-          </a:solidFill>
-          <a:ln w="12700">
-            <a:solidFill>
-              <a:srgbClr val="334155"/>
-            </a:solidFill>
-            <a:prstDash val="solid"/>
-          </a:ln>
-        </p:spPr>
-        <p:txBody>
-          <a:bodyPr/>
-          <a:lstStyle/>
-          <a:p>
-            <a:pPr>
-              <a:lnSpc>
-                <a:spcPct val="200000"/>
-              </a:lnSpc>
-            </a:pPr>
-            <a:endParaRPr lang="ko-KR" altLang="en-US" sz="3200"/>
-          </a:p>
-        </p:txBody>
-      </p:sp>
-      <p:sp>
-        <p:nvSpPr>
-          <p:cNvPr id="33" name="Text 26">
-            <a:extLst>
-              <a:ext uri="{FF2B5EF4-FFF2-40B4-BE49-F238E27FC236}">
-                <a16:creationId xmlns:a16="http://schemas.microsoft.com/office/drawing/2014/main" id="{413ED903-9AA2-C296-3CA3-42992049496A}"/>
-              </a:ext>
-            </a:extLst>
-          </p:cNvPr>
-          <p:cNvSpPr txBox="1"/>
-          <p:nvPr/>
-        </p:nvSpPr>
-        <p:spPr>
-          <a:xfrm>
-            <a:off x="2417674" y="2269363"/>
-            <a:ext cx="1461211" cy="228600"/>
-          </a:xfrm>
-          <a:prstGeom prst="rect">
-            <a:avLst/>
-          </a:prstGeom>
-          <a:noFill/>
-          <a:ln/>
-        </p:spPr>
-        <p:txBody>
-          <a:bodyPr wrap="square" lIns="0" tIns="0" rIns="0" bIns="0" rtlCol="0" anchor="ctr"/>
-          <a:lstStyle/>
-          <a:p>
-            <a:pPr marL="0" indent="0" algn="ctr">
-              <a:lnSpc>
-                <a:spcPct val="200000"/>
-              </a:lnSpc>
-              <a:buNone/>
-            </a:pPr>
-            <a:r>
-              <a:rPr lang="en-US" sz="2000" b="1" dirty="0">
-                <a:solidFill>
-                  <a:srgbClr val="FFFFFF"/>
-                </a:solidFill>
-                <a:latin typeface="Noto Sans KR" pitchFamily="34" charset="0"/>
-                <a:ea typeface="Noto Sans KR" pitchFamily="34" charset="-122"/>
-                <a:cs typeface="Noto Sans KR" pitchFamily="34" charset="-120"/>
-              </a:rPr>
-              <a:t>분해</a:t>
-            </a:r>
-            <a:endParaRPr lang="en-US" sz="2000" dirty="0"/>
-          </a:p>
-        </p:txBody>
-      </p:sp>
-      <p:sp>
-        <p:nvSpPr>
-          <p:cNvPr id="34" name="Text 27">
-            <a:extLst>
-              <a:ext uri="{FF2B5EF4-FFF2-40B4-BE49-F238E27FC236}">
-                <a16:creationId xmlns:a16="http://schemas.microsoft.com/office/drawing/2014/main" id="{9C607595-F93F-EBFF-EDCE-25B277791091}"/>
-              </a:ext>
-            </a:extLst>
-          </p:cNvPr>
-          <p:cNvSpPr txBox="1"/>
-          <p:nvPr/>
-        </p:nvSpPr>
-        <p:spPr>
-          <a:xfrm>
-            <a:off x="2433219" y="2720819"/>
-            <a:ext cx="1429207" cy="781812"/>
-          </a:xfrm>
-          <a:prstGeom prst="rect">
-            <a:avLst/>
-          </a:prstGeom>
-          <a:noFill/>
-          <a:ln/>
-        </p:spPr>
-        <p:txBody>
-          <a:bodyPr wrap="square" lIns="0" tIns="0" rIns="0" bIns="0" rtlCol="0" anchor="t"/>
-          <a:lstStyle/>
-          <a:p>
-            <a:pPr marL="0" indent="0" algn="ctr">
-              <a:lnSpc>
-                <a:spcPct val="150000"/>
-              </a:lnSpc>
-              <a:buNone/>
-            </a:pPr>
-            <a:r>
-              <a:rPr lang="en-US" sz="1200" dirty="0">
-                <a:solidFill>
-                  <a:srgbClr val="E2E8F0"/>
-                </a:solidFill>
-                <a:latin typeface="Noto Sans KR" pitchFamily="34" charset="0"/>
-                <a:ea typeface="Noto Sans KR" pitchFamily="34" charset="-122"/>
-                <a:cs typeface="Noto Sans KR" pitchFamily="34" charset="-120"/>
-              </a:rPr>
-              <a:t>하위 과업 식별,</a:t>
-            </a:r>
-            <a:endParaRPr lang="en-US" sz="1200" dirty="0"/>
-          </a:p>
-          <a:p>
-            <a:pPr marL="0" indent="0" algn="ctr">
-              <a:lnSpc>
-                <a:spcPct val="150000"/>
-              </a:lnSpc>
-              <a:buNone/>
-            </a:pPr>
-            <a:r>
-              <a:rPr lang="en-US" sz="1200" dirty="0">
-                <a:solidFill>
-                  <a:srgbClr val="E2E8F0"/>
-                </a:solidFill>
-                <a:latin typeface="Noto Sans KR" pitchFamily="34" charset="0"/>
-                <a:ea typeface="Noto Sans KR" pitchFamily="34" charset="-122"/>
-                <a:cs typeface="Noto Sans KR" pitchFamily="34" charset="-120"/>
-              </a:rPr>
-              <a:t>데이터 구분</a:t>
-            </a:r>
-            <a:endParaRPr lang="en-US" sz="1200" dirty="0"/>
-          </a:p>
-        </p:txBody>
-      </p:sp>
-      <p:sp>
-        <p:nvSpPr>
-          <p:cNvPr id="35" name="Text 28">
-            <a:extLst>
-              <a:ext uri="{FF2B5EF4-FFF2-40B4-BE49-F238E27FC236}">
-                <a16:creationId xmlns:a16="http://schemas.microsoft.com/office/drawing/2014/main" id="{F0D0A001-06B0-7787-C04C-7CB0A981A93E}"/>
-              </a:ext>
-            </a:extLst>
-          </p:cNvPr>
-          <p:cNvSpPr txBox="1"/>
-          <p:nvPr/>
-        </p:nvSpPr>
-        <p:spPr>
-          <a:xfrm>
-            <a:off x="3051657" y="1436302"/>
-            <a:ext cx="200254" cy="277063"/>
-          </a:xfrm>
-          <a:prstGeom prst="rect">
-            <a:avLst/>
-          </a:prstGeom>
-          <a:noFill/>
-          <a:ln/>
-        </p:spPr>
-        <p:txBody>
-          <a:bodyPr wrap="square" lIns="0" tIns="0" rIns="0" bIns="0" rtlCol="0" anchor="ctr"/>
-          <a:lstStyle/>
-          <a:p>
-            <a:pPr marL="0" indent="0" algn="l">
-              <a:lnSpc>
-                <a:spcPct val="200000"/>
-              </a:lnSpc>
-              <a:buNone/>
-            </a:pPr>
-            <a:r>
-              <a:rPr lang="en-US" sz="2400" b="1" dirty="0">
-                <a:solidFill>
-                  <a:srgbClr val="38BDF8"/>
-                </a:solidFill>
-                <a:latin typeface="Noto Sans KR" pitchFamily="34" charset="0"/>
-                <a:ea typeface="Noto Sans KR" pitchFamily="34" charset="-122"/>
-                <a:cs typeface="Noto Sans KR" pitchFamily="34" charset="-120"/>
-              </a:rPr>
-              <a:t>2</a:t>
-            </a:r>
-            <a:endParaRPr lang="en-US" sz="2400" dirty="0"/>
-          </a:p>
-        </p:txBody>
-      </p:sp>
-      <p:sp>
-        <p:nvSpPr>
-          <p:cNvPr id="36" name="Shape 29">
-            <a:extLst>
-              <a:ext uri="{FF2B5EF4-FFF2-40B4-BE49-F238E27FC236}">
-                <a16:creationId xmlns:a16="http://schemas.microsoft.com/office/drawing/2014/main" id="{5387EBA6-F363-9A0F-31C2-F3856BD28B33}"/>
-              </a:ext>
-            </a:extLst>
-          </p:cNvPr>
-          <p:cNvSpPr/>
-          <p:nvPr/>
-        </p:nvSpPr>
-        <p:spPr>
-          <a:xfrm>
-            <a:off x="4808830" y="1383309"/>
-            <a:ext cx="609905" cy="609905"/>
-          </a:xfrm>
-          <a:prstGeom prst="ellipse">
-            <a:avLst/>
-          </a:prstGeom>
-          <a:solidFill>
-            <a:srgbClr val="0F172A"/>
-          </a:solidFill>
-          <a:ln w="38100">
-            <a:solidFill>
-              <a:srgbClr val="38BDF8"/>
-            </a:solidFill>
-            <a:prstDash val="solid"/>
-          </a:ln>
-          <a:effectLst>
-            <a:outerShdw blurRad="63500" dist="38100" dir="16200000" algn="bl" rotWithShape="0">
-              <a:srgbClr val="000000">
-                <a:alpha val="50000"/>
-              </a:srgbClr>
-            </a:outerShdw>
-          </a:effectLst>
-        </p:spPr>
-        <p:txBody>
-          <a:bodyPr/>
-          <a:lstStyle/>
-          <a:p>
-            <a:pPr>
-              <a:lnSpc>
-                <a:spcPct val="200000"/>
-              </a:lnSpc>
-            </a:pPr>
-            <a:endParaRPr lang="ko-KR" altLang="en-US" sz="3200"/>
-          </a:p>
-        </p:txBody>
-      </p:sp>
-      <p:sp>
-        <p:nvSpPr>
-          <p:cNvPr id="37" name="Shape 30">
-            <a:extLst>
-              <a:ext uri="{FF2B5EF4-FFF2-40B4-BE49-F238E27FC236}">
-                <a16:creationId xmlns:a16="http://schemas.microsoft.com/office/drawing/2014/main" id="{4C3B2E5F-C4F7-DE0C-0E92-1375409CA9A1}"/>
-              </a:ext>
-            </a:extLst>
-          </p:cNvPr>
-          <p:cNvSpPr/>
-          <p:nvPr/>
-        </p:nvSpPr>
-        <p:spPr>
-          <a:xfrm>
-            <a:off x="4313225" y="2145004"/>
-            <a:ext cx="1600200" cy="1333195"/>
-          </a:xfrm>
-          <a:prstGeom prst="roundRect">
-            <a:avLst>
-              <a:gd name="adj" fmla="val 5879"/>
-            </a:avLst>
-          </a:prstGeom>
-          <a:solidFill>
-            <a:srgbClr val="1E293B"/>
-          </a:solidFill>
-          <a:ln w="12700">
-            <a:solidFill>
-              <a:srgbClr val="334155"/>
-            </a:solidFill>
-            <a:prstDash val="solid"/>
-          </a:ln>
-        </p:spPr>
-        <p:txBody>
-          <a:bodyPr/>
-          <a:lstStyle/>
-          <a:p>
-            <a:pPr>
-              <a:lnSpc>
-                <a:spcPct val="200000"/>
-              </a:lnSpc>
-            </a:pPr>
-            <a:endParaRPr lang="ko-KR" altLang="en-US" sz="3200"/>
-          </a:p>
-        </p:txBody>
-      </p:sp>
-      <p:sp>
-        <p:nvSpPr>
-          <p:cNvPr id="38" name="Text 31">
-            <a:extLst>
-              <a:ext uri="{FF2B5EF4-FFF2-40B4-BE49-F238E27FC236}">
-                <a16:creationId xmlns:a16="http://schemas.microsoft.com/office/drawing/2014/main" id="{A74C04A7-0873-FBED-4812-A4EC7162C09B}"/>
-              </a:ext>
-            </a:extLst>
-          </p:cNvPr>
-          <p:cNvSpPr txBox="1"/>
-          <p:nvPr/>
-        </p:nvSpPr>
-        <p:spPr>
-          <a:xfrm>
-            <a:off x="4383634" y="2269363"/>
-            <a:ext cx="1461211" cy="228600"/>
-          </a:xfrm>
-          <a:prstGeom prst="rect">
-            <a:avLst/>
-          </a:prstGeom>
-          <a:noFill/>
-          <a:ln/>
-        </p:spPr>
-        <p:txBody>
-          <a:bodyPr wrap="square" lIns="0" tIns="0" rIns="0" bIns="0" rtlCol="0" anchor="ctr"/>
-          <a:lstStyle/>
-          <a:p>
-            <a:pPr marL="0" indent="0" algn="ctr">
-              <a:lnSpc>
-                <a:spcPct val="200000"/>
-              </a:lnSpc>
-              <a:buNone/>
-            </a:pPr>
-            <a:r>
-              <a:rPr lang="en-US" sz="2000" b="1" dirty="0">
-                <a:solidFill>
-                  <a:srgbClr val="FFFFFF"/>
-                </a:solidFill>
-                <a:latin typeface="Noto Sans KR" pitchFamily="34" charset="0"/>
-                <a:ea typeface="Noto Sans KR" pitchFamily="34" charset="-122"/>
-                <a:cs typeface="Noto Sans KR" pitchFamily="34" charset="-120"/>
-              </a:rPr>
-              <a:t>패턴 인식</a:t>
-            </a:r>
-            <a:endParaRPr lang="en-US" sz="2000" dirty="0"/>
-          </a:p>
-        </p:txBody>
-      </p:sp>
-      <p:sp>
-        <p:nvSpPr>
-          <p:cNvPr id="39" name="Text 32">
-            <a:extLst>
-              <a:ext uri="{FF2B5EF4-FFF2-40B4-BE49-F238E27FC236}">
-                <a16:creationId xmlns:a16="http://schemas.microsoft.com/office/drawing/2014/main" id="{FF0CA59F-FA4C-1F06-6EC8-27846CDFFF48}"/>
-              </a:ext>
-            </a:extLst>
-          </p:cNvPr>
-          <p:cNvSpPr txBox="1"/>
-          <p:nvPr/>
-        </p:nvSpPr>
-        <p:spPr>
-          <a:xfrm>
-            <a:off x="4399179" y="2720819"/>
-            <a:ext cx="1429207" cy="781812"/>
-          </a:xfrm>
-          <a:prstGeom prst="rect">
-            <a:avLst/>
-          </a:prstGeom>
-          <a:noFill/>
-          <a:ln/>
-        </p:spPr>
-        <p:txBody>
-          <a:bodyPr wrap="square" lIns="0" tIns="0" rIns="0" bIns="0" rtlCol="0" anchor="t"/>
-          <a:lstStyle/>
-          <a:p>
-            <a:pPr marL="0" indent="0" algn="ctr">
-              <a:lnSpc>
-                <a:spcPct val="150000"/>
-              </a:lnSpc>
-              <a:buNone/>
-            </a:pPr>
-            <a:r>
-              <a:rPr lang="en-US" sz="1200" dirty="0">
-                <a:solidFill>
-                  <a:srgbClr val="E2E8F0"/>
-                </a:solidFill>
-                <a:latin typeface="Noto Sans KR" pitchFamily="34" charset="0"/>
-                <a:ea typeface="Noto Sans KR" pitchFamily="34" charset="-122"/>
-                <a:cs typeface="Noto Sans KR" pitchFamily="34" charset="-120"/>
-              </a:rPr>
-              <a:t>유사 사례 분석,</a:t>
-            </a:r>
-            <a:endParaRPr lang="en-US" sz="1200" dirty="0"/>
-          </a:p>
-          <a:p>
-            <a:pPr marL="0" indent="0" algn="ctr">
-              <a:lnSpc>
-                <a:spcPct val="150000"/>
-              </a:lnSpc>
-              <a:buNone/>
-            </a:pPr>
-            <a:r>
-              <a:rPr lang="en-US" sz="1200" dirty="0">
-                <a:solidFill>
-                  <a:srgbClr val="E2E8F0"/>
-                </a:solidFill>
-                <a:latin typeface="Noto Sans KR" pitchFamily="34" charset="0"/>
-                <a:ea typeface="Noto Sans KR" pitchFamily="34" charset="-122"/>
-                <a:cs typeface="Noto Sans KR" pitchFamily="34" charset="-120"/>
-              </a:rPr>
-              <a:t>공통 규칙 발견</a:t>
-            </a:r>
-            <a:endParaRPr lang="en-US" sz="1200" dirty="0"/>
-          </a:p>
-        </p:txBody>
-      </p:sp>
-      <p:sp>
-        <p:nvSpPr>
-          <p:cNvPr id="40" name="Text 33">
-            <a:extLst>
-              <a:ext uri="{FF2B5EF4-FFF2-40B4-BE49-F238E27FC236}">
-                <a16:creationId xmlns:a16="http://schemas.microsoft.com/office/drawing/2014/main" id="{0A6C1C18-B550-2D56-9C2A-7F52C8300F32}"/>
-              </a:ext>
-            </a:extLst>
-          </p:cNvPr>
-          <p:cNvSpPr txBox="1"/>
-          <p:nvPr/>
-        </p:nvSpPr>
-        <p:spPr>
-          <a:xfrm>
-            <a:off x="5017617" y="1436302"/>
-            <a:ext cx="200254" cy="277063"/>
-          </a:xfrm>
-          <a:prstGeom prst="rect">
-            <a:avLst/>
-          </a:prstGeom>
-          <a:noFill/>
-          <a:ln/>
-        </p:spPr>
-        <p:txBody>
-          <a:bodyPr wrap="square" lIns="0" tIns="0" rIns="0" bIns="0" rtlCol="0" anchor="ctr"/>
-          <a:lstStyle/>
-          <a:p>
-            <a:pPr marL="0" indent="0" algn="l">
-              <a:lnSpc>
-                <a:spcPct val="200000"/>
-              </a:lnSpc>
-              <a:buNone/>
-            </a:pPr>
-            <a:r>
-              <a:rPr lang="en-US" sz="2400" b="1" dirty="0">
-                <a:solidFill>
-                  <a:srgbClr val="38BDF8"/>
-                </a:solidFill>
-                <a:latin typeface="Noto Sans KR" pitchFamily="34" charset="0"/>
-                <a:ea typeface="Noto Sans KR" pitchFamily="34" charset="-122"/>
-                <a:cs typeface="Noto Sans KR" pitchFamily="34" charset="-120"/>
-              </a:rPr>
-              <a:t>3</a:t>
-            </a:r>
-            <a:endParaRPr lang="en-US" sz="2400" dirty="0"/>
-          </a:p>
-        </p:txBody>
-      </p:sp>
-      <p:sp>
-        <p:nvSpPr>
-          <p:cNvPr id="41" name="Shape 34">
-            <a:extLst>
-              <a:ext uri="{FF2B5EF4-FFF2-40B4-BE49-F238E27FC236}">
-                <a16:creationId xmlns:a16="http://schemas.microsoft.com/office/drawing/2014/main" id="{50D57F87-1416-C807-191F-EC657CCF4B51}"/>
-              </a:ext>
-            </a:extLst>
-          </p:cNvPr>
-          <p:cNvSpPr/>
-          <p:nvPr/>
-        </p:nvSpPr>
-        <p:spPr>
-          <a:xfrm>
-            <a:off x="6774790" y="1383309"/>
-            <a:ext cx="609905" cy="609905"/>
-          </a:xfrm>
-          <a:prstGeom prst="ellipse">
-            <a:avLst/>
-          </a:prstGeom>
-          <a:solidFill>
-            <a:srgbClr val="0F172A"/>
-          </a:solidFill>
-          <a:ln w="38100">
-            <a:solidFill>
-              <a:srgbClr val="38BDF8"/>
-            </a:solidFill>
-            <a:prstDash val="solid"/>
-          </a:ln>
-          <a:effectLst>
-            <a:outerShdw blurRad="63500" dist="38100" dir="16200000" algn="bl" rotWithShape="0">
-              <a:srgbClr val="000000">
-                <a:alpha val="50000"/>
-              </a:srgbClr>
-            </a:outerShdw>
-          </a:effectLst>
-        </p:spPr>
-        <p:txBody>
-          <a:bodyPr/>
-          <a:lstStyle/>
-          <a:p>
-            <a:pPr>
-              <a:lnSpc>
-                <a:spcPct val="200000"/>
-              </a:lnSpc>
-            </a:pPr>
-            <a:endParaRPr lang="ko-KR" altLang="en-US" sz="3200"/>
-          </a:p>
-        </p:txBody>
-      </p:sp>
-      <p:sp>
-        <p:nvSpPr>
-          <p:cNvPr id="42" name="Shape 35">
-            <a:extLst>
-              <a:ext uri="{FF2B5EF4-FFF2-40B4-BE49-F238E27FC236}">
-                <a16:creationId xmlns:a16="http://schemas.microsoft.com/office/drawing/2014/main" id="{3B3F6C3B-07D7-8D5F-EE1A-03657D47FA1C}"/>
-              </a:ext>
-            </a:extLst>
-          </p:cNvPr>
-          <p:cNvSpPr/>
-          <p:nvPr/>
-        </p:nvSpPr>
-        <p:spPr>
-          <a:xfrm>
-            <a:off x="6279185" y="2145004"/>
-            <a:ext cx="1600200" cy="1333195"/>
-          </a:xfrm>
-          <a:prstGeom prst="roundRect">
-            <a:avLst>
-              <a:gd name="adj" fmla="val 5879"/>
-            </a:avLst>
-          </a:prstGeom>
-          <a:solidFill>
-            <a:srgbClr val="1E293B"/>
-          </a:solidFill>
-          <a:ln w="12700">
-            <a:solidFill>
-              <a:srgbClr val="334155"/>
-            </a:solidFill>
-            <a:prstDash val="solid"/>
-          </a:ln>
-        </p:spPr>
-        <p:txBody>
-          <a:bodyPr/>
-          <a:lstStyle/>
-          <a:p>
-            <a:pPr>
-              <a:lnSpc>
-                <a:spcPct val="200000"/>
-              </a:lnSpc>
-            </a:pPr>
-            <a:endParaRPr lang="ko-KR" altLang="en-US" sz="3200"/>
-          </a:p>
-        </p:txBody>
-      </p:sp>
-      <p:sp>
-        <p:nvSpPr>
-          <p:cNvPr id="43" name="Text 36">
-            <a:extLst>
-              <a:ext uri="{FF2B5EF4-FFF2-40B4-BE49-F238E27FC236}">
-                <a16:creationId xmlns:a16="http://schemas.microsoft.com/office/drawing/2014/main" id="{2CA8A7F2-F2F7-B459-0F67-9E5AA04D9F73}"/>
-              </a:ext>
-            </a:extLst>
-          </p:cNvPr>
-          <p:cNvSpPr txBox="1"/>
-          <p:nvPr/>
-        </p:nvSpPr>
-        <p:spPr>
-          <a:xfrm>
-            <a:off x="6349594" y="2269363"/>
-            <a:ext cx="1461211" cy="228600"/>
-          </a:xfrm>
-          <a:prstGeom prst="rect">
-            <a:avLst/>
-          </a:prstGeom>
-          <a:noFill/>
-          <a:ln/>
-        </p:spPr>
-        <p:txBody>
-          <a:bodyPr wrap="square" lIns="0" tIns="0" rIns="0" bIns="0" rtlCol="0" anchor="ctr"/>
-          <a:lstStyle/>
-          <a:p>
-            <a:pPr marL="0" indent="0" algn="ctr">
-              <a:lnSpc>
-                <a:spcPct val="200000"/>
-              </a:lnSpc>
-              <a:buNone/>
-            </a:pPr>
-            <a:r>
-              <a:rPr lang="en-US" sz="2000" b="1" dirty="0">
-                <a:solidFill>
-                  <a:srgbClr val="FFFFFF"/>
-                </a:solidFill>
-                <a:latin typeface="Noto Sans KR" pitchFamily="34" charset="0"/>
-                <a:ea typeface="Noto Sans KR" pitchFamily="34" charset="-122"/>
-                <a:cs typeface="Noto Sans KR" pitchFamily="34" charset="-120"/>
-              </a:rPr>
-              <a:t>추상화</a:t>
-            </a:r>
-            <a:endParaRPr lang="en-US" sz="2000" dirty="0"/>
-          </a:p>
-        </p:txBody>
-      </p:sp>
-      <p:sp>
-        <p:nvSpPr>
-          <p:cNvPr id="44" name="Text 37">
-            <a:extLst>
-              <a:ext uri="{FF2B5EF4-FFF2-40B4-BE49-F238E27FC236}">
-                <a16:creationId xmlns:a16="http://schemas.microsoft.com/office/drawing/2014/main" id="{C98AC188-8F89-30B5-EA23-36E8898CA0F6}"/>
-              </a:ext>
-            </a:extLst>
-          </p:cNvPr>
-          <p:cNvSpPr txBox="1"/>
-          <p:nvPr/>
-        </p:nvSpPr>
-        <p:spPr>
-          <a:xfrm>
-            <a:off x="6365139" y="2720819"/>
-            <a:ext cx="1429207" cy="781812"/>
-          </a:xfrm>
-          <a:prstGeom prst="rect">
-            <a:avLst/>
-          </a:prstGeom>
-          <a:noFill/>
-          <a:ln/>
-        </p:spPr>
-        <p:txBody>
-          <a:bodyPr wrap="square" lIns="0" tIns="0" rIns="0" bIns="0" rtlCol="0" anchor="t"/>
-          <a:lstStyle/>
-          <a:p>
-            <a:pPr marL="0" indent="0" algn="ctr">
-              <a:lnSpc>
-                <a:spcPct val="150000"/>
-              </a:lnSpc>
-              <a:buNone/>
-            </a:pPr>
-            <a:r>
-              <a:rPr lang="en-US" sz="1200" dirty="0">
-                <a:solidFill>
-                  <a:srgbClr val="E2E8F0"/>
-                </a:solidFill>
-                <a:latin typeface="Noto Sans KR" pitchFamily="34" charset="0"/>
-                <a:ea typeface="Noto Sans KR" pitchFamily="34" charset="-122"/>
-                <a:cs typeface="Noto Sans KR" pitchFamily="34" charset="-120"/>
-              </a:rPr>
-              <a:t>핵심 변수 선정,</a:t>
-            </a:r>
-            <a:endParaRPr lang="en-US" sz="1200" dirty="0"/>
-          </a:p>
-          <a:p>
-            <a:pPr marL="0" indent="0" algn="ctr">
-              <a:lnSpc>
-                <a:spcPct val="150000"/>
-              </a:lnSpc>
-              <a:buNone/>
-            </a:pPr>
-            <a:r>
-              <a:rPr lang="en-US" sz="1200" dirty="0">
-                <a:solidFill>
-                  <a:srgbClr val="E2E8F0"/>
-                </a:solidFill>
-                <a:latin typeface="Noto Sans KR" pitchFamily="34" charset="0"/>
-                <a:ea typeface="Noto Sans KR" pitchFamily="34" charset="-122"/>
-                <a:cs typeface="Noto Sans KR" pitchFamily="34" charset="-120"/>
-              </a:rPr>
-              <a:t>단순 모델 확정</a:t>
-            </a:r>
-            <a:endParaRPr lang="en-US" sz="1200" dirty="0"/>
-          </a:p>
-        </p:txBody>
-      </p:sp>
-      <p:sp>
-        <p:nvSpPr>
-          <p:cNvPr id="45" name="Text 38">
-            <a:extLst>
-              <a:ext uri="{FF2B5EF4-FFF2-40B4-BE49-F238E27FC236}">
-                <a16:creationId xmlns:a16="http://schemas.microsoft.com/office/drawing/2014/main" id="{80C5C170-9D41-80D3-93FF-E69AF5D333D5}"/>
-              </a:ext>
-            </a:extLst>
-          </p:cNvPr>
-          <p:cNvSpPr txBox="1"/>
-          <p:nvPr/>
-        </p:nvSpPr>
-        <p:spPr>
-          <a:xfrm>
-            <a:off x="6983577" y="1436302"/>
-            <a:ext cx="200254" cy="277063"/>
-          </a:xfrm>
-          <a:prstGeom prst="rect">
-            <a:avLst/>
-          </a:prstGeom>
-          <a:noFill/>
-          <a:ln/>
-        </p:spPr>
-        <p:txBody>
-          <a:bodyPr wrap="square" lIns="0" tIns="0" rIns="0" bIns="0" rtlCol="0" anchor="ctr"/>
-          <a:lstStyle/>
-          <a:p>
-            <a:pPr marL="0" indent="0" algn="l">
-              <a:lnSpc>
-                <a:spcPct val="200000"/>
-              </a:lnSpc>
-              <a:buNone/>
-            </a:pPr>
-            <a:r>
-              <a:rPr lang="en-US" sz="2400" b="1" dirty="0">
-                <a:solidFill>
-                  <a:srgbClr val="38BDF8"/>
-                </a:solidFill>
-                <a:latin typeface="Noto Sans KR" pitchFamily="34" charset="0"/>
-                <a:ea typeface="Noto Sans KR" pitchFamily="34" charset="-122"/>
-                <a:cs typeface="Noto Sans KR" pitchFamily="34" charset="-120"/>
-              </a:rPr>
-              <a:t>4</a:t>
-            </a:r>
-            <a:endParaRPr lang="en-US" sz="2400" dirty="0"/>
-          </a:p>
-        </p:txBody>
-      </p:sp>
-      <p:sp>
-        <p:nvSpPr>
-          <p:cNvPr id="46" name="Shape 39">
-            <a:extLst>
-              <a:ext uri="{FF2B5EF4-FFF2-40B4-BE49-F238E27FC236}">
-                <a16:creationId xmlns:a16="http://schemas.microsoft.com/office/drawing/2014/main" id="{A0857772-886D-B74D-EAD3-E5ADE4822643}"/>
-              </a:ext>
-            </a:extLst>
-          </p:cNvPr>
-          <p:cNvSpPr/>
-          <p:nvPr/>
-        </p:nvSpPr>
-        <p:spPr>
-          <a:xfrm>
-            <a:off x="8740750" y="1383309"/>
-            <a:ext cx="609905" cy="609905"/>
-          </a:xfrm>
-          <a:prstGeom prst="ellipse">
-            <a:avLst/>
-          </a:prstGeom>
-          <a:solidFill>
-            <a:srgbClr val="0F172A"/>
-          </a:solidFill>
-          <a:ln w="38100">
-            <a:solidFill>
-              <a:srgbClr val="38BDF8"/>
-            </a:solidFill>
-            <a:prstDash val="solid"/>
-          </a:ln>
-          <a:effectLst>
-            <a:outerShdw blurRad="63500" dist="38100" dir="16200000" algn="bl" rotWithShape="0">
-              <a:srgbClr val="000000">
-                <a:alpha val="50000"/>
-              </a:srgbClr>
-            </a:outerShdw>
-          </a:effectLst>
-        </p:spPr>
-        <p:txBody>
-          <a:bodyPr/>
-          <a:lstStyle/>
-          <a:p>
-            <a:pPr>
-              <a:lnSpc>
-                <a:spcPct val="200000"/>
-              </a:lnSpc>
-            </a:pPr>
-            <a:endParaRPr lang="ko-KR" altLang="en-US" sz="3200"/>
-          </a:p>
-        </p:txBody>
-      </p:sp>
-      <p:sp>
-        <p:nvSpPr>
-          <p:cNvPr id="47" name="Shape 40">
-            <a:extLst>
-              <a:ext uri="{FF2B5EF4-FFF2-40B4-BE49-F238E27FC236}">
-                <a16:creationId xmlns:a16="http://schemas.microsoft.com/office/drawing/2014/main" id="{8CC2966F-9602-05B9-3D0C-95E27F1FCB05}"/>
-              </a:ext>
-            </a:extLst>
-          </p:cNvPr>
-          <p:cNvSpPr/>
-          <p:nvPr/>
-        </p:nvSpPr>
-        <p:spPr>
-          <a:xfrm>
-            <a:off x="8245145" y="2145004"/>
-            <a:ext cx="1600200" cy="1333195"/>
-          </a:xfrm>
-          <a:prstGeom prst="roundRect">
-            <a:avLst>
-              <a:gd name="adj" fmla="val 5879"/>
-            </a:avLst>
-          </a:prstGeom>
-          <a:solidFill>
-            <a:srgbClr val="1E293B"/>
-          </a:solidFill>
-          <a:ln w="12700">
-            <a:solidFill>
-              <a:srgbClr val="334155"/>
-            </a:solidFill>
-            <a:prstDash val="solid"/>
-          </a:ln>
-        </p:spPr>
-        <p:txBody>
-          <a:bodyPr/>
-          <a:lstStyle/>
-          <a:p>
-            <a:pPr>
-              <a:lnSpc>
-                <a:spcPct val="200000"/>
-              </a:lnSpc>
-            </a:pPr>
-            <a:endParaRPr lang="ko-KR" altLang="en-US" sz="3200"/>
-          </a:p>
-        </p:txBody>
-      </p:sp>
-      <p:sp>
-        <p:nvSpPr>
-          <p:cNvPr id="48" name="Text 41">
-            <a:extLst>
-              <a:ext uri="{FF2B5EF4-FFF2-40B4-BE49-F238E27FC236}">
-                <a16:creationId xmlns:a16="http://schemas.microsoft.com/office/drawing/2014/main" id="{F5F9FA28-C88B-CCE1-DDBA-9F51ADE9B5E0}"/>
-              </a:ext>
-            </a:extLst>
-          </p:cNvPr>
-          <p:cNvSpPr txBox="1"/>
-          <p:nvPr/>
-        </p:nvSpPr>
-        <p:spPr>
-          <a:xfrm>
-            <a:off x="8315554" y="2269363"/>
-            <a:ext cx="1461211" cy="228600"/>
-          </a:xfrm>
-          <a:prstGeom prst="rect">
-            <a:avLst/>
-          </a:prstGeom>
-          <a:noFill/>
-          <a:ln/>
-        </p:spPr>
-        <p:txBody>
-          <a:bodyPr wrap="square" lIns="0" tIns="0" rIns="0" bIns="0" rtlCol="0" anchor="ctr"/>
-          <a:lstStyle/>
-          <a:p>
-            <a:pPr marL="0" indent="0" algn="ctr">
-              <a:lnSpc>
-                <a:spcPct val="200000"/>
-              </a:lnSpc>
-              <a:buNone/>
-            </a:pPr>
-            <a:r>
-              <a:rPr lang="en-US" sz="2000" b="1" dirty="0">
-                <a:solidFill>
-                  <a:srgbClr val="FFFFFF"/>
-                </a:solidFill>
-                <a:latin typeface="Noto Sans KR" pitchFamily="34" charset="0"/>
-                <a:ea typeface="Noto Sans KR" pitchFamily="34" charset="-122"/>
-                <a:cs typeface="Noto Sans KR" pitchFamily="34" charset="-120"/>
-              </a:rPr>
-              <a:t>알고리즘</a:t>
-            </a:r>
-            <a:endParaRPr lang="en-US" sz="2000" dirty="0"/>
-          </a:p>
-        </p:txBody>
-      </p:sp>
-      <p:sp>
-        <p:nvSpPr>
-          <p:cNvPr id="49" name="Text 42">
-            <a:extLst>
-              <a:ext uri="{FF2B5EF4-FFF2-40B4-BE49-F238E27FC236}">
-                <a16:creationId xmlns:a16="http://schemas.microsoft.com/office/drawing/2014/main" id="{19CEF20A-41C6-21C7-A519-8B43B8EFD4A0}"/>
-              </a:ext>
-            </a:extLst>
-          </p:cNvPr>
-          <p:cNvSpPr txBox="1"/>
-          <p:nvPr/>
-        </p:nvSpPr>
-        <p:spPr>
-          <a:xfrm>
-            <a:off x="8331099" y="2720819"/>
-            <a:ext cx="1429207" cy="781812"/>
-          </a:xfrm>
-          <a:prstGeom prst="rect">
-            <a:avLst/>
-          </a:prstGeom>
-          <a:noFill/>
-          <a:ln/>
-        </p:spPr>
-        <p:txBody>
-          <a:bodyPr wrap="square" lIns="0" tIns="0" rIns="0" bIns="0" rtlCol="0" anchor="t"/>
-          <a:lstStyle/>
-          <a:p>
-            <a:pPr marL="0" indent="0" algn="ctr">
-              <a:lnSpc>
-                <a:spcPct val="150000"/>
-              </a:lnSpc>
-              <a:buNone/>
-            </a:pPr>
-            <a:r>
-              <a:rPr lang="en-US" sz="1200" dirty="0">
-                <a:solidFill>
-                  <a:srgbClr val="E2E8F0"/>
-                </a:solidFill>
-                <a:latin typeface="Noto Sans KR" pitchFamily="34" charset="0"/>
-                <a:ea typeface="Noto Sans KR" pitchFamily="34" charset="-122"/>
-                <a:cs typeface="Noto Sans KR" pitchFamily="34" charset="-120"/>
-              </a:rPr>
-              <a:t>절차 및 역할,</a:t>
-            </a:r>
-            <a:endParaRPr lang="en-US" sz="1200" dirty="0"/>
-          </a:p>
-          <a:p>
-            <a:pPr marL="0" indent="0" algn="ctr">
-              <a:lnSpc>
-                <a:spcPct val="150000"/>
-              </a:lnSpc>
-              <a:buNone/>
-            </a:pPr>
-            <a:r>
-              <a:rPr lang="en-US" sz="1200" dirty="0">
-                <a:solidFill>
-                  <a:srgbClr val="E2E8F0"/>
-                </a:solidFill>
-                <a:latin typeface="Noto Sans KR" pitchFamily="34" charset="0"/>
-                <a:ea typeface="Noto Sans KR" pitchFamily="34" charset="-122"/>
-                <a:cs typeface="Noto Sans KR" pitchFamily="34" charset="-120"/>
-              </a:rPr>
-              <a:t>자료 흐름 설계</a:t>
-            </a:r>
-            <a:endParaRPr lang="en-US" sz="1200" dirty="0"/>
-          </a:p>
-        </p:txBody>
-      </p:sp>
-      <p:sp>
-        <p:nvSpPr>
-          <p:cNvPr id="50" name="Text 43">
-            <a:extLst>
-              <a:ext uri="{FF2B5EF4-FFF2-40B4-BE49-F238E27FC236}">
-                <a16:creationId xmlns:a16="http://schemas.microsoft.com/office/drawing/2014/main" id="{A12CCD9D-FBB6-48F3-59E6-DA8E618FEE3C}"/>
-              </a:ext>
-            </a:extLst>
-          </p:cNvPr>
-          <p:cNvSpPr txBox="1"/>
-          <p:nvPr/>
-        </p:nvSpPr>
-        <p:spPr>
-          <a:xfrm>
-            <a:off x="8949537" y="1436302"/>
-            <a:ext cx="200254" cy="277063"/>
-          </a:xfrm>
-          <a:prstGeom prst="rect">
-            <a:avLst/>
-          </a:prstGeom>
-          <a:noFill/>
-          <a:ln/>
-        </p:spPr>
-        <p:txBody>
-          <a:bodyPr wrap="square" lIns="0" tIns="0" rIns="0" bIns="0" rtlCol="0" anchor="ctr"/>
-          <a:lstStyle/>
-          <a:p>
-            <a:pPr marL="0" indent="0" algn="l">
-              <a:lnSpc>
-                <a:spcPct val="200000"/>
-              </a:lnSpc>
-              <a:buNone/>
-            </a:pPr>
-            <a:r>
-              <a:rPr lang="en-US" sz="2400" b="1" dirty="0">
-                <a:solidFill>
-                  <a:srgbClr val="38BDF8"/>
-                </a:solidFill>
-                <a:latin typeface="Noto Sans KR" pitchFamily="34" charset="0"/>
-                <a:ea typeface="Noto Sans KR" pitchFamily="34" charset="-122"/>
-                <a:cs typeface="Noto Sans KR" pitchFamily="34" charset="-120"/>
-              </a:rPr>
-              <a:t>5</a:t>
-            </a:r>
-            <a:endParaRPr lang="en-US" sz="2400" dirty="0"/>
-          </a:p>
-        </p:txBody>
-      </p:sp>
-      <p:sp>
-        <p:nvSpPr>
-          <p:cNvPr id="51" name="Shape 44">
-            <a:extLst>
-              <a:ext uri="{FF2B5EF4-FFF2-40B4-BE49-F238E27FC236}">
-                <a16:creationId xmlns:a16="http://schemas.microsoft.com/office/drawing/2014/main" id="{58FCEFDC-E904-0318-DA7B-C0B6191D10F4}"/>
-              </a:ext>
-            </a:extLst>
-          </p:cNvPr>
-          <p:cNvSpPr/>
-          <p:nvPr/>
-        </p:nvSpPr>
-        <p:spPr>
-          <a:xfrm>
-            <a:off x="10706710" y="1383309"/>
-            <a:ext cx="609905" cy="609905"/>
-          </a:xfrm>
-          <a:prstGeom prst="ellipse">
-            <a:avLst/>
-          </a:prstGeom>
-          <a:solidFill>
-            <a:srgbClr val="0F172A"/>
-          </a:solidFill>
-          <a:ln w="38100">
-            <a:solidFill>
-              <a:srgbClr val="38BDF8"/>
-            </a:solidFill>
-            <a:prstDash val="solid"/>
-          </a:ln>
-          <a:effectLst>
-            <a:outerShdw blurRad="63500" dist="38100" dir="16200000" algn="bl" rotWithShape="0">
-              <a:srgbClr val="000000">
-                <a:alpha val="50000"/>
-              </a:srgbClr>
-            </a:outerShdw>
-          </a:effectLst>
-        </p:spPr>
-        <p:txBody>
-          <a:bodyPr/>
-          <a:lstStyle/>
-          <a:p>
-            <a:pPr>
-              <a:lnSpc>
-                <a:spcPct val="200000"/>
-              </a:lnSpc>
-            </a:pPr>
-            <a:endParaRPr lang="ko-KR" altLang="en-US" sz="3200"/>
-          </a:p>
-        </p:txBody>
-      </p:sp>
-      <p:sp>
-        <p:nvSpPr>
-          <p:cNvPr id="52" name="Shape 45">
-            <a:extLst>
-              <a:ext uri="{FF2B5EF4-FFF2-40B4-BE49-F238E27FC236}">
-                <a16:creationId xmlns:a16="http://schemas.microsoft.com/office/drawing/2014/main" id="{19F868B7-0912-C7EE-2D07-82D9D199ABD8}"/>
-              </a:ext>
-            </a:extLst>
-          </p:cNvPr>
-          <p:cNvSpPr/>
-          <p:nvPr/>
-        </p:nvSpPr>
-        <p:spPr>
-          <a:xfrm>
-            <a:off x="10211105" y="2145004"/>
-            <a:ext cx="1600200" cy="1333195"/>
-          </a:xfrm>
-          <a:prstGeom prst="roundRect">
-            <a:avLst>
-              <a:gd name="adj" fmla="val 5879"/>
-            </a:avLst>
-          </a:prstGeom>
-          <a:solidFill>
-            <a:srgbClr val="1E293B"/>
-          </a:solidFill>
-          <a:ln w="12700">
-            <a:solidFill>
-              <a:srgbClr val="334155"/>
-            </a:solidFill>
-            <a:prstDash val="solid"/>
-          </a:ln>
-        </p:spPr>
-        <p:txBody>
-          <a:bodyPr/>
-          <a:lstStyle/>
-          <a:p>
-            <a:pPr>
-              <a:lnSpc>
-                <a:spcPct val="200000"/>
-              </a:lnSpc>
-            </a:pPr>
-            <a:endParaRPr lang="ko-KR" altLang="en-US" sz="3200"/>
-          </a:p>
-        </p:txBody>
-      </p:sp>
-      <p:sp>
-        <p:nvSpPr>
-          <p:cNvPr id="53" name="Text 46">
-            <a:extLst>
-              <a:ext uri="{FF2B5EF4-FFF2-40B4-BE49-F238E27FC236}">
-                <a16:creationId xmlns:a16="http://schemas.microsoft.com/office/drawing/2014/main" id="{1189AED2-A2D2-613D-19A1-D57B51853248}"/>
-              </a:ext>
-            </a:extLst>
-          </p:cNvPr>
-          <p:cNvSpPr txBox="1"/>
-          <p:nvPr/>
-        </p:nvSpPr>
-        <p:spPr>
-          <a:xfrm>
-            <a:off x="10280600" y="2269363"/>
-            <a:ext cx="1461211" cy="228600"/>
-          </a:xfrm>
-          <a:prstGeom prst="rect">
-            <a:avLst/>
-          </a:prstGeom>
-          <a:noFill/>
-          <a:ln/>
-        </p:spPr>
-        <p:txBody>
-          <a:bodyPr wrap="square" lIns="0" tIns="0" rIns="0" bIns="0" rtlCol="0" anchor="ctr"/>
-          <a:lstStyle/>
-          <a:p>
-            <a:pPr marL="0" indent="0" algn="ctr">
-              <a:lnSpc>
-                <a:spcPct val="200000"/>
-              </a:lnSpc>
-              <a:buNone/>
-            </a:pPr>
-            <a:r>
-              <a:rPr lang="en-US" sz="2000" b="1" dirty="0">
-                <a:solidFill>
-                  <a:srgbClr val="FFFFFF"/>
-                </a:solidFill>
-                <a:latin typeface="Noto Sans KR" pitchFamily="34" charset="0"/>
-                <a:ea typeface="Noto Sans KR" pitchFamily="34" charset="-122"/>
-                <a:cs typeface="Noto Sans KR" pitchFamily="34" charset="-120"/>
-              </a:rPr>
-              <a:t>검증</a:t>
-            </a:r>
-            <a:endParaRPr lang="en-US" sz="2000" dirty="0"/>
-          </a:p>
-        </p:txBody>
-      </p:sp>
-      <p:sp>
-        <p:nvSpPr>
-          <p:cNvPr id="54" name="Text 47">
-            <a:extLst>
-              <a:ext uri="{FF2B5EF4-FFF2-40B4-BE49-F238E27FC236}">
-                <a16:creationId xmlns:a16="http://schemas.microsoft.com/office/drawing/2014/main" id="{B11CDAC6-3B66-9363-2E98-7B9628F8C6BE}"/>
-              </a:ext>
-            </a:extLst>
-          </p:cNvPr>
-          <p:cNvSpPr txBox="1"/>
-          <p:nvPr/>
-        </p:nvSpPr>
-        <p:spPr>
-          <a:xfrm>
-            <a:off x="10297059" y="2720819"/>
-            <a:ext cx="1429207" cy="781812"/>
-          </a:xfrm>
-          <a:prstGeom prst="rect">
-            <a:avLst/>
-          </a:prstGeom>
-          <a:noFill/>
-          <a:ln/>
-        </p:spPr>
-        <p:txBody>
-          <a:bodyPr wrap="square" lIns="0" tIns="0" rIns="0" bIns="0" rtlCol="0" anchor="t"/>
-          <a:lstStyle/>
-          <a:p>
-            <a:pPr marL="0" indent="0" algn="ctr">
-              <a:lnSpc>
-                <a:spcPct val="150000"/>
-              </a:lnSpc>
-              <a:buNone/>
-            </a:pPr>
-            <a:r>
-              <a:rPr lang="en-US" sz="1200" dirty="0">
-                <a:solidFill>
-                  <a:srgbClr val="E2E8F0"/>
-                </a:solidFill>
-                <a:latin typeface="Noto Sans KR" pitchFamily="34" charset="0"/>
-                <a:ea typeface="Noto Sans KR" pitchFamily="34" charset="-122"/>
-                <a:cs typeface="Noto Sans KR" pitchFamily="34" charset="-120"/>
-              </a:rPr>
-              <a:t>시뮬레이션,</a:t>
-            </a:r>
-            <a:endParaRPr lang="en-US" sz="1200" dirty="0"/>
-          </a:p>
-          <a:p>
-            <a:pPr marL="0" indent="0" algn="ctr">
-              <a:lnSpc>
-                <a:spcPct val="150000"/>
-              </a:lnSpc>
-              <a:buNone/>
-            </a:pPr>
-            <a:r>
-              <a:rPr lang="en-US" sz="1200" dirty="0">
-                <a:solidFill>
-                  <a:srgbClr val="E2E8F0"/>
-                </a:solidFill>
-                <a:latin typeface="Noto Sans KR" pitchFamily="34" charset="0"/>
-                <a:ea typeface="Noto Sans KR" pitchFamily="34" charset="-122"/>
-                <a:cs typeface="Noto Sans KR" pitchFamily="34" charset="-120"/>
-              </a:rPr>
-              <a:t>체크리스트 점검</a:t>
-            </a:r>
-            <a:endParaRPr lang="en-US" sz="1200" dirty="0"/>
-          </a:p>
-        </p:txBody>
-      </p:sp>
-      <p:sp>
-        <p:nvSpPr>
-          <p:cNvPr id="55" name="Text 48">
-            <a:extLst>
-              <a:ext uri="{FF2B5EF4-FFF2-40B4-BE49-F238E27FC236}">
-                <a16:creationId xmlns:a16="http://schemas.microsoft.com/office/drawing/2014/main" id="{AD968760-3CCC-E835-7F4B-F56F041D062B}"/>
-              </a:ext>
-            </a:extLst>
-          </p:cNvPr>
-          <p:cNvSpPr txBox="1"/>
-          <p:nvPr/>
-        </p:nvSpPr>
-        <p:spPr>
-          <a:xfrm>
-            <a:off x="10915497" y="1436302"/>
-            <a:ext cx="200254" cy="277063"/>
-          </a:xfrm>
-          <a:prstGeom prst="rect">
-            <a:avLst/>
-          </a:prstGeom>
-          <a:noFill/>
-          <a:ln/>
-        </p:spPr>
-        <p:txBody>
-          <a:bodyPr wrap="square" lIns="0" tIns="0" rIns="0" bIns="0" rtlCol="0" anchor="ctr"/>
-          <a:lstStyle/>
-          <a:p>
-            <a:pPr marL="0" indent="0" algn="l">
-              <a:lnSpc>
-                <a:spcPct val="200000"/>
-              </a:lnSpc>
-              <a:buNone/>
-            </a:pPr>
-            <a:r>
-              <a:rPr lang="en-US" sz="2400" b="1" dirty="0">
-                <a:solidFill>
-                  <a:srgbClr val="38BDF8"/>
-                </a:solidFill>
-                <a:latin typeface="Noto Sans KR" pitchFamily="34" charset="0"/>
-                <a:ea typeface="Noto Sans KR" pitchFamily="34" charset="-122"/>
-                <a:cs typeface="Noto Sans KR" pitchFamily="34" charset="-120"/>
-              </a:rPr>
-              <a:t>6</a:t>
-            </a:r>
-            <a:endParaRPr lang="en-US" sz="2400" dirty="0"/>
-          </a:p>
-        </p:txBody>
-      </p:sp>
-      <p:sp>
-        <p:nvSpPr>
-          <p:cNvPr id="56" name="Shape 6">
-            <a:extLst>
-              <a:ext uri="{FF2B5EF4-FFF2-40B4-BE49-F238E27FC236}">
-                <a16:creationId xmlns:a16="http://schemas.microsoft.com/office/drawing/2014/main" id="{134DEB1A-DC5F-13FB-0A13-E6DB5FDEE260}"/>
-              </a:ext>
-            </a:extLst>
-          </p:cNvPr>
-          <p:cNvSpPr/>
-          <p:nvPr/>
-        </p:nvSpPr>
-        <p:spPr>
-          <a:xfrm flipV="1">
-            <a:off x="3182112" y="4270069"/>
-            <a:ext cx="3787705" cy="1575026"/>
-          </a:xfrm>
-          <a:prstGeom prst="rect">
-            <a:avLst/>
-          </a:prstGeom>
-          <a:noFill/>
-          <a:ln w="25400">
-            <a:solidFill>
-              <a:srgbClr val="64748B"/>
-            </a:solidFill>
-            <a:prstDash val="solid"/>
-          </a:ln>
-        </p:spPr>
-        <p:txBody>
-          <a:bodyPr/>
-          <a:lstStyle/>
-          <a:p>
-            <a:endParaRPr lang="ko-KR" altLang="en-US"/>
-          </a:p>
-        </p:txBody>
-      </p:sp>
-      <p:sp>
-        <p:nvSpPr>
-          <p:cNvPr id="57" name="Shape 7">
-            <a:extLst>
-              <a:ext uri="{FF2B5EF4-FFF2-40B4-BE49-F238E27FC236}">
-                <a16:creationId xmlns:a16="http://schemas.microsoft.com/office/drawing/2014/main" id="{A96E3D3A-4F67-A875-598E-E58680D512AC}"/>
-              </a:ext>
-            </a:extLst>
-          </p:cNvPr>
-          <p:cNvSpPr/>
-          <p:nvPr/>
-        </p:nvSpPr>
-        <p:spPr>
-          <a:xfrm>
-            <a:off x="3150108" y="5575518"/>
-            <a:ext cx="114300" cy="95098"/>
-          </a:xfrm>
-          <a:prstGeom prst="rect">
-            <a:avLst/>
-          </a:prstGeom>
-          <a:noFill/>
-          <a:ln w="76200">
-            <a:solidFill>
-              <a:srgbClr val="000000">
-                <a:alpha val="0"/>
-              </a:srgbClr>
-            </a:solidFill>
-            <a:prstDash val="solid"/>
-          </a:ln>
-        </p:spPr>
-        <p:txBody>
-          <a:bodyPr/>
-          <a:lstStyle/>
-          <a:p>
-            <a:endParaRPr lang="ko-KR" altLang="en-US"/>
-          </a:p>
-        </p:txBody>
-      </p:sp>
-      <p:sp>
-        <p:nvSpPr>
-          <p:cNvPr id="58" name="Shape 8">
-            <a:extLst>
-              <a:ext uri="{FF2B5EF4-FFF2-40B4-BE49-F238E27FC236}">
-                <a16:creationId xmlns:a16="http://schemas.microsoft.com/office/drawing/2014/main" id="{60287BEA-CDC9-EC45-889D-A7C63CE57CAA}"/>
-              </a:ext>
-            </a:extLst>
-          </p:cNvPr>
-          <p:cNvSpPr/>
-          <p:nvPr/>
-        </p:nvSpPr>
-        <p:spPr>
-          <a:xfrm>
-            <a:off x="7883957" y="5623067"/>
-            <a:ext cx="95098" cy="95098"/>
-          </a:xfrm>
-          <a:prstGeom prst="ellipse">
-            <a:avLst/>
-          </a:prstGeom>
-          <a:solidFill>
-            <a:srgbClr val="64748B">
-              <a:alpha val="50000"/>
-            </a:srgbClr>
-          </a:solidFill>
-          <a:ln w="12700">
-            <a:solidFill>
-              <a:srgbClr val="FFFFFF">
-                <a:alpha val="0"/>
-              </a:srgbClr>
-            </a:solidFill>
-            <a:prstDash val="solid"/>
-          </a:ln>
-        </p:spPr>
-        <p:txBody>
-          <a:bodyPr/>
-          <a:lstStyle/>
-          <a:p>
-            <a:endParaRPr lang="ko-KR" altLang="en-US"/>
-          </a:p>
-        </p:txBody>
-      </p:sp>
-      <p:sp>
-        <p:nvSpPr>
-          <p:cNvPr id="59" name="Text 9">
-            <a:extLst>
-              <a:ext uri="{FF2B5EF4-FFF2-40B4-BE49-F238E27FC236}">
-                <a16:creationId xmlns:a16="http://schemas.microsoft.com/office/drawing/2014/main" id="{0A3F5682-3F3A-7A57-54C9-EB8E15952593}"/>
-              </a:ext>
-            </a:extLst>
-          </p:cNvPr>
-          <p:cNvSpPr txBox="1"/>
-          <p:nvPr/>
-        </p:nvSpPr>
-        <p:spPr>
-          <a:xfrm>
-            <a:off x="4689596" y="3937186"/>
-            <a:ext cx="2444912" cy="184709"/>
-          </a:xfrm>
-          <a:prstGeom prst="rect">
-            <a:avLst/>
-          </a:prstGeom>
-          <a:noFill/>
-          <a:ln/>
-        </p:spPr>
-        <p:txBody>
-          <a:bodyPr wrap="square" lIns="0" tIns="0" rIns="0" bIns="0" rtlCol="0" anchor="ctr"/>
-          <a:lstStyle/>
-          <a:p>
-            <a:pPr marL="0" indent="0" algn="ctr">
-              <a:buNone/>
-            </a:pPr>
-            <a:r>
-              <a:rPr lang="en-US" sz="1400" dirty="0">
-                <a:solidFill>
-                  <a:schemeClr val="bg1"/>
-                </a:solidFill>
-                <a:latin typeface="Noto Sans KR" pitchFamily="34" charset="0"/>
-                <a:ea typeface="Noto Sans KR" pitchFamily="34" charset="-122"/>
-                <a:cs typeface="Noto Sans KR" pitchFamily="34" charset="-120"/>
-              </a:rPr>
-              <a:t>테스트 실패 시 재정의 (Iteration)</a:t>
-            </a:r>
-            <a:endParaRPr lang="en-US" sz="1400" dirty="0">
-              <a:solidFill>
-                <a:schemeClr val="bg1"/>
-              </a:solidFill>
-            </a:endParaRPr>
-          </a:p>
-        </p:txBody>
-      </p:sp>
-      <p:sp>
-        <p:nvSpPr>
-          <p:cNvPr id="60" name="Shape 58">
-            <a:extLst>
-              <a:ext uri="{FF2B5EF4-FFF2-40B4-BE49-F238E27FC236}">
-                <a16:creationId xmlns:a16="http://schemas.microsoft.com/office/drawing/2014/main" id="{39526A49-4E79-B60E-CA5C-20553F8010C9}"/>
-              </a:ext>
-            </a:extLst>
-          </p:cNvPr>
-          <p:cNvSpPr/>
-          <p:nvPr/>
-        </p:nvSpPr>
-        <p:spPr>
-          <a:xfrm>
-            <a:off x="663854" y="4432518"/>
-            <a:ext cx="1143000" cy="1143000"/>
-          </a:xfrm>
-          <a:prstGeom prst="ellipse">
-            <a:avLst/>
-          </a:prstGeom>
-          <a:solidFill>
-            <a:srgbClr val="FCA5A5"/>
-          </a:solidFill>
-          <a:ln w="50800">
-            <a:solidFill>
-              <a:srgbClr val="0F172A"/>
-            </a:solidFill>
-            <a:prstDash val="solid"/>
-          </a:ln>
-          <a:effectLst>
-            <a:outerShdw blurRad="63500" dist="38100" dir="16200000" algn="bl" rotWithShape="0">
-              <a:srgbClr val="000000">
-                <a:alpha val="30000"/>
-              </a:srgbClr>
-            </a:outerShdw>
-          </a:effectLst>
-        </p:spPr>
-        <p:txBody>
-          <a:bodyPr/>
-          <a:lstStyle/>
-          <a:p>
-            <a:endParaRPr lang="ko-KR" altLang="en-US"/>
-          </a:p>
-        </p:txBody>
-      </p:sp>
-      <p:sp>
-        <p:nvSpPr>
-          <p:cNvPr id="61" name="Text 59">
-            <a:extLst>
-              <a:ext uri="{FF2B5EF4-FFF2-40B4-BE49-F238E27FC236}">
-                <a16:creationId xmlns:a16="http://schemas.microsoft.com/office/drawing/2014/main" id="{1CAF6DB1-6689-A0F9-7C8D-8DC678E162D8}"/>
-              </a:ext>
-            </a:extLst>
-          </p:cNvPr>
-          <p:cNvSpPr txBox="1"/>
-          <p:nvPr/>
-        </p:nvSpPr>
-        <p:spPr>
-          <a:xfrm>
-            <a:off x="1096365" y="4670262"/>
-            <a:ext cx="362102" cy="667512"/>
-          </a:xfrm>
-          <a:prstGeom prst="rect">
-            <a:avLst/>
-          </a:prstGeom>
-          <a:noFill/>
-          <a:ln/>
-        </p:spPr>
-        <p:txBody>
-          <a:bodyPr wrap="square" lIns="0" tIns="0" rIns="0" bIns="0" rtlCol="0" anchor="ctr"/>
-          <a:lstStyle/>
-          <a:p>
-            <a:pPr marL="0" indent="0" algn="l">
-              <a:buNone/>
-            </a:pPr>
-            <a:r>
-              <a:rPr lang="en-US" sz="3600" b="1" dirty="0">
-                <a:solidFill>
-                  <a:srgbClr val="FFFFFF">
-                    <a:alpha val="90000"/>
-                  </a:srgbClr>
-                </a:solidFill>
-                <a:latin typeface="Noto Sans KR" pitchFamily="34" charset="0"/>
-                <a:ea typeface="Noto Sans KR" pitchFamily="34" charset="-122"/>
-                <a:cs typeface="Noto Sans KR" pitchFamily="34" charset="-120"/>
-              </a:rPr>
-              <a:t>1</a:t>
-            </a:r>
-            <a:endParaRPr lang="en-US" sz="3600" dirty="0"/>
-          </a:p>
-        </p:txBody>
-      </p:sp>
-      <p:sp>
-        <p:nvSpPr>
-          <p:cNvPr id="62" name="Shape 60">
-            <a:extLst>
-              <a:ext uri="{FF2B5EF4-FFF2-40B4-BE49-F238E27FC236}">
-                <a16:creationId xmlns:a16="http://schemas.microsoft.com/office/drawing/2014/main" id="{C83A73F2-5502-6C34-A2C2-DC0B5B808785}"/>
-              </a:ext>
-            </a:extLst>
-          </p:cNvPr>
-          <p:cNvSpPr/>
-          <p:nvPr/>
-        </p:nvSpPr>
-        <p:spPr>
-          <a:xfrm>
-            <a:off x="568757" y="5670616"/>
-            <a:ext cx="1333195" cy="571500"/>
-          </a:xfrm>
-          <a:prstGeom prst="rect">
-            <a:avLst/>
-          </a:prstGeom>
-          <a:solidFill>
-            <a:srgbClr val="1E293B"/>
-          </a:solidFill>
-          <a:ln/>
-          <a:effectLst>
-            <a:outerShdw blurRad="63500" dist="38100" dir="16200000" algn="bl" rotWithShape="0">
-              <a:srgbClr val="000000">
-                <a:alpha val="10000"/>
-              </a:srgbClr>
-            </a:outerShdw>
-          </a:effectLst>
-        </p:spPr>
-        <p:txBody>
-          <a:bodyPr/>
-          <a:lstStyle/>
-          <a:p>
-            <a:endParaRPr lang="ko-KR" altLang="en-US"/>
-          </a:p>
-        </p:txBody>
-      </p:sp>
-      <p:sp>
-        <p:nvSpPr>
-          <p:cNvPr id="63" name="Shape 61">
-            <a:extLst>
-              <a:ext uri="{FF2B5EF4-FFF2-40B4-BE49-F238E27FC236}">
-                <a16:creationId xmlns:a16="http://schemas.microsoft.com/office/drawing/2014/main" id="{63BF36A9-A066-BD1E-3334-4B8366026108}"/>
-              </a:ext>
-            </a:extLst>
-          </p:cNvPr>
-          <p:cNvSpPr/>
-          <p:nvPr/>
-        </p:nvSpPr>
-        <p:spPr>
-          <a:xfrm>
-            <a:off x="568757" y="5670616"/>
-            <a:ext cx="1333195" cy="38405"/>
-          </a:xfrm>
-          <a:prstGeom prst="rect">
-            <a:avLst/>
-          </a:prstGeom>
-          <a:solidFill>
-            <a:srgbClr val="FCA5A5"/>
-          </a:solidFill>
-          <a:ln w="12700">
-            <a:solidFill>
-              <a:srgbClr val="FCA5A5">
-                <a:alpha val="0"/>
-              </a:srgbClr>
-            </a:solidFill>
-            <a:prstDash val="solid"/>
-          </a:ln>
-        </p:spPr>
-        <p:txBody>
-          <a:bodyPr/>
-          <a:lstStyle/>
-          <a:p>
-            <a:endParaRPr lang="ko-KR" altLang="en-US"/>
-          </a:p>
-        </p:txBody>
-      </p:sp>
-      <p:sp>
-        <p:nvSpPr>
-          <p:cNvPr id="64" name="Text 62">
-            <a:extLst>
-              <a:ext uri="{FF2B5EF4-FFF2-40B4-BE49-F238E27FC236}">
-                <a16:creationId xmlns:a16="http://schemas.microsoft.com/office/drawing/2014/main" id="{603C7EC6-85C3-6C5F-36C9-570F9D917C03}"/>
-              </a:ext>
-            </a:extLst>
-          </p:cNvPr>
-          <p:cNvSpPr txBox="1"/>
-          <p:nvPr/>
-        </p:nvSpPr>
-        <p:spPr>
-          <a:xfrm>
-            <a:off x="515721" y="5784916"/>
-            <a:ext cx="1440180" cy="191110"/>
-          </a:xfrm>
-          <a:prstGeom prst="rect">
-            <a:avLst/>
-          </a:prstGeom>
-          <a:noFill/>
-          <a:ln/>
-        </p:spPr>
-        <p:txBody>
-          <a:bodyPr wrap="square" lIns="0" tIns="0" rIns="0" bIns="0" rtlCol="0" anchor="ctr"/>
-          <a:lstStyle/>
-          <a:p>
-            <a:pPr marL="0" indent="0" algn="ctr">
-              <a:buNone/>
-            </a:pPr>
-            <a:r>
-              <a:rPr lang="en-US" sz="1200" b="1" dirty="0">
-                <a:solidFill>
-                  <a:srgbClr val="E2E8F0"/>
-                </a:solidFill>
-                <a:latin typeface="Noto Sans KR" pitchFamily="34" charset="0"/>
-                <a:ea typeface="Noto Sans KR" pitchFamily="34" charset="-122"/>
-                <a:cs typeface="Noto Sans KR" pitchFamily="34" charset="-120"/>
-              </a:rPr>
-              <a:t>공감</a:t>
-            </a:r>
-            <a:endParaRPr lang="en-US" sz="1200" dirty="0"/>
-          </a:p>
-        </p:txBody>
-      </p:sp>
-      <p:sp>
-        <p:nvSpPr>
-          <p:cNvPr id="65" name="Text 63">
-            <a:extLst>
-              <a:ext uri="{FF2B5EF4-FFF2-40B4-BE49-F238E27FC236}">
-                <a16:creationId xmlns:a16="http://schemas.microsoft.com/office/drawing/2014/main" id="{CBEE3998-A9EA-0775-5371-D45CBAD2891D}"/>
-              </a:ext>
-            </a:extLst>
-          </p:cNvPr>
-          <p:cNvSpPr txBox="1"/>
-          <p:nvPr/>
-        </p:nvSpPr>
-        <p:spPr>
-          <a:xfrm>
-            <a:off x="531266" y="5986998"/>
-            <a:ext cx="1410005" cy="171907"/>
-          </a:xfrm>
-          <a:prstGeom prst="rect">
-            <a:avLst/>
-          </a:prstGeom>
-          <a:noFill/>
-          <a:ln/>
-        </p:spPr>
-        <p:txBody>
-          <a:bodyPr wrap="square" lIns="0" tIns="0" rIns="0" bIns="0" rtlCol="0" anchor="ctr"/>
-          <a:lstStyle/>
-          <a:p>
-            <a:pPr marL="0" indent="0" algn="ctr">
-              <a:buNone/>
-            </a:pPr>
-            <a:r>
-              <a:rPr lang="en-US" sz="900" dirty="0">
-                <a:solidFill>
-                  <a:srgbClr val="94A3B8"/>
-                </a:solidFill>
-                <a:latin typeface="Noto Sans KR" pitchFamily="34" charset="0"/>
-                <a:ea typeface="Noto Sans KR" pitchFamily="34" charset="-122"/>
-                <a:cs typeface="Noto Sans KR" pitchFamily="34" charset="-120"/>
-              </a:rPr>
-              <a:t>Empathize</a:t>
-            </a:r>
-            <a:endParaRPr lang="en-US" sz="900" dirty="0"/>
-          </a:p>
-        </p:txBody>
-      </p:sp>
-      <p:pic>
-        <p:nvPicPr>
-          <p:cNvPr id="66" name="Image 0" descr="preencoded.png">
-            <a:extLst>
-              <a:ext uri="{FF2B5EF4-FFF2-40B4-BE49-F238E27FC236}">
-                <a16:creationId xmlns:a16="http://schemas.microsoft.com/office/drawing/2014/main" id="{F0886A74-3D86-66AD-1132-208CA290042F}"/>
-              </a:ext>
-            </a:extLst>
-          </p:cNvPr>
-          <p:cNvPicPr>
-            <a:picLocks noChangeAspect="1"/>
-          </p:cNvPicPr>
-          <p:nvPr/>
-        </p:nvPicPr>
-        <p:blipFill>
-          <a:blip r:embed="rId3"/>
-          <a:srcRect t="-301" b="-301"/>
-          <a:stretch/>
-        </p:blipFill>
-        <p:spPr>
-          <a:xfrm>
-            <a:off x="2064715" y="5257307"/>
-            <a:ext cx="75895" cy="152705"/>
-          </a:xfrm>
-          <a:prstGeom prst="rect">
-            <a:avLst/>
-          </a:prstGeom>
-        </p:spPr>
-      </p:pic>
-      <p:sp>
-        <p:nvSpPr>
-          <p:cNvPr id="67" name="Shape 64">
-            <a:extLst>
-              <a:ext uri="{FF2B5EF4-FFF2-40B4-BE49-F238E27FC236}">
-                <a16:creationId xmlns:a16="http://schemas.microsoft.com/office/drawing/2014/main" id="{70F6FD4A-6002-9A2E-D0E2-E55F54D81C67}"/>
-              </a:ext>
-            </a:extLst>
-          </p:cNvPr>
-          <p:cNvSpPr/>
-          <p:nvPr/>
-        </p:nvSpPr>
-        <p:spPr>
-          <a:xfrm>
-            <a:off x="2569464" y="4432518"/>
-            <a:ext cx="1143000" cy="1143000"/>
-          </a:xfrm>
-          <a:prstGeom prst="ellipse">
-            <a:avLst/>
-          </a:prstGeom>
-          <a:solidFill>
-            <a:srgbClr val="F87171"/>
-          </a:solidFill>
-          <a:ln w="50800">
-            <a:solidFill>
-              <a:srgbClr val="0F172A"/>
-            </a:solidFill>
-            <a:prstDash val="solid"/>
-          </a:ln>
-          <a:effectLst>
-            <a:outerShdw blurRad="63500" dist="38100" dir="16200000" algn="bl" rotWithShape="0">
-              <a:srgbClr val="000000">
-                <a:alpha val="30000"/>
-              </a:srgbClr>
-            </a:outerShdw>
-          </a:effectLst>
-        </p:spPr>
-        <p:txBody>
-          <a:bodyPr/>
-          <a:lstStyle/>
-          <a:p>
-            <a:endParaRPr lang="ko-KR" altLang="en-US"/>
-          </a:p>
-        </p:txBody>
-      </p:sp>
-      <p:sp>
-        <p:nvSpPr>
-          <p:cNvPr id="68" name="Text 65">
-            <a:extLst>
-              <a:ext uri="{FF2B5EF4-FFF2-40B4-BE49-F238E27FC236}">
-                <a16:creationId xmlns:a16="http://schemas.microsoft.com/office/drawing/2014/main" id="{CD9B5D41-B4BD-D0BC-9BB4-F3F74D7F9482}"/>
-              </a:ext>
-            </a:extLst>
-          </p:cNvPr>
-          <p:cNvSpPr txBox="1"/>
-          <p:nvPr/>
-        </p:nvSpPr>
-        <p:spPr>
-          <a:xfrm>
-            <a:off x="3001061" y="4670262"/>
-            <a:ext cx="362102" cy="667512"/>
-          </a:xfrm>
-          <a:prstGeom prst="rect">
-            <a:avLst/>
-          </a:prstGeom>
-          <a:noFill/>
-          <a:ln/>
-        </p:spPr>
-        <p:txBody>
-          <a:bodyPr wrap="square" lIns="0" tIns="0" rIns="0" bIns="0" rtlCol="0" anchor="ctr"/>
-          <a:lstStyle/>
-          <a:p>
-            <a:pPr marL="0" indent="0" algn="l">
-              <a:buNone/>
-            </a:pPr>
-            <a:r>
-              <a:rPr lang="en-US" sz="3600" b="1" dirty="0">
-                <a:solidFill>
-                  <a:srgbClr val="FFFFFF">
-                    <a:alpha val="90000"/>
-                  </a:srgbClr>
-                </a:solidFill>
-                <a:latin typeface="Noto Sans KR" pitchFamily="34" charset="0"/>
-                <a:ea typeface="Noto Sans KR" pitchFamily="34" charset="-122"/>
-                <a:cs typeface="Noto Sans KR" pitchFamily="34" charset="-120"/>
-              </a:rPr>
-              <a:t>2</a:t>
-            </a:r>
-            <a:endParaRPr lang="en-US" sz="3600" dirty="0"/>
-          </a:p>
-        </p:txBody>
-      </p:sp>
-      <p:sp>
-        <p:nvSpPr>
-          <p:cNvPr id="69" name="Shape 66">
-            <a:extLst>
-              <a:ext uri="{FF2B5EF4-FFF2-40B4-BE49-F238E27FC236}">
-                <a16:creationId xmlns:a16="http://schemas.microsoft.com/office/drawing/2014/main" id="{A90B3BD2-40FB-6213-10BA-8E759E95BE05}"/>
-              </a:ext>
-            </a:extLst>
-          </p:cNvPr>
-          <p:cNvSpPr/>
-          <p:nvPr/>
-        </p:nvSpPr>
-        <p:spPr>
-          <a:xfrm>
-            <a:off x="2474366" y="5670616"/>
-            <a:ext cx="1333195" cy="571500"/>
-          </a:xfrm>
-          <a:prstGeom prst="rect">
-            <a:avLst/>
-          </a:prstGeom>
-          <a:solidFill>
-            <a:srgbClr val="1E293B"/>
-          </a:solidFill>
-          <a:ln/>
-          <a:effectLst>
-            <a:outerShdw blurRad="63500" dist="38100" dir="16200000" algn="bl" rotWithShape="0">
-              <a:srgbClr val="000000">
-                <a:alpha val="10000"/>
-              </a:srgbClr>
-            </a:outerShdw>
-          </a:effectLst>
-        </p:spPr>
-        <p:txBody>
-          <a:bodyPr/>
-          <a:lstStyle/>
-          <a:p>
-            <a:endParaRPr lang="ko-KR" altLang="en-US"/>
-          </a:p>
-        </p:txBody>
-      </p:sp>
-      <p:sp>
-        <p:nvSpPr>
-          <p:cNvPr id="70" name="Shape 67">
-            <a:extLst>
-              <a:ext uri="{FF2B5EF4-FFF2-40B4-BE49-F238E27FC236}">
-                <a16:creationId xmlns:a16="http://schemas.microsoft.com/office/drawing/2014/main" id="{71F12678-53C5-E3B8-232C-950BB8942645}"/>
-              </a:ext>
-            </a:extLst>
-          </p:cNvPr>
-          <p:cNvSpPr/>
-          <p:nvPr/>
-        </p:nvSpPr>
-        <p:spPr>
-          <a:xfrm>
-            <a:off x="2474366" y="5670616"/>
-            <a:ext cx="1333195" cy="38405"/>
-          </a:xfrm>
-          <a:prstGeom prst="rect">
-            <a:avLst/>
-          </a:prstGeom>
-          <a:solidFill>
-            <a:srgbClr val="F87171"/>
-          </a:solidFill>
-          <a:ln w="12700">
-            <a:solidFill>
-              <a:srgbClr val="F87171">
-                <a:alpha val="0"/>
-              </a:srgbClr>
-            </a:solidFill>
-            <a:prstDash val="solid"/>
-          </a:ln>
-        </p:spPr>
-        <p:txBody>
-          <a:bodyPr/>
-          <a:lstStyle/>
-          <a:p>
-            <a:endParaRPr lang="ko-KR" altLang="en-US"/>
-          </a:p>
-        </p:txBody>
-      </p:sp>
-      <p:sp>
-        <p:nvSpPr>
-          <p:cNvPr id="71" name="Text 68">
-            <a:extLst>
-              <a:ext uri="{FF2B5EF4-FFF2-40B4-BE49-F238E27FC236}">
-                <a16:creationId xmlns:a16="http://schemas.microsoft.com/office/drawing/2014/main" id="{B047C5E1-CFB4-0DB0-5C13-F8BFE1E83EDE}"/>
-              </a:ext>
-            </a:extLst>
-          </p:cNvPr>
-          <p:cNvSpPr txBox="1"/>
-          <p:nvPr/>
-        </p:nvSpPr>
-        <p:spPr>
-          <a:xfrm>
-            <a:off x="2420417" y="5784916"/>
-            <a:ext cx="1440180" cy="191110"/>
-          </a:xfrm>
-          <a:prstGeom prst="rect">
-            <a:avLst/>
-          </a:prstGeom>
-          <a:noFill/>
-          <a:ln/>
-        </p:spPr>
-        <p:txBody>
-          <a:bodyPr wrap="square" lIns="0" tIns="0" rIns="0" bIns="0" rtlCol="0" anchor="ctr"/>
-          <a:lstStyle/>
-          <a:p>
-            <a:pPr marL="0" indent="0" algn="ctr">
-              <a:buNone/>
-            </a:pPr>
-            <a:r>
-              <a:rPr lang="en-US" sz="1200" b="1" dirty="0">
-                <a:solidFill>
-                  <a:srgbClr val="E2E8F0"/>
-                </a:solidFill>
-                <a:latin typeface="Noto Sans KR" pitchFamily="34" charset="0"/>
-                <a:ea typeface="Noto Sans KR" pitchFamily="34" charset="-122"/>
-                <a:cs typeface="Noto Sans KR" pitchFamily="34" charset="-120"/>
-              </a:rPr>
-              <a:t>정의</a:t>
-            </a:r>
-            <a:endParaRPr lang="en-US" sz="1200" dirty="0"/>
-          </a:p>
-        </p:txBody>
-      </p:sp>
-      <p:sp>
-        <p:nvSpPr>
-          <p:cNvPr id="72" name="Text 69">
-            <a:extLst>
-              <a:ext uri="{FF2B5EF4-FFF2-40B4-BE49-F238E27FC236}">
-                <a16:creationId xmlns:a16="http://schemas.microsoft.com/office/drawing/2014/main" id="{0A080667-3D29-0795-950B-75B3AF1F61A2}"/>
-              </a:ext>
-            </a:extLst>
-          </p:cNvPr>
-          <p:cNvSpPr txBox="1"/>
-          <p:nvPr/>
-        </p:nvSpPr>
-        <p:spPr>
-          <a:xfrm>
-            <a:off x="2435961" y="5986998"/>
-            <a:ext cx="1410005" cy="171907"/>
-          </a:xfrm>
-          <a:prstGeom prst="rect">
-            <a:avLst/>
-          </a:prstGeom>
-          <a:noFill/>
-          <a:ln/>
-        </p:spPr>
-        <p:txBody>
-          <a:bodyPr wrap="square" lIns="0" tIns="0" rIns="0" bIns="0" rtlCol="0" anchor="ctr"/>
-          <a:lstStyle/>
-          <a:p>
-            <a:pPr marL="0" indent="0" algn="ctr">
-              <a:buNone/>
-            </a:pPr>
-            <a:r>
-              <a:rPr lang="en-US" sz="900" dirty="0">
-                <a:solidFill>
-                  <a:srgbClr val="94A3B8"/>
-                </a:solidFill>
-                <a:latin typeface="Noto Sans KR" pitchFamily="34" charset="0"/>
-                <a:ea typeface="Noto Sans KR" pitchFamily="34" charset="-122"/>
-                <a:cs typeface="Noto Sans KR" pitchFamily="34" charset="-120"/>
-              </a:rPr>
-              <a:t>Define</a:t>
-            </a:r>
-            <a:endParaRPr lang="en-US" sz="900" dirty="0"/>
-          </a:p>
-        </p:txBody>
-      </p:sp>
-      <p:pic>
-        <p:nvPicPr>
-          <p:cNvPr id="73" name="Image 1" descr="preencoded.png">
-            <a:extLst>
-              <a:ext uri="{FF2B5EF4-FFF2-40B4-BE49-F238E27FC236}">
-                <a16:creationId xmlns:a16="http://schemas.microsoft.com/office/drawing/2014/main" id="{7536051C-E270-E9EF-0289-08A268FA4854}"/>
-              </a:ext>
-            </a:extLst>
-          </p:cNvPr>
-          <p:cNvPicPr>
-            <a:picLocks noChangeAspect="1"/>
-          </p:cNvPicPr>
-          <p:nvPr/>
-        </p:nvPicPr>
-        <p:blipFill>
-          <a:blip r:embed="rId3"/>
-          <a:srcRect t="-301" b="-301"/>
-          <a:stretch/>
-        </p:blipFill>
-        <p:spPr>
-          <a:xfrm>
-            <a:off x="3969410" y="5257307"/>
-            <a:ext cx="75895" cy="152705"/>
-          </a:xfrm>
-          <a:prstGeom prst="rect">
-            <a:avLst/>
-          </a:prstGeom>
-        </p:spPr>
-      </p:pic>
-      <p:sp>
-        <p:nvSpPr>
-          <p:cNvPr id="74" name="Shape 70">
-            <a:extLst>
-              <a:ext uri="{FF2B5EF4-FFF2-40B4-BE49-F238E27FC236}">
-                <a16:creationId xmlns:a16="http://schemas.microsoft.com/office/drawing/2014/main" id="{9F4655C2-D493-532D-7409-37926D49FC1D}"/>
-              </a:ext>
-            </a:extLst>
-          </p:cNvPr>
-          <p:cNvSpPr/>
-          <p:nvPr/>
-        </p:nvSpPr>
-        <p:spPr>
-          <a:xfrm>
-            <a:off x="4474159" y="4432518"/>
-            <a:ext cx="1143000" cy="1143000"/>
-          </a:xfrm>
-          <a:prstGeom prst="ellipse">
-            <a:avLst/>
-          </a:prstGeom>
-          <a:solidFill>
-            <a:srgbClr val="F472B6"/>
-          </a:solidFill>
-          <a:ln w="50800">
-            <a:solidFill>
-              <a:srgbClr val="0F172A"/>
-            </a:solidFill>
-            <a:prstDash val="solid"/>
-          </a:ln>
-          <a:effectLst>
-            <a:outerShdw blurRad="63500" dist="38100" dir="16200000" algn="bl" rotWithShape="0">
-              <a:srgbClr val="000000">
-                <a:alpha val="30000"/>
-              </a:srgbClr>
-            </a:outerShdw>
-          </a:effectLst>
-        </p:spPr>
-        <p:txBody>
-          <a:bodyPr/>
-          <a:lstStyle/>
-          <a:p>
-            <a:endParaRPr lang="ko-KR" altLang="en-US"/>
-          </a:p>
-        </p:txBody>
-      </p:sp>
-      <p:sp>
-        <p:nvSpPr>
-          <p:cNvPr id="75" name="Text 71">
-            <a:extLst>
-              <a:ext uri="{FF2B5EF4-FFF2-40B4-BE49-F238E27FC236}">
-                <a16:creationId xmlns:a16="http://schemas.microsoft.com/office/drawing/2014/main" id="{DCF8F629-FF7A-8DFA-DA1E-019C2F187A79}"/>
-              </a:ext>
-            </a:extLst>
-          </p:cNvPr>
-          <p:cNvSpPr txBox="1"/>
-          <p:nvPr/>
-        </p:nvSpPr>
-        <p:spPr>
-          <a:xfrm>
-            <a:off x="4906670" y="4670262"/>
-            <a:ext cx="362102" cy="667512"/>
-          </a:xfrm>
-          <a:prstGeom prst="rect">
-            <a:avLst/>
-          </a:prstGeom>
-          <a:noFill/>
-          <a:ln/>
-        </p:spPr>
-        <p:txBody>
-          <a:bodyPr wrap="square" lIns="0" tIns="0" rIns="0" bIns="0" rtlCol="0" anchor="ctr"/>
-          <a:lstStyle/>
-          <a:p>
-            <a:pPr marL="0" indent="0" algn="l">
-              <a:buNone/>
-            </a:pPr>
-            <a:r>
-              <a:rPr lang="en-US" sz="3600" b="1" dirty="0">
-                <a:solidFill>
-                  <a:srgbClr val="FFFFFF">
-                    <a:alpha val="90000"/>
-                  </a:srgbClr>
-                </a:solidFill>
-                <a:latin typeface="Noto Sans KR" pitchFamily="34" charset="0"/>
-                <a:ea typeface="Noto Sans KR" pitchFamily="34" charset="-122"/>
-                <a:cs typeface="Noto Sans KR" pitchFamily="34" charset="-120"/>
-              </a:rPr>
-              <a:t>3</a:t>
-            </a:r>
-            <a:endParaRPr lang="en-US" sz="3600" dirty="0"/>
-          </a:p>
-        </p:txBody>
-      </p:sp>
-      <p:sp>
-        <p:nvSpPr>
-          <p:cNvPr id="76" name="Shape 72">
-            <a:extLst>
-              <a:ext uri="{FF2B5EF4-FFF2-40B4-BE49-F238E27FC236}">
-                <a16:creationId xmlns:a16="http://schemas.microsoft.com/office/drawing/2014/main" id="{2AB1F874-B168-5881-35CA-7BA53F4EDC08}"/>
-              </a:ext>
-            </a:extLst>
-          </p:cNvPr>
-          <p:cNvSpPr/>
-          <p:nvPr/>
-        </p:nvSpPr>
-        <p:spPr>
-          <a:xfrm>
-            <a:off x="4379061" y="5670616"/>
-            <a:ext cx="1333195" cy="571500"/>
-          </a:xfrm>
-          <a:prstGeom prst="rect">
-            <a:avLst/>
-          </a:prstGeom>
-          <a:solidFill>
-            <a:srgbClr val="1E293B"/>
-          </a:solidFill>
-          <a:ln/>
-          <a:effectLst>
-            <a:outerShdw blurRad="63500" dist="38100" dir="16200000" algn="bl" rotWithShape="0">
-              <a:srgbClr val="000000">
-                <a:alpha val="10000"/>
-              </a:srgbClr>
-            </a:outerShdw>
-          </a:effectLst>
-        </p:spPr>
-        <p:txBody>
-          <a:bodyPr/>
-          <a:lstStyle/>
-          <a:p>
-            <a:endParaRPr lang="ko-KR" altLang="en-US"/>
-          </a:p>
-        </p:txBody>
-      </p:sp>
-      <p:sp>
-        <p:nvSpPr>
-          <p:cNvPr id="77" name="Shape 73">
-            <a:extLst>
-              <a:ext uri="{FF2B5EF4-FFF2-40B4-BE49-F238E27FC236}">
-                <a16:creationId xmlns:a16="http://schemas.microsoft.com/office/drawing/2014/main" id="{6ED4D021-918D-8390-5C89-549B99DCE961}"/>
-              </a:ext>
-            </a:extLst>
-          </p:cNvPr>
-          <p:cNvSpPr/>
-          <p:nvPr/>
-        </p:nvSpPr>
-        <p:spPr>
-          <a:xfrm>
-            <a:off x="4379061" y="5670616"/>
-            <a:ext cx="1333195" cy="38405"/>
-          </a:xfrm>
-          <a:prstGeom prst="rect">
-            <a:avLst/>
-          </a:prstGeom>
-          <a:solidFill>
-            <a:srgbClr val="F472B6"/>
-          </a:solidFill>
-          <a:ln w="12700">
-            <a:solidFill>
-              <a:srgbClr val="F472B6">
-                <a:alpha val="0"/>
-              </a:srgbClr>
-            </a:solidFill>
-            <a:prstDash val="solid"/>
-          </a:ln>
-        </p:spPr>
-        <p:txBody>
-          <a:bodyPr/>
-          <a:lstStyle/>
-          <a:p>
-            <a:endParaRPr lang="ko-KR" altLang="en-US"/>
-          </a:p>
-        </p:txBody>
-      </p:sp>
-      <p:sp>
-        <p:nvSpPr>
-          <p:cNvPr id="78" name="Text 74">
-            <a:extLst>
-              <a:ext uri="{FF2B5EF4-FFF2-40B4-BE49-F238E27FC236}">
-                <a16:creationId xmlns:a16="http://schemas.microsoft.com/office/drawing/2014/main" id="{EE2526F1-5FFC-041F-7FA8-BFFD83D5F9F9}"/>
-              </a:ext>
-            </a:extLst>
-          </p:cNvPr>
-          <p:cNvSpPr txBox="1"/>
-          <p:nvPr/>
-        </p:nvSpPr>
-        <p:spPr>
-          <a:xfrm>
-            <a:off x="4325112" y="5784916"/>
-            <a:ext cx="1440180" cy="191110"/>
-          </a:xfrm>
-          <a:prstGeom prst="rect">
-            <a:avLst/>
-          </a:prstGeom>
-          <a:noFill/>
-          <a:ln/>
-        </p:spPr>
-        <p:txBody>
-          <a:bodyPr wrap="square" lIns="0" tIns="0" rIns="0" bIns="0" rtlCol="0" anchor="ctr"/>
-          <a:lstStyle/>
-          <a:p>
-            <a:pPr marL="0" indent="0" algn="ctr">
-              <a:buNone/>
-            </a:pPr>
-            <a:r>
-              <a:rPr lang="en-US" sz="1200" b="1" dirty="0">
-                <a:solidFill>
-                  <a:srgbClr val="E2E8F0"/>
-                </a:solidFill>
-                <a:latin typeface="Noto Sans KR" pitchFamily="34" charset="0"/>
-                <a:ea typeface="Noto Sans KR" pitchFamily="34" charset="-122"/>
-                <a:cs typeface="Noto Sans KR" pitchFamily="34" charset="-120"/>
-              </a:rPr>
-              <a:t>아이디어 도출</a:t>
-            </a:r>
-            <a:endParaRPr lang="en-US" sz="1200" dirty="0"/>
-          </a:p>
-        </p:txBody>
-      </p:sp>
-      <p:sp>
-        <p:nvSpPr>
-          <p:cNvPr id="79" name="Text 75">
-            <a:extLst>
-              <a:ext uri="{FF2B5EF4-FFF2-40B4-BE49-F238E27FC236}">
-                <a16:creationId xmlns:a16="http://schemas.microsoft.com/office/drawing/2014/main" id="{42AC0787-7D9D-8923-EA93-EBA4A25DF0DB}"/>
-              </a:ext>
-            </a:extLst>
-          </p:cNvPr>
-          <p:cNvSpPr txBox="1"/>
-          <p:nvPr/>
-        </p:nvSpPr>
-        <p:spPr>
-          <a:xfrm>
-            <a:off x="4340657" y="5986998"/>
-            <a:ext cx="1410005" cy="171907"/>
-          </a:xfrm>
-          <a:prstGeom prst="rect">
-            <a:avLst/>
-          </a:prstGeom>
-          <a:noFill/>
-          <a:ln/>
-        </p:spPr>
-        <p:txBody>
-          <a:bodyPr wrap="square" lIns="0" tIns="0" rIns="0" bIns="0" rtlCol="0" anchor="ctr"/>
-          <a:lstStyle/>
-          <a:p>
-            <a:pPr marL="0" indent="0" algn="ctr">
-              <a:buNone/>
-            </a:pPr>
-            <a:r>
-              <a:rPr lang="en-US" sz="900" dirty="0">
-                <a:solidFill>
-                  <a:srgbClr val="94A3B8"/>
-                </a:solidFill>
-                <a:latin typeface="Noto Sans KR" pitchFamily="34" charset="0"/>
-                <a:ea typeface="Noto Sans KR" pitchFamily="34" charset="-122"/>
-                <a:cs typeface="Noto Sans KR" pitchFamily="34" charset="-120"/>
-              </a:rPr>
-              <a:t>Ideate</a:t>
-            </a:r>
-            <a:endParaRPr lang="en-US" sz="900" dirty="0"/>
-          </a:p>
-        </p:txBody>
-      </p:sp>
-      <p:pic>
-        <p:nvPicPr>
-          <p:cNvPr id="80" name="Image 2" descr="preencoded.png">
-            <a:extLst>
-              <a:ext uri="{FF2B5EF4-FFF2-40B4-BE49-F238E27FC236}">
-                <a16:creationId xmlns:a16="http://schemas.microsoft.com/office/drawing/2014/main" id="{3BA4CE58-5B29-B75E-053F-38B6999BD53B}"/>
-              </a:ext>
-            </a:extLst>
-          </p:cNvPr>
-          <p:cNvPicPr>
-            <a:picLocks noChangeAspect="1"/>
-          </p:cNvPicPr>
-          <p:nvPr/>
-        </p:nvPicPr>
-        <p:blipFill>
-          <a:blip r:embed="rId3"/>
-          <a:srcRect t="-301" b="-301"/>
-          <a:stretch/>
-        </p:blipFill>
-        <p:spPr>
-          <a:xfrm>
-            <a:off x="5874105" y="5257307"/>
-            <a:ext cx="75895" cy="152705"/>
-          </a:xfrm>
-          <a:prstGeom prst="rect">
-            <a:avLst/>
-          </a:prstGeom>
-        </p:spPr>
-      </p:pic>
-      <p:sp>
-        <p:nvSpPr>
-          <p:cNvPr id="81" name="Shape 76">
-            <a:extLst>
-              <a:ext uri="{FF2B5EF4-FFF2-40B4-BE49-F238E27FC236}">
-                <a16:creationId xmlns:a16="http://schemas.microsoft.com/office/drawing/2014/main" id="{008D29E9-2449-B40C-007A-FDE01F3D7927}"/>
-              </a:ext>
-            </a:extLst>
-          </p:cNvPr>
-          <p:cNvSpPr/>
-          <p:nvPr/>
-        </p:nvSpPr>
-        <p:spPr>
-          <a:xfrm>
-            <a:off x="6378854" y="4432518"/>
-            <a:ext cx="1143000" cy="1143000"/>
-          </a:xfrm>
-          <a:prstGeom prst="ellipse">
-            <a:avLst/>
-          </a:prstGeom>
-          <a:solidFill>
-            <a:srgbClr val="C084FC"/>
-          </a:solidFill>
-          <a:ln w="50800">
-            <a:solidFill>
-              <a:srgbClr val="0F172A"/>
-            </a:solidFill>
-            <a:prstDash val="solid"/>
-          </a:ln>
-          <a:effectLst>
-            <a:outerShdw blurRad="63500" dist="38100" dir="16200000" algn="bl" rotWithShape="0">
-              <a:srgbClr val="000000">
-                <a:alpha val="30000"/>
-              </a:srgbClr>
-            </a:outerShdw>
-          </a:effectLst>
-        </p:spPr>
-        <p:txBody>
-          <a:bodyPr/>
-          <a:lstStyle/>
-          <a:p>
-            <a:endParaRPr lang="ko-KR" altLang="en-US"/>
-          </a:p>
-        </p:txBody>
-      </p:sp>
-      <p:sp>
-        <p:nvSpPr>
-          <p:cNvPr id="82" name="Text 77">
-            <a:extLst>
-              <a:ext uri="{FF2B5EF4-FFF2-40B4-BE49-F238E27FC236}">
-                <a16:creationId xmlns:a16="http://schemas.microsoft.com/office/drawing/2014/main" id="{B368A8BC-051B-1DE3-3D2C-339E442020A4}"/>
-              </a:ext>
-            </a:extLst>
-          </p:cNvPr>
-          <p:cNvSpPr txBox="1"/>
-          <p:nvPr/>
-        </p:nvSpPr>
-        <p:spPr>
-          <a:xfrm>
-            <a:off x="6811365" y="4670262"/>
-            <a:ext cx="362102" cy="667512"/>
-          </a:xfrm>
-          <a:prstGeom prst="rect">
-            <a:avLst/>
-          </a:prstGeom>
-          <a:noFill/>
-          <a:ln/>
-        </p:spPr>
-        <p:txBody>
-          <a:bodyPr wrap="square" lIns="0" tIns="0" rIns="0" bIns="0" rtlCol="0" anchor="ctr"/>
-          <a:lstStyle/>
-          <a:p>
-            <a:pPr marL="0" indent="0" algn="l">
-              <a:buNone/>
-            </a:pPr>
-            <a:r>
-              <a:rPr lang="en-US" sz="3600" b="1" dirty="0">
-                <a:solidFill>
-                  <a:srgbClr val="FFFFFF">
-                    <a:alpha val="90000"/>
-                  </a:srgbClr>
-                </a:solidFill>
-                <a:latin typeface="Noto Sans KR" pitchFamily="34" charset="0"/>
-                <a:ea typeface="Noto Sans KR" pitchFamily="34" charset="-122"/>
-                <a:cs typeface="Noto Sans KR" pitchFamily="34" charset="-120"/>
-              </a:rPr>
-              <a:t>4</a:t>
-            </a:r>
-            <a:endParaRPr lang="en-US" sz="3600" dirty="0"/>
-          </a:p>
-        </p:txBody>
-      </p:sp>
-      <p:sp>
-        <p:nvSpPr>
-          <p:cNvPr id="83" name="Shape 78">
-            <a:extLst>
-              <a:ext uri="{FF2B5EF4-FFF2-40B4-BE49-F238E27FC236}">
-                <a16:creationId xmlns:a16="http://schemas.microsoft.com/office/drawing/2014/main" id="{BDF10F49-A09B-153B-390C-E72FAA68112A}"/>
-              </a:ext>
-            </a:extLst>
-          </p:cNvPr>
-          <p:cNvSpPr/>
-          <p:nvPr/>
-        </p:nvSpPr>
-        <p:spPr>
-          <a:xfrm>
-            <a:off x="6283757" y="5670616"/>
-            <a:ext cx="1333195" cy="571500"/>
-          </a:xfrm>
-          <a:prstGeom prst="rect">
-            <a:avLst/>
-          </a:prstGeom>
-          <a:solidFill>
-            <a:srgbClr val="1E293B"/>
-          </a:solidFill>
-          <a:ln/>
-          <a:effectLst>
-            <a:outerShdw blurRad="63500" dist="38100" dir="16200000" algn="bl" rotWithShape="0">
-              <a:srgbClr val="000000">
-                <a:alpha val="10000"/>
-              </a:srgbClr>
-            </a:outerShdw>
-          </a:effectLst>
-        </p:spPr>
-        <p:txBody>
-          <a:bodyPr/>
-          <a:lstStyle/>
-          <a:p>
-            <a:endParaRPr lang="ko-KR" altLang="en-US"/>
-          </a:p>
-        </p:txBody>
-      </p:sp>
-      <p:sp>
-        <p:nvSpPr>
-          <p:cNvPr id="84" name="Shape 79">
-            <a:extLst>
-              <a:ext uri="{FF2B5EF4-FFF2-40B4-BE49-F238E27FC236}">
-                <a16:creationId xmlns:a16="http://schemas.microsoft.com/office/drawing/2014/main" id="{4DC0DC23-C723-DC1A-4D7E-71F957FFF2FA}"/>
-              </a:ext>
-            </a:extLst>
-          </p:cNvPr>
-          <p:cNvSpPr/>
-          <p:nvPr/>
-        </p:nvSpPr>
-        <p:spPr>
-          <a:xfrm>
-            <a:off x="6283757" y="5670616"/>
-            <a:ext cx="1333195" cy="38405"/>
-          </a:xfrm>
-          <a:prstGeom prst="rect">
-            <a:avLst/>
-          </a:prstGeom>
-          <a:solidFill>
-            <a:srgbClr val="C084FC"/>
-          </a:solidFill>
-          <a:ln w="12700">
-            <a:solidFill>
-              <a:srgbClr val="C084FC">
-                <a:alpha val="0"/>
-              </a:srgbClr>
-            </a:solidFill>
-            <a:prstDash val="solid"/>
-          </a:ln>
-        </p:spPr>
-        <p:txBody>
-          <a:bodyPr/>
-          <a:lstStyle/>
-          <a:p>
-            <a:endParaRPr lang="ko-KR" altLang="en-US"/>
-          </a:p>
-        </p:txBody>
-      </p:sp>
-      <p:sp>
-        <p:nvSpPr>
-          <p:cNvPr id="85" name="Text 80">
-            <a:extLst>
-              <a:ext uri="{FF2B5EF4-FFF2-40B4-BE49-F238E27FC236}">
-                <a16:creationId xmlns:a16="http://schemas.microsoft.com/office/drawing/2014/main" id="{BF328604-C141-D616-A34B-A08C0B198B36}"/>
-              </a:ext>
-            </a:extLst>
-          </p:cNvPr>
-          <p:cNvSpPr txBox="1"/>
-          <p:nvPr/>
-        </p:nvSpPr>
-        <p:spPr>
-          <a:xfrm>
-            <a:off x="6230721" y="5784916"/>
-            <a:ext cx="1440180" cy="191110"/>
-          </a:xfrm>
-          <a:prstGeom prst="rect">
-            <a:avLst/>
-          </a:prstGeom>
-          <a:noFill/>
-          <a:ln/>
-        </p:spPr>
-        <p:txBody>
-          <a:bodyPr wrap="square" lIns="0" tIns="0" rIns="0" bIns="0" rtlCol="0" anchor="ctr"/>
-          <a:lstStyle/>
-          <a:p>
-            <a:pPr marL="0" indent="0" algn="ctr">
-              <a:buNone/>
-            </a:pPr>
-            <a:r>
-              <a:rPr lang="en-US" sz="1200" b="1" dirty="0">
-                <a:solidFill>
-                  <a:srgbClr val="E2E8F0"/>
-                </a:solidFill>
-                <a:latin typeface="Noto Sans KR" pitchFamily="34" charset="0"/>
-                <a:ea typeface="Noto Sans KR" pitchFamily="34" charset="-122"/>
-                <a:cs typeface="Noto Sans KR" pitchFamily="34" charset="-120"/>
-              </a:rPr>
-              <a:t>시제품 제작</a:t>
-            </a:r>
-            <a:endParaRPr lang="en-US" sz="1200" dirty="0"/>
-          </a:p>
-        </p:txBody>
-      </p:sp>
-      <p:sp>
-        <p:nvSpPr>
-          <p:cNvPr id="86" name="Text 81">
-            <a:extLst>
-              <a:ext uri="{FF2B5EF4-FFF2-40B4-BE49-F238E27FC236}">
-                <a16:creationId xmlns:a16="http://schemas.microsoft.com/office/drawing/2014/main" id="{AF99AEBF-3216-2B12-B4F3-F6F7E803C13C}"/>
-              </a:ext>
-            </a:extLst>
-          </p:cNvPr>
-          <p:cNvSpPr txBox="1"/>
-          <p:nvPr/>
-        </p:nvSpPr>
-        <p:spPr>
-          <a:xfrm>
-            <a:off x="6246266" y="5986998"/>
-            <a:ext cx="1410005" cy="171907"/>
-          </a:xfrm>
-          <a:prstGeom prst="rect">
-            <a:avLst/>
-          </a:prstGeom>
-          <a:noFill/>
-          <a:ln/>
-        </p:spPr>
-        <p:txBody>
-          <a:bodyPr wrap="square" lIns="0" tIns="0" rIns="0" bIns="0" rtlCol="0" anchor="ctr"/>
-          <a:lstStyle/>
-          <a:p>
-            <a:pPr marL="0" indent="0" algn="ctr">
-              <a:buNone/>
-            </a:pPr>
-            <a:r>
-              <a:rPr lang="en-US" sz="900" dirty="0">
-                <a:solidFill>
-                  <a:srgbClr val="94A3B8"/>
-                </a:solidFill>
-                <a:latin typeface="Noto Sans KR" pitchFamily="34" charset="0"/>
-                <a:ea typeface="Noto Sans KR" pitchFamily="34" charset="-122"/>
-                <a:cs typeface="Noto Sans KR" pitchFamily="34" charset="-120"/>
-              </a:rPr>
-              <a:t>Prototype</a:t>
-            </a:r>
-            <a:endParaRPr lang="en-US" sz="900" dirty="0"/>
-          </a:p>
-        </p:txBody>
-      </p:sp>
-      <p:pic>
-        <p:nvPicPr>
-          <p:cNvPr id="87" name="Image 3" descr="preencoded.png">
-            <a:extLst>
-              <a:ext uri="{FF2B5EF4-FFF2-40B4-BE49-F238E27FC236}">
-                <a16:creationId xmlns:a16="http://schemas.microsoft.com/office/drawing/2014/main" id="{A21FDDAB-6AE9-0FC9-F694-C27844648EEC}"/>
-              </a:ext>
-            </a:extLst>
-          </p:cNvPr>
-          <p:cNvPicPr>
-            <a:picLocks noChangeAspect="1"/>
-          </p:cNvPicPr>
-          <p:nvPr/>
-        </p:nvPicPr>
-        <p:blipFill>
-          <a:blip r:embed="rId3"/>
-          <a:srcRect t="-301" b="-301"/>
-          <a:stretch/>
-        </p:blipFill>
-        <p:spPr>
-          <a:xfrm>
-            <a:off x="7779715" y="5257307"/>
-            <a:ext cx="75895" cy="152705"/>
-          </a:xfrm>
-          <a:prstGeom prst="rect">
-            <a:avLst/>
-          </a:prstGeom>
-        </p:spPr>
-      </p:pic>
-      <p:sp>
-        <p:nvSpPr>
-          <p:cNvPr id="88" name="Shape 82">
-            <a:extLst>
-              <a:ext uri="{FF2B5EF4-FFF2-40B4-BE49-F238E27FC236}">
-                <a16:creationId xmlns:a16="http://schemas.microsoft.com/office/drawing/2014/main" id="{D0DE9EC8-6BBE-CA84-CD36-96DB3C2D4835}"/>
-              </a:ext>
-            </a:extLst>
-          </p:cNvPr>
-          <p:cNvSpPr/>
-          <p:nvPr/>
-        </p:nvSpPr>
-        <p:spPr>
-          <a:xfrm>
-            <a:off x="8284464" y="4432518"/>
-            <a:ext cx="1143000" cy="1143000"/>
-          </a:xfrm>
-          <a:prstGeom prst="ellipse">
-            <a:avLst/>
-          </a:prstGeom>
-          <a:solidFill>
-            <a:srgbClr val="60A5FA"/>
-          </a:solidFill>
-          <a:ln w="50800">
-            <a:solidFill>
-              <a:srgbClr val="0F172A"/>
-            </a:solidFill>
-            <a:prstDash val="solid"/>
-          </a:ln>
-          <a:effectLst>
-            <a:outerShdw blurRad="63500" dist="38100" dir="16200000" algn="bl" rotWithShape="0">
-              <a:srgbClr val="000000">
-                <a:alpha val="30000"/>
-              </a:srgbClr>
-            </a:outerShdw>
-          </a:effectLst>
-        </p:spPr>
-        <p:txBody>
-          <a:bodyPr/>
-          <a:lstStyle/>
-          <a:p>
-            <a:endParaRPr lang="ko-KR" altLang="en-US"/>
-          </a:p>
-        </p:txBody>
-      </p:sp>
-      <p:sp>
-        <p:nvSpPr>
-          <p:cNvPr id="89" name="Text 83">
-            <a:extLst>
-              <a:ext uri="{FF2B5EF4-FFF2-40B4-BE49-F238E27FC236}">
-                <a16:creationId xmlns:a16="http://schemas.microsoft.com/office/drawing/2014/main" id="{395D9BB7-CEC6-2EB6-03CF-87F57A769FEB}"/>
-              </a:ext>
-            </a:extLst>
-          </p:cNvPr>
-          <p:cNvSpPr txBox="1"/>
-          <p:nvPr/>
-        </p:nvSpPr>
-        <p:spPr>
-          <a:xfrm>
-            <a:off x="8716061" y="4670262"/>
-            <a:ext cx="362102" cy="667512"/>
-          </a:xfrm>
-          <a:prstGeom prst="rect">
-            <a:avLst/>
-          </a:prstGeom>
-          <a:noFill/>
-          <a:ln/>
-        </p:spPr>
-        <p:txBody>
-          <a:bodyPr wrap="square" lIns="0" tIns="0" rIns="0" bIns="0" rtlCol="0" anchor="ctr"/>
-          <a:lstStyle/>
-          <a:p>
-            <a:pPr marL="0" indent="0" algn="l">
-              <a:buNone/>
-            </a:pPr>
-            <a:r>
-              <a:rPr lang="en-US" sz="3600" b="1" dirty="0">
-                <a:solidFill>
-                  <a:srgbClr val="FFFFFF">
-                    <a:alpha val="90000"/>
-                  </a:srgbClr>
-                </a:solidFill>
-                <a:latin typeface="Noto Sans KR" pitchFamily="34" charset="0"/>
-                <a:ea typeface="Noto Sans KR" pitchFamily="34" charset="-122"/>
-                <a:cs typeface="Noto Sans KR" pitchFamily="34" charset="-120"/>
-              </a:rPr>
-              <a:t>5</a:t>
-            </a:r>
-            <a:endParaRPr lang="en-US" sz="3600" dirty="0"/>
-          </a:p>
-        </p:txBody>
-      </p:sp>
-      <p:sp>
-        <p:nvSpPr>
-          <p:cNvPr id="90" name="Shape 84">
-            <a:extLst>
-              <a:ext uri="{FF2B5EF4-FFF2-40B4-BE49-F238E27FC236}">
-                <a16:creationId xmlns:a16="http://schemas.microsoft.com/office/drawing/2014/main" id="{2352D72D-A6B5-2F3D-5A95-D93C1CDF993E}"/>
-              </a:ext>
-            </a:extLst>
-          </p:cNvPr>
-          <p:cNvSpPr/>
-          <p:nvPr/>
-        </p:nvSpPr>
-        <p:spPr>
-          <a:xfrm>
-            <a:off x="8189366" y="5670616"/>
-            <a:ext cx="1333195" cy="571500"/>
-          </a:xfrm>
-          <a:prstGeom prst="rect">
-            <a:avLst/>
-          </a:prstGeom>
-          <a:solidFill>
-            <a:srgbClr val="1E293B"/>
-          </a:solidFill>
-          <a:ln/>
-          <a:effectLst>
-            <a:outerShdw blurRad="63500" dist="38100" dir="16200000" algn="bl" rotWithShape="0">
-              <a:srgbClr val="000000">
-                <a:alpha val="10000"/>
-              </a:srgbClr>
-            </a:outerShdw>
-          </a:effectLst>
-        </p:spPr>
-        <p:txBody>
-          <a:bodyPr/>
-          <a:lstStyle/>
-          <a:p>
-            <a:endParaRPr lang="ko-KR" altLang="en-US"/>
-          </a:p>
-        </p:txBody>
-      </p:sp>
-      <p:sp>
-        <p:nvSpPr>
-          <p:cNvPr id="91" name="Shape 85">
-            <a:extLst>
-              <a:ext uri="{FF2B5EF4-FFF2-40B4-BE49-F238E27FC236}">
-                <a16:creationId xmlns:a16="http://schemas.microsoft.com/office/drawing/2014/main" id="{4A30A5DB-A7DA-531C-5467-4B8948091477}"/>
-              </a:ext>
-            </a:extLst>
-          </p:cNvPr>
-          <p:cNvSpPr/>
-          <p:nvPr/>
-        </p:nvSpPr>
-        <p:spPr>
-          <a:xfrm>
-            <a:off x="8189366" y="5670616"/>
-            <a:ext cx="1333195" cy="38405"/>
-          </a:xfrm>
-          <a:prstGeom prst="rect">
-            <a:avLst/>
-          </a:prstGeom>
-          <a:solidFill>
-            <a:srgbClr val="60A5FA"/>
-          </a:solidFill>
-          <a:ln w="12700">
-            <a:solidFill>
-              <a:srgbClr val="60A5FA">
-                <a:alpha val="0"/>
-              </a:srgbClr>
-            </a:solidFill>
-            <a:prstDash val="solid"/>
-          </a:ln>
-        </p:spPr>
-        <p:txBody>
-          <a:bodyPr/>
-          <a:lstStyle/>
-          <a:p>
-            <a:endParaRPr lang="ko-KR" altLang="en-US"/>
-          </a:p>
-        </p:txBody>
-      </p:sp>
-      <p:sp>
-        <p:nvSpPr>
-          <p:cNvPr id="92" name="Text 86">
-            <a:extLst>
-              <a:ext uri="{FF2B5EF4-FFF2-40B4-BE49-F238E27FC236}">
-                <a16:creationId xmlns:a16="http://schemas.microsoft.com/office/drawing/2014/main" id="{3DA0A375-511B-60F0-FA9F-FB5C3AFC9C3E}"/>
-              </a:ext>
-            </a:extLst>
-          </p:cNvPr>
-          <p:cNvSpPr txBox="1"/>
-          <p:nvPr/>
-        </p:nvSpPr>
-        <p:spPr>
-          <a:xfrm>
-            <a:off x="8135417" y="5784916"/>
-            <a:ext cx="1440180" cy="191110"/>
-          </a:xfrm>
-          <a:prstGeom prst="rect">
-            <a:avLst/>
-          </a:prstGeom>
-          <a:noFill/>
-          <a:ln/>
-        </p:spPr>
-        <p:txBody>
-          <a:bodyPr wrap="square" lIns="0" tIns="0" rIns="0" bIns="0" rtlCol="0" anchor="ctr"/>
-          <a:lstStyle/>
-          <a:p>
-            <a:pPr marL="0" indent="0" algn="ctr">
-              <a:buNone/>
-            </a:pPr>
-            <a:r>
-              <a:rPr lang="en-US" sz="1200" b="1" dirty="0">
-                <a:solidFill>
-                  <a:srgbClr val="E2E8F0"/>
-                </a:solidFill>
-                <a:latin typeface="Noto Sans KR" pitchFamily="34" charset="0"/>
-                <a:ea typeface="Noto Sans KR" pitchFamily="34" charset="-122"/>
-                <a:cs typeface="Noto Sans KR" pitchFamily="34" charset="-120"/>
-              </a:rPr>
-              <a:t>테스트</a:t>
-            </a:r>
-            <a:endParaRPr lang="en-US" sz="1200" dirty="0"/>
-          </a:p>
-        </p:txBody>
-      </p:sp>
-      <p:sp>
-        <p:nvSpPr>
-          <p:cNvPr id="93" name="Text 87">
-            <a:extLst>
-              <a:ext uri="{FF2B5EF4-FFF2-40B4-BE49-F238E27FC236}">
-                <a16:creationId xmlns:a16="http://schemas.microsoft.com/office/drawing/2014/main" id="{CB35E273-4BBA-0D48-D313-18BB96F3E88C}"/>
-              </a:ext>
-            </a:extLst>
-          </p:cNvPr>
-          <p:cNvSpPr txBox="1"/>
-          <p:nvPr/>
-        </p:nvSpPr>
-        <p:spPr>
-          <a:xfrm>
-            <a:off x="8150961" y="5986998"/>
-            <a:ext cx="1410005" cy="171907"/>
-          </a:xfrm>
-          <a:prstGeom prst="rect">
-            <a:avLst/>
-          </a:prstGeom>
-          <a:noFill/>
-          <a:ln/>
-        </p:spPr>
-        <p:txBody>
-          <a:bodyPr wrap="square" lIns="0" tIns="0" rIns="0" bIns="0" rtlCol="0" anchor="ctr"/>
-          <a:lstStyle/>
-          <a:p>
-            <a:pPr marL="0" indent="0" algn="ctr">
-              <a:buNone/>
-            </a:pPr>
-            <a:r>
-              <a:rPr lang="en-US" sz="900" dirty="0">
-                <a:solidFill>
-                  <a:srgbClr val="94A3B8"/>
-                </a:solidFill>
-                <a:latin typeface="Noto Sans KR" pitchFamily="34" charset="0"/>
-                <a:ea typeface="Noto Sans KR" pitchFamily="34" charset="-122"/>
-                <a:cs typeface="Noto Sans KR" pitchFamily="34" charset="-120"/>
-              </a:rPr>
-              <a:t>Test</a:t>
-            </a:r>
-            <a:endParaRPr lang="en-US" sz="900" dirty="0"/>
-          </a:p>
-        </p:txBody>
-      </p:sp>
-      <p:pic>
-        <p:nvPicPr>
-          <p:cNvPr id="94" name="Image 4" descr="preencoded.png">
-            <a:extLst>
-              <a:ext uri="{FF2B5EF4-FFF2-40B4-BE49-F238E27FC236}">
-                <a16:creationId xmlns:a16="http://schemas.microsoft.com/office/drawing/2014/main" id="{615DA80E-02AD-659D-2B30-D7621854841B}"/>
-              </a:ext>
-            </a:extLst>
-          </p:cNvPr>
-          <p:cNvPicPr>
-            <a:picLocks noChangeAspect="1"/>
-          </p:cNvPicPr>
-          <p:nvPr/>
-        </p:nvPicPr>
-        <p:blipFill>
-          <a:blip r:embed="rId3"/>
-          <a:srcRect t="-301" b="-301"/>
-          <a:stretch/>
-        </p:blipFill>
-        <p:spPr>
-          <a:xfrm>
-            <a:off x="9684410" y="5257307"/>
-            <a:ext cx="75895" cy="152705"/>
-          </a:xfrm>
-          <a:prstGeom prst="rect">
-            <a:avLst/>
-          </a:prstGeom>
-        </p:spPr>
-      </p:pic>
-      <p:sp>
-        <p:nvSpPr>
-          <p:cNvPr id="95" name="Shape 88">
-            <a:extLst>
-              <a:ext uri="{FF2B5EF4-FFF2-40B4-BE49-F238E27FC236}">
-                <a16:creationId xmlns:a16="http://schemas.microsoft.com/office/drawing/2014/main" id="{A16355A9-D405-DB2F-147D-C82EE3D85195}"/>
-              </a:ext>
-            </a:extLst>
-          </p:cNvPr>
-          <p:cNvSpPr/>
-          <p:nvPr/>
-        </p:nvSpPr>
-        <p:spPr>
-          <a:xfrm>
-            <a:off x="10189159" y="4432518"/>
-            <a:ext cx="1143000" cy="1143000"/>
-          </a:xfrm>
-          <a:prstGeom prst="ellipse">
-            <a:avLst/>
-          </a:prstGeom>
-          <a:solidFill>
-            <a:srgbClr val="4ADE80"/>
-          </a:solidFill>
-          <a:ln w="50800">
-            <a:solidFill>
-              <a:srgbClr val="0F172A"/>
-            </a:solidFill>
-            <a:prstDash val="solid"/>
-          </a:ln>
-          <a:effectLst>
-            <a:outerShdw blurRad="63500" dist="38100" dir="16200000" algn="bl" rotWithShape="0">
-              <a:srgbClr val="000000">
-                <a:alpha val="30000"/>
-              </a:srgbClr>
-            </a:outerShdw>
-          </a:effectLst>
-        </p:spPr>
-        <p:txBody>
-          <a:bodyPr/>
-          <a:lstStyle/>
-          <a:p>
-            <a:endParaRPr lang="ko-KR" altLang="en-US"/>
-          </a:p>
-        </p:txBody>
-      </p:sp>
-      <p:sp>
-        <p:nvSpPr>
-          <p:cNvPr id="96" name="Text 89">
-            <a:extLst>
-              <a:ext uri="{FF2B5EF4-FFF2-40B4-BE49-F238E27FC236}">
-                <a16:creationId xmlns:a16="http://schemas.microsoft.com/office/drawing/2014/main" id="{B0EA0B61-B8F7-60CA-D808-0D992C6FB1C3}"/>
-              </a:ext>
-            </a:extLst>
-          </p:cNvPr>
-          <p:cNvSpPr txBox="1"/>
-          <p:nvPr/>
-        </p:nvSpPr>
-        <p:spPr>
-          <a:xfrm>
-            <a:off x="10621670" y="4670262"/>
-            <a:ext cx="362102" cy="667512"/>
-          </a:xfrm>
-          <a:prstGeom prst="rect">
-            <a:avLst/>
-          </a:prstGeom>
-          <a:noFill/>
-          <a:ln/>
-        </p:spPr>
-        <p:txBody>
-          <a:bodyPr wrap="square" lIns="0" tIns="0" rIns="0" bIns="0" rtlCol="0" anchor="ctr"/>
-          <a:lstStyle/>
-          <a:p>
-            <a:pPr marL="0" indent="0" algn="l">
-              <a:buNone/>
-            </a:pPr>
-            <a:r>
-              <a:rPr lang="en-US" sz="3600" b="1" dirty="0">
-                <a:solidFill>
-                  <a:srgbClr val="FFFFFF">
-                    <a:alpha val="90000"/>
-                  </a:srgbClr>
-                </a:solidFill>
-                <a:latin typeface="Noto Sans KR" pitchFamily="34" charset="0"/>
-                <a:ea typeface="Noto Sans KR" pitchFamily="34" charset="-122"/>
-                <a:cs typeface="Noto Sans KR" pitchFamily="34" charset="-120"/>
-              </a:rPr>
-              <a:t>6</a:t>
-            </a:r>
-            <a:endParaRPr lang="en-US" sz="3600" dirty="0"/>
-          </a:p>
-        </p:txBody>
-      </p:sp>
-      <p:sp>
-        <p:nvSpPr>
-          <p:cNvPr id="97" name="Shape 90">
-            <a:extLst>
-              <a:ext uri="{FF2B5EF4-FFF2-40B4-BE49-F238E27FC236}">
-                <a16:creationId xmlns:a16="http://schemas.microsoft.com/office/drawing/2014/main" id="{9CAEA0E2-B9EC-59FC-3D43-E382FED002CD}"/>
-              </a:ext>
-            </a:extLst>
-          </p:cNvPr>
-          <p:cNvSpPr/>
-          <p:nvPr/>
-        </p:nvSpPr>
-        <p:spPr>
-          <a:xfrm>
-            <a:off x="10094061" y="5670616"/>
-            <a:ext cx="1333195" cy="571500"/>
-          </a:xfrm>
-          <a:prstGeom prst="rect">
-            <a:avLst/>
-          </a:prstGeom>
-          <a:solidFill>
-            <a:srgbClr val="1E293B"/>
-          </a:solidFill>
-          <a:ln/>
-          <a:effectLst>
-            <a:outerShdw blurRad="63500" dist="38100" dir="16200000" algn="bl" rotWithShape="0">
-              <a:srgbClr val="000000">
-                <a:alpha val="10000"/>
-              </a:srgbClr>
-            </a:outerShdw>
-          </a:effectLst>
-        </p:spPr>
-        <p:txBody>
-          <a:bodyPr/>
-          <a:lstStyle/>
-          <a:p>
-            <a:endParaRPr lang="ko-KR" altLang="en-US"/>
-          </a:p>
-        </p:txBody>
-      </p:sp>
-      <p:sp>
-        <p:nvSpPr>
-          <p:cNvPr id="98" name="Shape 91">
-            <a:extLst>
-              <a:ext uri="{FF2B5EF4-FFF2-40B4-BE49-F238E27FC236}">
-                <a16:creationId xmlns:a16="http://schemas.microsoft.com/office/drawing/2014/main" id="{ED727372-A879-AC38-2D9F-C1538B5CE38F}"/>
-              </a:ext>
-            </a:extLst>
-          </p:cNvPr>
-          <p:cNvSpPr/>
-          <p:nvPr/>
-        </p:nvSpPr>
-        <p:spPr>
-          <a:xfrm>
-            <a:off x="10094061" y="5670616"/>
-            <a:ext cx="1333195" cy="38405"/>
-          </a:xfrm>
-          <a:prstGeom prst="rect">
-            <a:avLst/>
-          </a:prstGeom>
-          <a:solidFill>
-            <a:srgbClr val="4ADE80"/>
-          </a:solidFill>
-          <a:ln w="12700">
-            <a:solidFill>
-              <a:srgbClr val="4ADE80">
-                <a:alpha val="0"/>
-              </a:srgbClr>
-            </a:solidFill>
-            <a:prstDash val="solid"/>
-          </a:ln>
-        </p:spPr>
-        <p:txBody>
-          <a:bodyPr/>
-          <a:lstStyle/>
-          <a:p>
-            <a:endParaRPr lang="ko-KR" altLang="en-US"/>
-          </a:p>
-        </p:txBody>
-      </p:sp>
-      <p:sp>
-        <p:nvSpPr>
-          <p:cNvPr id="99" name="Text 92">
-            <a:extLst>
-              <a:ext uri="{FF2B5EF4-FFF2-40B4-BE49-F238E27FC236}">
-                <a16:creationId xmlns:a16="http://schemas.microsoft.com/office/drawing/2014/main" id="{2C2BE200-008B-365B-0BA3-2818F77E8D54}"/>
-              </a:ext>
-            </a:extLst>
-          </p:cNvPr>
-          <p:cNvSpPr txBox="1"/>
-          <p:nvPr/>
-        </p:nvSpPr>
-        <p:spPr>
-          <a:xfrm>
-            <a:off x="10041026" y="5784916"/>
-            <a:ext cx="1440180" cy="191110"/>
-          </a:xfrm>
-          <a:prstGeom prst="rect">
-            <a:avLst/>
-          </a:prstGeom>
-          <a:noFill/>
-          <a:ln/>
-        </p:spPr>
-        <p:txBody>
-          <a:bodyPr wrap="square" lIns="0" tIns="0" rIns="0" bIns="0" rtlCol="0" anchor="ctr"/>
-          <a:lstStyle/>
-          <a:p>
-            <a:pPr marL="0" indent="0" algn="ctr">
-              <a:buNone/>
-            </a:pPr>
-            <a:r>
-              <a:rPr lang="en-US" sz="1200" b="1" dirty="0">
-                <a:solidFill>
-                  <a:srgbClr val="E2E8F0"/>
-                </a:solidFill>
-                <a:latin typeface="Noto Sans KR" pitchFamily="34" charset="0"/>
-                <a:ea typeface="Noto Sans KR" pitchFamily="34" charset="-122"/>
-                <a:cs typeface="Noto Sans KR" pitchFamily="34" charset="-120"/>
-              </a:rPr>
-              <a:t>실현</a:t>
-            </a:r>
-            <a:endParaRPr lang="en-US" sz="1200" dirty="0"/>
-          </a:p>
-        </p:txBody>
-      </p:sp>
-      <p:sp>
-        <p:nvSpPr>
-          <p:cNvPr id="100" name="Text 93">
-            <a:extLst>
-              <a:ext uri="{FF2B5EF4-FFF2-40B4-BE49-F238E27FC236}">
-                <a16:creationId xmlns:a16="http://schemas.microsoft.com/office/drawing/2014/main" id="{85EA255A-20F1-6695-CF2B-CC0D5BB7C72A}"/>
-              </a:ext>
-            </a:extLst>
-          </p:cNvPr>
-          <p:cNvSpPr txBox="1"/>
-          <p:nvPr/>
-        </p:nvSpPr>
-        <p:spPr>
-          <a:xfrm>
-            <a:off x="10055657" y="5986998"/>
-            <a:ext cx="1410005" cy="171907"/>
-          </a:xfrm>
-          <a:prstGeom prst="rect">
-            <a:avLst/>
-          </a:prstGeom>
-          <a:noFill/>
-          <a:ln/>
-        </p:spPr>
-        <p:txBody>
-          <a:bodyPr wrap="square" lIns="0" tIns="0" rIns="0" bIns="0" rtlCol="0" anchor="ctr"/>
-          <a:lstStyle/>
-          <a:p>
-            <a:pPr marL="0" indent="0" algn="ctr">
-              <a:buNone/>
-            </a:pPr>
-            <a:r>
-              <a:rPr lang="en-US" sz="900" dirty="0">
-                <a:solidFill>
-                  <a:srgbClr val="94A3B8"/>
-                </a:solidFill>
-                <a:latin typeface="Noto Sans KR" pitchFamily="34" charset="0"/>
-                <a:ea typeface="Noto Sans KR" pitchFamily="34" charset="-122"/>
-                <a:cs typeface="Noto Sans KR" pitchFamily="34" charset="-120"/>
-              </a:rPr>
-              <a:t>Realize</a:t>
-            </a:r>
-            <a:endParaRPr lang="en-US" sz="900" dirty="0"/>
-          </a:p>
-        </p:txBody>
-      </p:sp>
-      <p:sp>
-        <p:nvSpPr>
-          <p:cNvPr id="101" name="deckgen:wrap:footer"/>
-          <p:cNvSpPr txBox="1"/>
-          <p:nvPr/>
-        </p:nvSpPr>
-        <p:spPr>
-          <a:xfrm>
-            <a:off x="365760" y="6549390"/>
-            <a:ext cx="11460480" cy="240030"/>
-          </a:xfrm>
-          <a:prstGeom prst="rect">
-            <a:avLst/>
-          </a:prstGeom>
-          <a:noFill/>
-        </p:spPr>
-        <p:txBody>
-          <a:bodyPr wrap="square" anchor="b" lIns="0" rIns="0" tIns="0" bIns="0">
-            <a:spAutoFit/>
-          </a:bodyPr>
-          <a:lstStyle/>
-          <a:p>
-            <a:pPr algn="r">
-              <a:lnSpc>
-                <a:spcPct val="125000"/>
-              </a:lnSpc>
-            </a:pPr>
-            <a:r>
-              <a:rPr sz="900" b="0">
-                <a:solidFill>
-                  <a:srgbClr val="8A8F99"/>
-                </a:solidFill>
-                <a:latin typeface="Pretendard"/>
-              </a:rPr>
-              <a:t>© 2026 이애본(드림아이티비즈) · useful-ai.dreamitbiz.com · 교육 목적 비영리 이용 · 출처 표기</a:t>
-            </a:r>
-          </a:p>
-        </p:txBody>
-      </p:sp>
-    </p:spTree>
-    <p:extLst>
-      <p:ext uri="{BB962C8B-B14F-4D97-AF65-F5344CB8AC3E}">
-        <p14:creationId xmlns:p14="http://schemas.microsoft.com/office/powerpoint/2010/main" val="3114057872"/>
-      </p:ext>
-    </p:extLst>
-  </p:cSld>
-  <p:clrMapOvr>
-    <a:masterClrMapping/>
-  </p:clrMapOvr>
-</p:sld>
-</file>
-
-<file path=ppt/slides/slide12.xml><?xml version="1.0" encoding="utf-8"?>
 <p:sld xmlns:a="http://schemas.openxmlformats.org/drawingml/2006/main" xmlns:r="http://schemas.openxmlformats.org/officeDocument/2006/relationships" xmlns:p="http://schemas.openxmlformats.org/presentationml/2006/main">
   <p:cSld name="Slide 11">
     <p:spTree>
@@ -11498,7 +7592,7 @@
                 </a:solidFill>
                 <a:latin typeface="Pretendard"/>
               </a:rPr>
-              <a:t>© 2026 이애본(드림아이티비즈) · useful-ai.dreamitbiz.com · 교육 목적 비영리 이용 · 출처 표기</a:t>
+              <a:t>© 2026 이애본 · 홍문원(洪文院) 발행 · CC BY-NC-ND 4.0 · useful-ai.dreamitbiz.com</a:t>
             </a:r>
           </a:p>
         </p:txBody>
@@ -11511,7 +7605,7 @@
 </p:sld>
 </file>
 
-<file path=ppt/slides/slide13.xml><?xml version="1.0" encoding="utf-8"?>
+<file path=ppt/slides/slide12.xml><?xml version="1.0" encoding="utf-8"?>
 <p:sld xmlns:a="http://schemas.openxmlformats.org/drawingml/2006/main" xmlns:r="http://schemas.openxmlformats.org/officeDocument/2006/relationships" xmlns:p="http://schemas.openxmlformats.org/presentationml/2006/main">
   <p:cSld name="Slide 12">
     <p:spTree>
@@ -11916,7 +8010,7 @@
                 <a:ea typeface="Noto Sans KR" pitchFamily="34" charset="-122"/>
                 <a:cs typeface="Noto Sans KR" pitchFamily="34" charset="-120"/>
               </a:rPr>
-              <a:t> 비용으로 늦지 않게 도착하는"</a:t>
+              <a:t> 비용으로 늦지 않게 도착하는" </a:t>
             </a:r>
             <a:r>
               <a:rPr lang="en-US" sz="1300" dirty="0">
@@ -12592,7 +8686,7 @@
                           <a:ea typeface="Noto Sans KR" pitchFamily="34" charset="-122"/>
                           <a:cs typeface="Noto Sans KR" pitchFamily="34" charset="-120"/>
                         </a:rPr>
-                        <a:t>KTX: 2.5h/6만원 | 버스: 4.5h/3.5만원</a:t>
+                        <a:t>KTX: 2.5h/6만원 | 버스: 4.5h/3.5만원 (예시 값, 2026-01 기준)</a:t>
                       </a:r>
                       <a:endParaRPr lang="en-US" sz="1600" dirty="0"/>
                     </a:p>
@@ -13480,7 +9574,7 @@
                           <a:ea typeface="Noto Sans KR" pitchFamily="34" charset="-122"/>
                           <a:cs typeface="Noto Sans KR" pitchFamily="34" charset="-120"/>
                         </a:rPr>
-                        <a:t>필요:출발시각, 도착시각, 비용</a:t>
+                        <a:t>필요: 출발시각, 도착시각, 비용</a:t>
                       </a:r>
                       <a:endParaRPr lang="en-US" sz="1600" dirty="0"/>
                     </a:p>
@@ -13962,7 +10056,7 @@
                 </a:solidFill>
                 <a:latin typeface="Pretendard"/>
               </a:rPr>
-              <a:t>© 2026 이애본(드림아이티비즈) · useful-ai.dreamitbiz.com · 교육 목적 비영리 이용 · 출처 표기</a:t>
+              <a:t>© 2026 이애본 · 홍문원(洪文院) 발행 · CC BY-NC-ND 4.0 · useful-ai.dreamitbiz.com</a:t>
             </a:r>
           </a:p>
         </p:txBody>
@@ -13975,7 +10069,7 @@
 </p:sld>
 </file>
 
-<file path=ppt/slides/slide14.xml><?xml version="1.0" encoding="utf-8"?>
+<file path=ppt/slides/slide13.xml><?xml version="1.0" encoding="utf-8"?>
 <p:sld xmlns:a="http://schemas.openxmlformats.org/drawingml/2006/main" xmlns:r="http://schemas.openxmlformats.org/officeDocument/2006/relationships" xmlns:p="http://schemas.openxmlformats.org/presentationml/2006/main">
   <p:cSld name="Slide 13">
     <p:spTree>
@@ -15548,7 +11642,7 @@
                   <a:ea typeface="Noto Sans KR" pitchFamily="34" charset="-122"/>
                   <a:cs typeface="Noto Sans KR" pitchFamily="34" charset="-120"/>
                 </a:rPr>
-                <a:t>슬라이드당 텍스트는</a:t>
+                <a:t>슬라이드당 텍스트는 </a:t>
               </a:r>
               <a:r>
                 <a:rPr lang="en-US" sz="1400" b="1" dirty="0">
@@ -15806,7 +11900,7 @@
                 </a:solidFill>
                 <a:latin typeface="Pretendard"/>
               </a:rPr>
-              <a:t>© 2026 이애본(드림아이티비즈) · useful-ai.dreamitbiz.com · 교육 목적 비영리 이용 · 출처 표기</a:t>
+              <a:t>© 2026 이애본 · 홍문원(洪文院) 발행 · CC BY-NC-ND 4.0 · useful-ai.dreamitbiz.com</a:t>
             </a:r>
           </a:p>
         </p:txBody>
@@ -15819,7 +11913,7 @@
 </p:sld>
 </file>
 
-<file path=ppt/slides/slide15.xml><?xml version="1.0" encoding="utf-8"?>
+<file path=ppt/slides/slide14.xml><?xml version="1.0" encoding="utf-8"?>
 <p:sld xmlns:a="http://schemas.openxmlformats.org/drawingml/2006/main" xmlns:r="http://schemas.openxmlformats.org/officeDocument/2006/relationships" xmlns:p="http://schemas.openxmlformats.org/presentationml/2006/main">
   <p:cSld name="Slide 14">
     <p:spTree>
@@ -16795,45 +12889,6 @@
       </p:sp>
       <p:sp>
         <p:nvSpPr>
-          <p:cNvPr id="30" name="Text 23"/>
-          <p:cNvSpPr txBox="1"/>
-          <p:nvPr/>
-        </p:nvSpPr>
-        <p:spPr>
-          <a:xfrm>
-            <a:off x="457200" y="6238951"/>
-            <a:ext cx="1927555" cy="162763"/>
-          </a:xfrm>
-          <a:prstGeom prst="rect">
-            <a:avLst/>
-          </a:prstGeom>
-          <a:noFill/>
-          <a:ln/>
-        </p:spPr>
-        <p:txBody>
-          <a:bodyPr wrap="square" lIns="0" tIns="0" rIns="0" bIns="0" rtlCol="0" anchor="ctr"/>
-          <a:lstStyle/>
-          <a:p>
-            <a:pPr marL="0" indent="0" algn="l">
-              <a:buNone/>
-            </a:pPr>
-            <a:r>
-              <a:rPr lang="en-US" sz="900" dirty="0">
-                <a:solidFill>
-                  <a:srgbClr val="6B7280"/>
-                </a:solidFill>
-                <a:latin typeface="Noto Sans KR" pitchFamily="34" charset="0"/>
-                <a:ea typeface="Noto Sans KR" pitchFamily="34" charset="-122"/>
-                <a:cs typeface="Noto Sans KR" pitchFamily="34" charset="-120"/>
-              </a:rPr>
-              <a:t>수고하셨습니다. Q&amp;A 시간입니다.</a:t>
-            </a:r>
-            <a:endParaRPr lang="en-US" sz="900" dirty="0"/>
-          </a:p>
-        </p:txBody>
-      </p:sp>
-      <p:sp>
-        <p:nvSpPr>
           <p:cNvPr id="31" name="Text 24"/>
           <p:cNvSpPr txBox="1"/>
           <p:nvPr/>
@@ -17309,7 +13364,7 @@
                 <a:ea typeface="Noto Sans KR" pitchFamily="34" charset="-122"/>
                 <a:cs typeface="Noto Sans KR" pitchFamily="34" charset="-120"/>
               </a:rPr>
-              <a:t> 학습한CT 6단계 프로세스로 재설계한 후 제출하세요.</a:t>
+              <a:t> 학습한 CT 6단계 프로세스로 재설계한 후 제출하세요.</a:t>
             </a:r>
             <a:endParaRPr lang="en-US" sz="1200" dirty="0"/>
           </a:p>
@@ -17349,7 +13404,389 @@
                 </a:solidFill>
                 <a:latin typeface="Pretendard"/>
               </a:rPr>
-              <a:t>© 2026 이애본(드림아이티비즈) · useful-ai.dreamitbiz.com · 교육 목적 비영리 이용 · 출처 표기</a:t>
+              <a:t>© 2026 이애본 · 홍문원(洪文院) 발행 · CC BY-NC-ND 4.0 · useful-ai.dreamitbiz.com</a:t>
+            </a:r>
+          </a:p>
+        </p:txBody>
+      </p:sp>
+    </p:spTree>
+  </p:cSld>
+  <p:clrMapOvr>
+    <a:masterClrMapping/>
+  </p:clrMapOvr>
+</p:sld>
+</file>
+
+<file path=ppt/slides/slide15.xml><?xml version="1.0" encoding="utf-8"?>
+<p:sld xmlns:a="http://schemas.openxmlformats.org/drawingml/2006/main" xmlns:p="http://schemas.openxmlformats.org/presentationml/2006/main" xmlns:r="http://schemas.openxmlformats.org/officeDocument/2006/relationships">
+  <p:cSld>
+    <p:spTree>
+      <p:nvGrpSpPr>
+        <p:cNvPr id="1" name=""/>
+        <p:cNvGrpSpPr/>
+        <p:nvPr/>
+      </p:nvGrpSpPr>
+      <p:grpSpPr/>
+      <p:sp>
+        <p:nvSpPr>
+          <p:cNvPr id="2" name="deckgen:wrap:bg"/>
+          <p:cNvSpPr/>
+          <p:nvPr/>
+        </p:nvSpPr>
+        <p:spPr>
+          <a:xfrm>
+            <a:off x="0" y="0"/>
+            <a:ext cx="12192000" cy="6858000"/>
+          </a:xfrm>
+          <a:prstGeom prst="rect">
+            <a:avLst/>
+          </a:prstGeom>
+          <a:solidFill>
+            <a:srgbClr val="FFFFFF"/>
+          </a:solidFill>
+          <a:ln>
+            <a:noFill/>
+          </a:ln>
+          <a:effectLst/>
+        </p:spPr>
+        <p:style>
+          <a:lnRef idx="1">
+            <a:schemeClr val="accent1"/>
+          </a:lnRef>
+          <a:fillRef idx="3">
+            <a:schemeClr val="accent1"/>
+          </a:fillRef>
+          <a:effectRef idx="2">
+            <a:schemeClr val="accent1"/>
+          </a:effectRef>
+          <a:fontRef idx="minor">
+            <a:schemeClr val="lt1"/>
+          </a:fontRef>
+        </p:style>
+        <p:txBody>
+          <a:bodyPr rtlCol="0" anchor="ctr"/>
+          <a:lstStyle/>
+          <a:p>
+            <a:pPr algn="ctr"/>
+          </a:p>
+        </p:txBody>
+      </p:sp>
+      <p:sp>
+        <p:nvSpPr>
+          <p:cNvPr id="3" name="deckgen:wrap:side"/>
+          <p:cNvSpPr/>
+          <p:nvPr/>
+        </p:nvSpPr>
+        <p:spPr>
+          <a:xfrm>
+            <a:off x="0" y="0"/>
+            <a:ext cx="146304" cy="6858000"/>
+          </a:xfrm>
+          <a:prstGeom prst="rect">
+            <a:avLst/>
+          </a:prstGeom>
+          <a:solidFill>
+            <a:srgbClr val="0072CE"/>
+          </a:solidFill>
+          <a:ln>
+            <a:noFill/>
+          </a:ln>
+          <a:effectLst/>
+        </p:spPr>
+        <p:style>
+          <a:lnRef idx="1">
+            <a:schemeClr val="accent1"/>
+          </a:lnRef>
+          <a:fillRef idx="3">
+            <a:schemeClr val="accent1"/>
+          </a:fillRef>
+          <a:effectRef idx="2">
+            <a:schemeClr val="accent1"/>
+          </a:effectRef>
+          <a:fontRef idx="minor">
+            <a:schemeClr val="lt1"/>
+          </a:fontRef>
+        </p:style>
+        <p:txBody>
+          <a:bodyPr rtlCol="0" anchor="ctr"/>
+          <a:lstStyle/>
+          <a:p>
+            <a:pPr algn="ctr"/>
+          </a:p>
+        </p:txBody>
+      </p:sp>
+      <p:sp>
+        <p:nvSpPr>
+          <p:cNvPr id="4" name="deckgen:wrap:rule"/>
+          <p:cNvSpPr/>
+          <p:nvPr/>
+        </p:nvSpPr>
+        <p:spPr>
+          <a:xfrm>
+            <a:off x="853440" y="2057400"/>
+            <a:ext cx="975360" cy="38100"/>
+          </a:xfrm>
+          <a:prstGeom prst="rect">
+            <a:avLst/>
+          </a:prstGeom>
+          <a:solidFill>
+            <a:srgbClr val="0072CE"/>
+          </a:solidFill>
+          <a:ln>
+            <a:noFill/>
+          </a:ln>
+          <a:effectLst/>
+        </p:spPr>
+        <p:style>
+          <a:lnRef idx="1">
+            <a:schemeClr val="accent1"/>
+          </a:lnRef>
+          <a:fillRef idx="3">
+            <a:schemeClr val="accent1"/>
+          </a:fillRef>
+          <a:effectRef idx="2">
+            <a:schemeClr val="accent1"/>
+          </a:effectRef>
+          <a:fontRef idx="minor">
+            <a:schemeClr val="lt1"/>
+          </a:fontRef>
+        </p:style>
+        <p:txBody>
+          <a:bodyPr rtlCol="0" anchor="ctr"/>
+          <a:lstStyle/>
+          <a:p>
+            <a:pPr algn="ctr"/>
+          </a:p>
+        </p:txBody>
+      </p:sp>
+      <p:sp>
+        <p:nvSpPr>
+          <p:cNvPr id="5" name="deckgen:wrap:eyebrow"/>
+          <p:cNvSpPr txBox="1"/>
+          <p:nvPr/>
+        </p:nvSpPr>
+        <p:spPr>
+          <a:xfrm>
+            <a:off x="853440" y="1165860"/>
+            <a:ext cx="10485120" cy="342900"/>
+          </a:xfrm>
+          <a:prstGeom prst="rect">
+            <a:avLst/>
+          </a:prstGeom>
+          <a:noFill/>
+        </p:spPr>
+        <p:txBody>
+          <a:bodyPr wrap="square" anchor="t" lIns="0" rIns="0" tIns="0" bIns="0">
+            <a:spAutoFit/>
+          </a:bodyPr>
+          <a:lstStyle/>
+          <a:p>
+            <a:pPr algn="l">
+              <a:lnSpc>
+                <a:spcPct val="125000"/>
+              </a:lnSpc>
+            </a:pPr>
+            <a:r>
+              <a:rPr sz="1200" b="1">
+                <a:solidFill>
+                  <a:srgbClr val="0072CE"/>
+                </a:solidFill>
+                <a:latin typeface="Pretendard"/>
+              </a:rPr>
+              <a:t>HOW TO USE</a:t>
+            </a:r>
+          </a:p>
+        </p:txBody>
+      </p:sp>
+      <p:sp>
+        <p:nvSpPr>
+          <p:cNvPr id="6" name="deckgen:wrap:title"/>
+          <p:cNvSpPr txBox="1"/>
+          <p:nvPr/>
+        </p:nvSpPr>
+        <p:spPr>
+          <a:xfrm>
+            <a:off x="853440" y="1440180"/>
+            <a:ext cx="10485120" cy="617220"/>
+          </a:xfrm>
+          <a:prstGeom prst="rect">
+            <a:avLst/>
+          </a:prstGeom>
+          <a:noFill/>
+        </p:spPr>
+        <p:txBody>
+          <a:bodyPr wrap="square" anchor="t" lIns="0" rIns="0" tIns="0" bIns="0">
+            <a:spAutoFit/>
+          </a:bodyPr>
+          <a:lstStyle/>
+          <a:p>
+            <a:pPr algn="l">
+              <a:lnSpc>
+                <a:spcPct val="125000"/>
+              </a:lnSpc>
+            </a:pPr>
+            <a:r>
+              <a:rPr sz="3000" b="1">
+                <a:solidFill>
+                  <a:srgbClr val="1A2A5E"/>
+                </a:solidFill>
+                <a:latin typeface="Pretendard"/>
+              </a:rPr>
+              <a:t>이 자료 사용 방법</a:t>
+            </a:r>
+          </a:p>
+        </p:txBody>
+      </p:sp>
+      <p:sp>
+        <p:nvSpPr>
+          <p:cNvPr id="7" name="deckgen:wrap:body"/>
+          <p:cNvSpPr txBox="1"/>
+          <p:nvPr/>
+        </p:nvSpPr>
+        <p:spPr>
+          <a:xfrm>
+            <a:off x="853440" y="2400300"/>
+            <a:ext cx="10485120" cy="3566160"/>
+          </a:xfrm>
+          <a:prstGeom prst="rect">
+            <a:avLst/>
+          </a:prstGeom>
+          <a:noFill/>
+        </p:spPr>
+        <p:txBody>
+          <a:bodyPr wrap="square" anchor="t" lIns="0" rIns="0" tIns="0" bIns="0">
+            <a:spAutoFit/>
+          </a:bodyPr>
+          <a:lstStyle/>
+          <a:p>
+            <a:pPr algn="l">
+              <a:lnSpc>
+                <a:spcPct val="130000"/>
+              </a:lnSpc>
+            </a:pPr>
+            <a:r>
+              <a:rPr sz="1500" b="0">
+                <a:solidFill>
+                  <a:srgbClr val="333333"/>
+                </a:solidFill>
+                <a:latin typeface="Pretendard"/>
+              </a:rPr>
+              <a:t>1.  수업·강의·자습에 그대로 쓰셔도 됩니다. 출처만 남겨 주세요.</a:t>
+            </a:r>
+          </a:p>
+          <a:p>
+            <a:pPr algn="l">
+              <a:lnSpc>
+                <a:spcPct val="130000"/>
+              </a:lnSpc>
+              <a:spcBef>
+                <a:spcPts val="900"/>
+              </a:spcBef>
+            </a:pPr>
+            <a:r>
+              <a:rPr sz="1500" b="0">
+                <a:solidFill>
+                  <a:srgbClr val="333333"/>
+                </a:solidFill>
+                <a:latin typeface="Pretendard"/>
+              </a:rPr>
+              <a:t>2.  PDF 는 화면으로 읽는 용도, PPTX 는 발표용입니다. PPTX 는 Pretendard 글꼴이 설치된 컴퓨터에서 가장 똑같이 보입니다.</a:t>
+            </a:r>
+          </a:p>
+          <a:p>
+            <a:pPr algn="l">
+              <a:lnSpc>
+                <a:spcPct val="130000"/>
+              </a:lnSpc>
+              <a:spcBef>
+                <a:spcPts val="900"/>
+              </a:spcBef>
+            </a:pPr>
+            <a:r>
+              <a:rPr sz="1500" b="0">
+                <a:solidFill>
+                  <a:srgbClr val="333333"/>
+                </a:solidFill>
+                <a:latin typeface="Pretendard"/>
+              </a:rPr>
+              <a:t>3.  출처 표기 예: 이애본(드림아이티비즈), 「자료 제목」, 홍문원, useful-ai.dreamitbiz.com, CC BY-NC-ND 4.0</a:t>
+            </a:r>
+          </a:p>
+          <a:p>
+            <a:pPr algn="l">
+              <a:lnSpc>
+                <a:spcPct val="130000"/>
+              </a:lnSpc>
+              <a:spcBef>
+                <a:spcPts val="900"/>
+              </a:spcBef>
+            </a:pPr>
+            <a:r>
+              <a:rPr sz="1500" b="0">
+                <a:solidFill>
+                  <a:srgbClr val="333333"/>
+                </a:solidFill>
+                <a:latin typeface="Pretendard"/>
+              </a:rPr>
+              <a:t>4.  자료 안의 프롬프트는 복사해 바로 쓸 수 있습니다. [대괄호]만 내 상황으로 바꾸세요.</a:t>
+            </a:r>
+          </a:p>
+          <a:p>
+            <a:pPr algn="l">
+              <a:lnSpc>
+                <a:spcPct val="130000"/>
+              </a:lnSpc>
+              <a:spcBef>
+                <a:spcPts val="900"/>
+              </a:spcBef>
+            </a:pPr>
+            <a:r>
+              <a:rPr sz="1500" b="0">
+                <a:solidFill>
+                  <a:srgbClr val="333333"/>
+                </a:solidFill>
+                <a:latin typeface="Pretendard"/>
+              </a:rPr>
+              <a:t>5.  모든 자료와 영상 강의는 useful-ai.dreamitbiz.com 에서 다시 받을 수 있습니다.</a:t>
+            </a:r>
+          </a:p>
+        </p:txBody>
+      </p:sp>
+      <p:sp>
+        <p:nvSpPr>
+          <p:cNvPr id="8" name="deckgen:wrap:footer"/>
+          <p:cNvSpPr txBox="1"/>
+          <p:nvPr/>
+        </p:nvSpPr>
+        <p:spPr>
+          <a:xfrm>
+            <a:off x="853440" y="6240780"/>
+            <a:ext cx="10485120" cy="342900"/>
+          </a:xfrm>
+          <a:prstGeom prst="rect">
+            <a:avLst/>
+          </a:prstGeom>
+          <a:noFill/>
+        </p:spPr>
+        <p:txBody>
+          <a:bodyPr wrap="square" anchor="t" lIns="0" rIns="0" tIns="0" bIns="0">
+            <a:spAutoFit/>
+          </a:bodyPr>
+          <a:lstStyle/>
+          <a:p>
+            <a:pPr algn="r">
+              <a:lnSpc>
+                <a:spcPct val="125000"/>
+              </a:lnSpc>
+            </a:pPr>
+            <a:r>
+              <a:rPr sz="900" b="0">
+                <a:solidFill>
+                  <a:srgbClr val="888888"/>
+                </a:solidFill>
+                <a:latin typeface="Pretendard"/>
+              </a:rPr>
+              <a:t>© 2026 이애본 · 홍문원(洪文院) 발행 · CC BY-NC-ND 4.0 · useful-ai.dreamitbiz.com</a:t>
             </a:r>
           </a:p>
         </p:txBody>
@@ -17538,7 +13975,7 @@
                 </a:solidFill>
                 <a:latin typeface="Pretendard"/>
               </a:rPr>
-              <a:t>HOW TO USE</a:t>
+              <a:t>COPYRIGHT · LICENSE</a:t>
             </a:r>
           </a:p>
         </p:txBody>
@@ -17577,7 +14014,7 @@
                 </a:solidFill>
                 <a:latin typeface="Pretendard"/>
               </a:rPr>
-              <a:t>이 자료 사용 방법</a:t>
+              <a:t>저작권 · 이용 조건 (CC BY-NC-ND 4.0)</a:t>
             </a:r>
           </a:p>
         </p:txBody>
@@ -17616,7 +14053,7 @@
                 </a:solidFill>
                 <a:latin typeface="Pretendard"/>
               </a:rPr>
-              <a:t>1.  수업·강의·자습에 그대로 쓰셔도 됩니다. 출처만 남겨 주세요.</a:t>
+              <a:t>1.  저작권 © 2026 이애본(드림아이티비즈 DreamIT Biz). 발행 홍문원(洪文院, 출판사 신고번호 제2026-000026호). 2026년 1월 「생성형 AI와 창의력·복합문제능력 향상 과정」 강의안을 전자출판용으로 다시 묶은 것입니다. ISBN: 등록 후 기재.</a:t>
             </a:r>
           </a:p>
           <a:p>
@@ -17635,7 +14072,7 @@
                 </a:solidFill>
                 <a:latin typeface="Pretendard"/>
               </a:rPr>
-              <a:t>2.  PDF 는 화면으로 읽는 용도, PPTX 는 발표용입니다. PPTX 는 Pretendard 글꼴이 설치된 컴퓨터에서 가장 똑같이 보입니다.</a:t>
+              <a:t>2.  이 자료는 크리에이티브 커먼즈 저작자표시-비영리-변경금지 4.0 국제(CC BY-NC-ND 4.0) 라이선스를 따릅니다. creativecommons.org/licenses/by-nc-nd/4.0/deed.ko</a:t>
             </a:r>
           </a:p>
           <a:p>
@@ -17654,7 +14091,7 @@
                 </a:solidFill>
                 <a:latin typeface="Pretendard"/>
               </a:rPr>
-              <a:t>3.  출처 표기 예: 이애본(드림아이티비즈), 「자료 제목」, useful-ai.dreamitbiz.com</a:t>
+              <a:t>3.  저작자 표시(BY): 출처를 밝히면 그대로 복사해 수업·강의·자습에 쓸 수 있습니다. 비영리(NC): 유료 강의·판매·광고 수익 목적에는 쓸 수 없습니다. 변경금지(ND): 내용을 고치거나 잘라 재조합해 배포할 수 없습니다.</a:t>
             </a:r>
           </a:p>
           <a:p>
@@ -17673,7 +14110,7 @@
                 </a:solidFill>
                 <a:latin typeface="Pretendard"/>
               </a:rPr>
-              <a:t>4.  자료 안의 프롬프트는 복사해 바로 쓸 수 있습니다. [대괄호]만 내 상황으로 바꾸세요.</a:t>
+              <a:t>4.  자료 안의 외부 서비스 화면 캡처와 상표는 교육 목적 인용이며 각 서비스의 소유입니다. AI 생성 이미지는 생성 도구의 이용 약관을 따릅니다.</a:t>
             </a:r>
           </a:p>
           <a:p>
@@ -17692,7 +14129,7 @@
                 </a:solidFill>
                 <a:latin typeface="Pretendard"/>
               </a:rPr>
-              <a:t>5.  모든 자료와 영상 강의는 useful-ai.dreamitbiz.com 에서 다시 받을 수 있습니다.</a:t>
+              <a:t>5.  라이선스 범위 밖의 이용(영리·변형·2차 저작)은 먼저 문의해 주세요. aebon@dreamitbiz.com · 카카오톡 ID aebon</a:t>
             </a:r>
           </a:p>
         </p:txBody>
@@ -17731,7 +14168,7 @@
                 </a:solidFill>
                 <a:latin typeface="Pretendard"/>
               </a:rPr>
-              <a:t>© 2026 이애본(드림아이티비즈) · useful-ai.dreamitbiz.com · 교육 목적 비영리 이용 · 출처 표기</a:t>
+              <a:t>© 2026 이애본 · 홍문원(洪文院) 발행 · CC BY-NC-ND 4.0 · useful-ai.dreamitbiz.com</a:t>
             </a:r>
           </a:p>
         </p:txBody>
@@ -17920,7 +14357,7 @@
                 </a:solidFill>
                 <a:latin typeface="Pretendard"/>
               </a:rPr>
-              <a:t>COPYRIGHT · LICENSE</a:t>
+              <a:t>CREDITS · CONTACT</a:t>
             </a:r>
           </a:p>
         </p:txBody>
@@ -17959,7 +14396,7 @@
                 </a:solidFill>
                 <a:latin typeface="Pretendard"/>
               </a:rPr>
-              <a:t>저작권 · 이용 조건</a:t>
+              <a:t>출처 · 문의</a:t>
             </a:r>
           </a:p>
         </p:txBody>
@@ -17998,7 +14435,7 @@
                 </a:solidFill>
                 <a:latin typeface="Pretendard"/>
               </a:rPr>
-              <a:t>1.  저작권 © 2026 이애본(드림아이티비즈 DreamIT Biz). 2026년 1월 「생성형 AI와 창의력·복합문제능력 향상 과정」 강의안을 공개용으로 다시 묶은 것입니다.</a:t>
+              <a:t>이애본 (Aebon Lee, Ph.D) — 드림아이티비즈 대표 · 한신대학교 AI·SW대학 겸임교수</a:t>
             </a:r>
           </a:p>
           <a:p>
@@ -18017,7 +14454,7 @@
                 </a:solidFill>
                 <a:latin typeface="Pretendard"/>
               </a:rPr>
-              <a:t>2.  교육 목적의 비영리 이용을 허용합니다 — 출처를 표기해 주세요.</a:t>
+              <a:t>useful-ai.dreamitbiz.com — 강의안·영상 강의 라이브러리</a:t>
             </a:r>
           </a:p>
           <a:p>
@@ -18036,7 +14473,7 @@
                 </a:solidFill>
                 <a:latin typeface="Pretendard"/>
               </a:rPr>
-              <a:t>3.  재배포·판매·변형(내용 수정 후 배포)은 허용하지 않습니다. 필요하면 먼저 문의해 주세요.</a:t>
+              <a:t>aebon@dreamitbiz.com · 카카오톡 ID aebon</a:t>
             </a:r>
           </a:p>
           <a:p>
@@ -18055,26 +14492,7 @@
                 </a:solidFill>
                 <a:latin typeface="Pretendard"/>
               </a:rPr>
-              <a:t>4.  자료 안의 외부 서비스 화면 캡처와 상표는 교육 목적 인용이며 각 서비스의 소유입니다. AI 생성 이미지는 생성 도구의 이용 약관을 따릅니다.</a:t>
-            </a:r>
-          </a:p>
-          <a:p>
-            <a:pPr algn="l">
-              <a:lnSpc>
-                <a:spcPct val="130000"/>
-              </a:lnSpc>
-              <a:spcBef>
-                <a:spcPts val="900"/>
-              </a:spcBef>
-            </a:pPr>
-            <a:r>
-              <a:rPr sz="1500" b="0">
-                <a:solidFill>
-                  <a:srgbClr val="333333"/>
-                </a:solidFill>
-                <a:latin typeface="Pretendard"/>
-              </a:rPr>
-              <a:t>5.  문의 aebon@dreamitbiz.com · 카카오톡 ID aebon</a:t>
+              <a:t>© 2026 이애본 · 발행 홍문원(洪文院) · CC BY-NC-ND 4.0</a:t>
             </a:r>
           </a:p>
         </p:txBody>
@@ -18113,370 +14531,7 @@
                 </a:solidFill>
                 <a:latin typeface="Pretendard"/>
               </a:rPr>
-              <a:t>© 2026 이애본(드림아이티비즈) · useful-ai.dreamitbiz.com · 교육 목적 비영리 이용 · 출처 표기</a:t>
-            </a:r>
-          </a:p>
-        </p:txBody>
-      </p:sp>
-    </p:spTree>
-  </p:cSld>
-  <p:clrMapOvr>
-    <a:masterClrMapping/>
-  </p:clrMapOvr>
-</p:sld>
-</file>
-
-<file path=ppt/slides/slide18.xml><?xml version="1.0" encoding="utf-8"?>
-<p:sld xmlns:a="http://schemas.openxmlformats.org/drawingml/2006/main" xmlns:p="http://schemas.openxmlformats.org/presentationml/2006/main" xmlns:r="http://schemas.openxmlformats.org/officeDocument/2006/relationships">
-  <p:cSld>
-    <p:spTree>
-      <p:nvGrpSpPr>
-        <p:cNvPr id="1" name=""/>
-        <p:cNvGrpSpPr/>
-        <p:nvPr/>
-      </p:nvGrpSpPr>
-      <p:grpSpPr/>
-      <p:sp>
-        <p:nvSpPr>
-          <p:cNvPr id="2" name="deckgen:wrap:bg"/>
-          <p:cNvSpPr/>
-          <p:nvPr/>
-        </p:nvSpPr>
-        <p:spPr>
-          <a:xfrm>
-            <a:off x="0" y="0"/>
-            <a:ext cx="12192000" cy="6858000"/>
-          </a:xfrm>
-          <a:prstGeom prst="rect">
-            <a:avLst/>
-          </a:prstGeom>
-          <a:solidFill>
-            <a:srgbClr val="FFFFFF"/>
-          </a:solidFill>
-          <a:ln>
-            <a:noFill/>
-          </a:ln>
-          <a:effectLst/>
-        </p:spPr>
-        <p:style>
-          <a:lnRef idx="1">
-            <a:schemeClr val="accent1"/>
-          </a:lnRef>
-          <a:fillRef idx="3">
-            <a:schemeClr val="accent1"/>
-          </a:fillRef>
-          <a:effectRef idx="2">
-            <a:schemeClr val="accent1"/>
-          </a:effectRef>
-          <a:fontRef idx="minor">
-            <a:schemeClr val="lt1"/>
-          </a:fontRef>
-        </p:style>
-        <p:txBody>
-          <a:bodyPr rtlCol="0" anchor="ctr"/>
-          <a:lstStyle/>
-          <a:p>
-            <a:pPr algn="ctr"/>
-          </a:p>
-        </p:txBody>
-      </p:sp>
-      <p:sp>
-        <p:nvSpPr>
-          <p:cNvPr id="3" name="deckgen:wrap:side"/>
-          <p:cNvSpPr/>
-          <p:nvPr/>
-        </p:nvSpPr>
-        <p:spPr>
-          <a:xfrm>
-            <a:off x="0" y="0"/>
-            <a:ext cx="146304" cy="6858000"/>
-          </a:xfrm>
-          <a:prstGeom prst="rect">
-            <a:avLst/>
-          </a:prstGeom>
-          <a:solidFill>
-            <a:srgbClr val="0072CE"/>
-          </a:solidFill>
-          <a:ln>
-            <a:noFill/>
-          </a:ln>
-          <a:effectLst/>
-        </p:spPr>
-        <p:style>
-          <a:lnRef idx="1">
-            <a:schemeClr val="accent1"/>
-          </a:lnRef>
-          <a:fillRef idx="3">
-            <a:schemeClr val="accent1"/>
-          </a:fillRef>
-          <a:effectRef idx="2">
-            <a:schemeClr val="accent1"/>
-          </a:effectRef>
-          <a:fontRef idx="minor">
-            <a:schemeClr val="lt1"/>
-          </a:fontRef>
-        </p:style>
-        <p:txBody>
-          <a:bodyPr rtlCol="0" anchor="ctr"/>
-          <a:lstStyle/>
-          <a:p>
-            <a:pPr algn="ctr"/>
-          </a:p>
-        </p:txBody>
-      </p:sp>
-      <p:sp>
-        <p:nvSpPr>
-          <p:cNvPr id="4" name="deckgen:wrap:rule"/>
-          <p:cNvSpPr/>
-          <p:nvPr/>
-        </p:nvSpPr>
-        <p:spPr>
-          <a:xfrm>
-            <a:off x="853440" y="2057400"/>
-            <a:ext cx="975360" cy="38100"/>
-          </a:xfrm>
-          <a:prstGeom prst="rect">
-            <a:avLst/>
-          </a:prstGeom>
-          <a:solidFill>
-            <a:srgbClr val="0072CE"/>
-          </a:solidFill>
-          <a:ln>
-            <a:noFill/>
-          </a:ln>
-          <a:effectLst/>
-        </p:spPr>
-        <p:style>
-          <a:lnRef idx="1">
-            <a:schemeClr val="accent1"/>
-          </a:lnRef>
-          <a:fillRef idx="3">
-            <a:schemeClr val="accent1"/>
-          </a:fillRef>
-          <a:effectRef idx="2">
-            <a:schemeClr val="accent1"/>
-          </a:effectRef>
-          <a:fontRef idx="minor">
-            <a:schemeClr val="lt1"/>
-          </a:fontRef>
-        </p:style>
-        <p:txBody>
-          <a:bodyPr rtlCol="0" anchor="ctr"/>
-          <a:lstStyle/>
-          <a:p>
-            <a:pPr algn="ctr"/>
-          </a:p>
-        </p:txBody>
-      </p:sp>
-      <p:sp>
-        <p:nvSpPr>
-          <p:cNvPr id="5" name="deckgen:wrap:eyebrow"/>
-          <p:cNvSpPr txBox="1"/>
-          <p:nvPr/>
-        </p:nvSpPr>
-        <p:spPr>
-          <a:xfrm>
-            <a:off x="853440" y="1165860"/>
-            <a:ext cx="10485120" cy="342900"/>
-          </a:xfrm>
-          <a:prstGeom prst="rect">
-            <a:avLst/>
-          </a:prstGeom>
-          <a:noFill/>
-        </p:spPr>
-        <p:txBody>
-          <a:bodyPr wrap="square" anchor="t" lIns="0" rIns="0" tIns="0" bIns="0">
-            <a:spAutoFit/>
-          </a:bodyPr>
-          <a:lstStyle/>
-          <a:p>
-            <a:pPr algn="l">
-              <a:lnSpc>
-                <a:spcPct val="125000"/>
-              </a:lnSpc>
-            </a:pPr>
-            <a:r>
-              <a:rPr sz="1200" b="1">
-                <a:solidFill>
-                  <a:srgbClr val="0072CE"/>
-                </a:solidFill>
-                <a:latin typeface="Pretendard"/>
-              </a:rPr>
-              <a:t>CREDITS · CONTACT</a:t>
-            </a:r>
-          </a:p>
-        </p:txBody>
-      </p:sp>
-      <p:sp>
-        <p:nvSpPr>
-          <p:cNvPr id="6" name="deckgen:wrap:title"/>
-          <p:cNvSpPr txBox="1"/>
-          <p:nvPr/>
-        </p:nvSpPr>
-        <p:spPr>
-          <a:xfrm>
-            <a:off x="853440" y="1440180"/>
-            <a:ext cx="10485120" cy="617220"/>
-          </a:xfrm>
-          <a:prstGeom prst="rect">
-            <a:avLst/>
-          </a:prstGeom>
-          <a:noFill/>
-        </p:spPr>
-        <p:txBody>
-          <a:bodyPr wrap="square" anchor="t" lIns="0" rIns="0" tIns="0" bIns="0">
-            <a:spAutoFit/>
-          </a:bodyPr>
-          <a:lstStyle/>
-          <a:p>
-            <a:pPr algn="l">
-              <a:lnSpc>
-                <a:spcPct val="125000"/>
-              </a:lnSpc>
-            </a:pPr>
-            <a:r>
-              <a:rPr sz="3000" b="1">
-                <a:solidFill>
-                  <a:srgbClr val="1A2A5E"/>
-                </a:solidFill>
-                <a:latin typeface="Pretendard"/>
-              </a:rPr>
-              <a:t>출처 · 문의</a:t>
-            </a:r>
-          </a:p>
-        </p:txBody>
-      </p:sp>
-      <p:sp>
-        <p:nvSpPr>
-          <p:cNvPr id="7" name="deckgen:wrap:body"/>
-          <p:cNvSpPr txBox="1"/>
-          <p:nvPr/>
-        </p:nvSpPr>
-        <p:spPr>
-          <a:xfrm>
-            <a:off x="853440" y="2400300"/>
-            <a:ext cx="10485120" cy="3566160"/>
-          </a:xfrm>
-          <a:prstGeom prst="rect">
-            <a:avLst/>
-          </a:prstGeom>
-          <a:noFill/>
-        </p:spPr>
-        <p:txBody>
-          <a:bodyPr wrap="square" anchor="t" lIns="0" rIns="0" tIns="0" bIns="0">
-            <a:spAutoFit/>
-          </a:bodyPr>
-          <a:lstStyle/>
-          <a:p>
-            <a:pPr algn="l">
-              <a:lnSpc>
-                <a:spcPct val="130000"/>
-              </a:lnSpc>
-            </a:pPr>
-            <a:r>
-              <a:rPr sz="1500" b="0">
-                <a:solidFill>
-                  <a:srgbClr val="333333"/>
-                </a:solidFill>
-                <a:latin typeface="Pretendard"/>
-              </a:rPr>
-              <a:t>이애본 (Aebon Lee, Ph.D) — 드림아이티비즈 대표 · 한신대학교 AI·SW대학 겸임교수</a:t>
-            </a:r>
-          </a:p>
-          <a:p>
-            <a:pPr algn="l">
-              <a:lnSpc>
-                <a:spcPct val="130000"/>
-              </a:lnSpc>
-              <a:spcBef>
-                <a:spcPts val="900"/>
-              </a:spcBef>
-            </a:pPr>
-            <a:r>
-              <a:rPr sz="1500" b="0">
-                <a:solidFill>
-                  <a:srgbClr val="333333"/>
-                </a:solidFill>
-                <a:latin typeface="Pretendard"/>
-              </a:rPr>
-              <a:t>useful-ai.dreamitbiz.com — 강의안·영상 강의 라이브러리</a:t>
-            </a:r>
-          </a:p>
-          <a:p>
-            <a:pPr algn="l">
-              <a:lnSpc>
-                <a:spcPct val="130000"/>
-              </a:lnSpc>
-              <a:spcBef>
-                <a:spcPts val="900"/>
-              </a:spcBef>
-            </a:pPr>
-            <a:r>
-              <a:rPr sz="1500" b="0">
-                <a:solidFill>
-                  <a:srgbClr val="333333"/>
-                </a:solidFill>
-                <a:latin typeface="Pretendard"/>
-              </a:rPr>
-              <a:t>aebon@dreamitbiz.com · 카카오톡 ID aebon</a:t>
-            </a:r>
-          </a:p>
-          <a:p>
-            <a:pPr algn="l">
-              <a:lnSpc>
-                <a:spcPct val="130000"/>
-              </a:lnSpc>
-              <a:spcBef>
-                <a:spcPts val="900"/>
-              </a:spcBef>
-            </a:pPr>
-            <a:r>
-              <a:rPr sz="1500" b="0">
-                <a:solidFill>
-                  <a:srgbClr val="333333"/>
-                </a:solidFill>
-                <a:latin typeface="Pretendard"/>
-              </a:rPr>
-              <a:t>© 2026 이애본(드림아이티비즈). 교육 목적 비영리 이용 · 출처 표기</a:t>
-            </a:r>
-          </a:p>
-        </p:txBody>
-      </p:sp>
-      <p:sp>
-        <p:nvSpPr>
-          <p:cNvPr id="8" name="deckgen:wrap:footer"/>
-          <p:cNvSpPr txBox="1"/>
-          <p:nvPr/>
-        </p:nvSpPr>
-        <p:spPr>
-          <a:xfrm>
-            <a:off x="853440" y="6240780"/>
-            <a:ext cx="10485120" cy="342900"/>
-          </a:xfrm>
-          <a:prstGeom prst="rect">
-            <a:avLst/>
-          </a:prstGeom>
-          <a:noFill/>
-        </p:spPr>
-        <p:txBody>
-          <a:bodyPr wrap="square" anchor="t" lIns="0" rIns="0" tIns="0" bIns="0">
-            <a:spAutoFit/>
-          </a:bodyPr>
-          <a:lstStyle/>
-          <a:p>
-            <a:pPr algn="r">
-              <a:lnSpc>
-                <a:spcPct val="125000"/>
-              </a:lnSpc>
-            </a:pPr>
-            <a:r>
-              <a:rPr sz="900" b="0">
-                <a:solidFill>
-                  <a:srgbClr val="888888"/>
-                </a:solidFill>
-                <a:latin typeface="Pretendard"/>
-              </a:rPr>
-              <a:t>© 2026 이애본(드림아이티비즈) · useful-ai.dreamitbiz.com · 교육 목적 비영리 이용 · 출처 표기</a:t>
+              <a:t>© 2026 이애본 · 홍문원(洪文院) 발행 · CC BY-NC-ND 4.0 · useful-ai.dreamitbiz.com</a:t>
             </a:r>
           </a:p>
         </p:txBody>
@@ -18753,7 +14808,7 @@
                 <a:ea typeface="Noto Sans KR" pitchFamily="34" charset="-122"/>
                 <a:cs typeface="Noto Sans KR" pitchFamily="34" charset="-120"/>
               </a:rPr>
-              <a:t>소프트웨어 교육의 본질은 단순 코딩이 아닌</a:t>
+              <a:t>소프트웨어 교육의 본질은 단순 코딩이 아닌 </a:t>
             </a:r>
             <a:r>
               <a:rPr lang="en-US" sz="1800" b="1" dirty="0">
@@ -18848,7 +14903,7 @@
                 <a:ea typeface="Noto Sans KR" pitchFamily="34" charset="-122"/>
                 <a:cs typeface="Noto Sans KR" pitchFamily="34" charset="-120"/>
               </a:rPr>
-              <a:t>미래 사회가 요구하는컴퓨팅 사고력을 가진 창의·융합 인재양성을 목표로 합니다.</a:t>
+              <a:t>미래 사회가 요구하는 컴퓨팅 사고력을 가진 창의·융합 인재양성을 목표로 합니다.</a:t>
             </a:r>
             <a:endParaRPr lang="en-US" sz="1800" dirty="0"/>
           </a:p>
@@ -19198,7 +15253,7 @@
                 </a:solidFill>
                 <a:latin typeface="Pretendard"/>
               </a:rPr>
-              <a:t>© 2026 이애본(드림아이티비즈) · useful-ai.dreamitbiz.com · 교육 목적 비영리 이용 · 출처 표기</a:t>
+              <a:t>© 2026 이애본 · 홍문원(洪文院) 발행 · CC BY-NC-ND 4.0 · useful-ai.dreamitbiz.com</a:t>
             </a:r>
           </a:p>
         </p:txBody>
@@ -19577,7 +15632,7 @@
                   <a:ea typeface="Noto Sans KR" pitchFamily="34" charset="-122"/>
                   <a:cs typeface="Noto Sans KR" pitchFamily="34" charset="-120"/>
                 </a:rPr>
-                <a:t>하는 것이 포함된 사고 과정 일체"</a:t>
+                <a:t>하는 것이 포함된 사고 과정 일체" (Wing, 2010)</a:t>
               </a:r>
               <a:endParaRPr lang="en-US" dirty="0"/>
             </a:p>
@@ -19704,7 +15759,7 @@
                   <a:ea typeface="Noto Sans KR" pitchFamily="34" charset="-122"/>
                   <a:cs typeface="Noto Sans KR" pitchFamily="34" charset="-120"/>
                 </a:rPr>
-                <a:t>"변화하는 환경에 최적화된 방식으로 사고하고 행동하는</a:t>
+                <a:t>"문제를 컴퓨터로 풀 수 있는 형태로 세우는 정신 활동이며, 그 해법은</a:t>
               </a:r>
               <a:endParaRPr lang="en-US" dirty="0"/>
             </a:p>
@@ -19721,18 +15776,7 @@
                   <a:ea typeface="Noto Sans KR" pitchFamily="34" charset="-122"/>
                   <a:cs typeface="Noto Sans KR" pitchFamily="34" charset="-120"/>
                 </a:rPr>
-                <a:t>일련의 알고리즘</a:t>
-              </a:r>
-              <a:r>
-                <a:rPr lang="en-US" i="1" dirty="0">
-                  <a:solidFill>
-                    <a:srgbClr val="FFFFFF"/>
-                  </a:solidFill>
-                  <a:latin typeface="Noto Sans KR" pitchFamily="34" charset="0"/>
-                  <a:ea typeface="Noto Sans KR" pitchFamily="34" charset="-122"/>
-                  <a:cs typeface="Noto Sans KR" pitchFamily="34" charset="-120"/>
-                </a:rPr>
-                <a:t>"</a:t>
+                <a:t>사람이나 기계, 또는 둘이 함께 수행할 수 있다" (Wing, 2010)</a:t>
               </a:r>
               <a:endParaRPr lang="en-US" dirty="0"/>
             </a:p>
@@ -19899,7 +15943,7 @@
                   <a:ea typeface="Noto Sans KR" pitchFamily="34" charset="-122"/>
                   <a:cs typeface="Noto Sans KR" pitchFamily="34" charset="-120"/>
                 </a:rPr>
-                <a:t>정답이 하나가 아닌</a:t>
+                <a:t>정답이 하나가 아닌 </a:t>
               </a:r>
               <a:r>
                 <a:rPr lang="en-US" sz="1800" b="1" dirty="0">
@@ -19994,7 +16038,7 @@
                   <a:ea typeface="Noto Sans KR" pitchFamily="34" charset="-122"/>
                   <a:cs typeface="Noto Sans KR" pitchFamily="34" charset="-120"/>
                 </a:rPr>
-                <a:t>단순히 컴퓨터처럼 생각하는 것을 넘어,문제 해결의 전 과정을 논리적으로 설계하는 역량입니다.</a:t>
+                <a:t>단순히 컴퓨터처럼 생각하는 것을 넘어, 문제 해결의 전 과정을 논리적으로 설계하는 역량입니다.</a:t>
               </a:r>
               <a:endParaRPr lang="en-US" sz="1800" dirty="0"/>
             </a:p>
@@ -20069,7 +16113,43 @@
       </p:sp>
       <p:sp>
         <p:nvSpPr>
-          <p:cNvPr id="25" name="deckgen:wrap:footer"/>
+          <p:cNvPr id="25" name="Stage3 Note"/>
+          <p:cNvSpPr txBox="1"/>
+          <p:nvPr/>
+        </p:nvSpPr>
+        <p:spPr>
+          <a:xfrm>
+            <a:off x="571500" y="6450000"/>
+            <a:ext cx="11049000" cy="230000"/>
+          </a:xfrm>
+          <a:prstGeom prst="rect">
+            <a:avLst/>
+          </a:prstGeom>
+          <a:noFill/>
+        </p:spPr>
+        <p:txBody>
+          <a:bodyPr wrap="square" lIns="0" rIns="0" tIns="0" bIns="0" anchor="t">
+            <a:spAutoFit/>
+          </a:bodyPr>
+          <a:lstStyle/>
+          <a:p>
+            <a:r>
+              <a:rPr sz="900">
+                <a:solidFill>
+                  <a:srgbClr val="8B95A7"/>
+                </a:solidFill>
+                <a:latin typeface="Noto Sans KR"/>
+                <a:ea typeface="Noto Sans KR"/>
+                <a:cs typeface="Noto Sans KR"/>
+              </a:rPr>
+              <a:t>Wing, J. M. (2010). Computational thinking: What and why? Carnegie Mellon University. https://www.cs.cmu.edu/~CompThink/resources/TheLinkWing.pdf</a:t>
+            </a:r>
+          </a:p>
+        </p:txBody>
+      </p:sp>
+      <p:sp>
+        <p:nvSpPr>
+          <p:cNvPr id="26" name="deckgen:wrap:footer"/>
           <p:cNvSpPr txBox="1"/>
           <p:nvPr/>
         </p:nvSpPr>
@@ -20101,7 +16181,7 @@
                 </a:solidFill>
                 <a:latin typeface="Pretendard"/>
               </a:rPr>
-              <a:t>© 2026 이애본(드림아이티비즈) · useful-ai.dreamitbiz.com · 교육 목적 비영리 이용 · 출처 표기</a:t>
+              <a:t>© 2026 이애본 · 홍문원(洪文院) 발행 · CC BY-NC-ND 4.0 · useful-ai.dreamitbiz.com</a:t>
             </a:r>
           </a:p>
         </p:txBody>
@@ -20707,7 +16787,7 @@
                 <a:ea typeface="Noto Sans KR" pitchFamily="34" charset="-122"/>
                 <a:cs typeface="Noto Sans KR" pitchFamily="34" charset="-120"/>
               </a:rPr>
-              <a:t>수집한 자료를 이해하고 관계를 파악하여</a:t>
+              <a:t>수집한 자료를 이해하고 관계를 파악하여 </a:t>
             </a:r>
             <a:r>
               <a:rPr lang="en-US" sz="1200" dirty="0">
@@ -20830,7 +16910,7 @@
                 <a:ea typeface="Noto Sans KR" pitchFamily="34" charset="-122"/>
                 <a:cs typeface="Noto Sans KR" pitchFamily="34" charset="-120"/>
               </a:rPr>
-              <a:t>분석 결과를 표, 그래프, 다이어그램 등으로</a:t>
+              <a:t>분석 결과를 표, 그래프, 다이어그램 등으로 </a:t>
             </a:r>
             <a:r>
               <a:rPr lang="en-US" sz="1200" dirty="0">
@@ -21189,7 +17269,7 @@
                 <a:ea typeface="Noto Sans KR" pitchFamily="34" charset="-122"/>
                 <a:cs typeface="Noto Sans KR" pitchFamily="34" charset="-120"/>
               </a:rPr>
-              <a:t>해결 불가능해 보이는 큰 문제를</a:t>
+              <a:t>해결 불가능해 보이는 큰 문제를 </a:t>
             </a:r>
             <a:r>
               <a:rPr lang="en-US" sz="1200" dirty="0">
@@ -21744,7 +17824,7 @@
                 </a:solidFill>
                 <a:latin typeface="Pretendard"/>
               </a:rPr>
-              <a:t>© 2026 이애본(드림아이티비즈) · useful-ai.dreamitbiz.com · 교육 목적 비영리 이용 · 출처 표기</a:t>
+              <a:t>© 2026 이애본 · 홍문원(洪文院) 발행 · CC BY-NC-ND 4.0 · useful-ai.dreamitbiz.com</a:t>
             </a:r>
           </a:p>
         </p:txBody>
@@ -22247,7 +18327,7 @@
                 <a:ea typeface="Noto Sans KR" pitchFamily="34" charset="-122"/>
                 <a:cs typeface="Noto Sans KR" pitchFamily="34" charset="-120"/>
               </a:rPr>
-              <a:t>문제 해결을 위해</a:t>
+              <a:t>문제 해결을 위해 </a:t>
             </a:r>
             <a:r>
               <a:rPr lang="en-US" sz="1200" dirty="0">
@@ -22397,7 +18477,7 @@
                 <a:ea typeface="Noto Sans KR" pitchFamily="34" charset="-122"/>
                 <a:cs typeface="Noto Sans KR" pitchFamily="34" charset="-120"/>
               </a:rPr>
-              <a:t>작게 나누어진 문제들을 해결하기 위한</a:t>
+              <a:t>작게 나누어진 문제들을 해결하기 위한 </a:t>
             </a:r>
             <a:r>
               <a:rPr lang="en-US" sz="1200" dirty="0">
@@ -23519,7 +19599,7 @@
                 </a:solidFill>
                 <a:latin typeface="Pretendard"/>
               </a:rPr>
-              <a:t>© 2026 이애본(드림아이티비즈) · useful-ai.dreamitbiz.com · 교육 목적 비영리 이용 · 출처 표기</a:t>
+              <a:t>© 2026 이애본 · 홍문원(洪文院) 발행 · CC BY-NC-ND 4.0 · useful-ai.dreamitbiz.com</a:t>
             </a:r>
           </a:p>
         </p:txBody>
@@ -23796,7 +19876,7 @@
                 <a:ea typeface="Noto Sans KR" pitchFamily="34" charset="-122"/>
                 <a:cs typeface="Noto Sans KR" pitchFamily="34" charset="-120"/>
               </a:rPr>
-              <a:t>복잡하고 거대한 문제를</a:t>
+              <a:t>복잡하고 거대한 문제를 </a:t>
             </a:r>
             <a:r>
               <a:rPr lang="en-US" sz="1500" b="1" dirty="0">
@@ -24970,7 +21050,7 @@
                 </a:solidFill>
                 <a:latin typeface="Pretendard"/>
               </a:rPr>
-              <a:t>© 2026 이애본(드림아이티비즈) · useful-ai.dreamitbiz.com · 교육 목적 비영리 이용 · 출처 표기</a:t>
+              <a:t>© 2026 이애본 · 홍문원(洪文院) 발행 · CC BY-NC-ND 4.0 · useful-ai.dreamitbiz.com</a:t>
             </a:r>
           </a:p>
         </p:txBody>
@@ -25299,7 +21379,7 @@
                 <a:ea typeface="Noto Sans KR" pitchFamily="34" charset="-122"/>
                 <a:cs typeface="Noto Sans KR" pitchFamily="34" charset="-120"/>
               </a:rPr>
-              <a:t>"문제 안에 숨어져 있는</a:t>
+              <a:t>"문제 안에 숨어 있는 </a:t>
             </a:r>
             <a:r>
               <a:rPr lang="en-US" sz="1500" b="1" dirty="0">
@@ -25438,7 +21518,7 @@
                 <a:ea typeface="Noto Sans KR" pitchFamily="34" charset="-122"/>
                 <a:cs typeface="Noto Sans KR" pitchFamily="34" charset="-120"/>
               </a:rPr>
-              <a:t>사례 간의 공통점과 규칙을 발견하여 복잡성을 줄이고, 이를</a:t>
+              <a:t>사례 간의 공통점과 규칙을 발견하여 복잡성을 줄이고, 이를 </a:t>
             </a:r>
             <a:r>
               <a:rPr lang="en-US" sz="1300" b="1" dirty="0">
@@ -25995,7 +22075,7 @@
                 <a:ea typeface="Noto Sans KR" pitchFamily="34" charset="-122"/>
                 <a:cs typeface="Noto Sans KR" pitchFamily="34" charset="-120"/>
               </a:rPr>
-              <a:t>[예시]</a:t>
+              <a:t>[예시] </a:t>
             </a:r>
             <a:r>
               <a:rPr lang="en-US" sz="1300" dirty="0">
@@ -26023,7 +22103,7 @@
                 <a:ea typeface="Noto Sans KR" pitchFamily="34" charset="-122"/>
                 <a:cs typeface="Noto Sans KR" pitchFamily="34" charset="-120"/>
               </a:rPr>
-              <a:t>[산출물]</a:t>
+              <a:t>[산출물] </a:t>
             </a:r>
             <a:r>
               <a:rPr lang="en-US" sz="1300" dirty="0">
@@ -26106,7 +22186,7 @@
                 </a:solidFill>
                 <a:latin typeface="Pretendard"/>
               </a:rPr>
-              <a:t>© 2026 이애본(드림아이티비즈) · useful-ai.dreamitbiz.com · 교육 목적 비영리 이용 · 출처 표기</a:t>
+              <a:t>© 2026 이애본 · 홍문원(洪文院) 발행 · CC BY-NC-ND 4.0 · useful-ai.dreamitbiz.com</a:t>
             </a:r>
           </a:p>
         </p:txBody>
@@ -26437,7 +22517,7 @@
                 <a:ea typeface="Noto Sans KR" pitchFamily="34" charset="-122"/>
                 <a:cs typeface="Noto Sans KR" pitchFamily="34" charset="-120"/>
               </a:rPr>
-              <a:t>"추상화란 다양한 문제를 해결하기 위해</a:t>
+              <a:t>"추상화란 다양한 문제를 해결하기 위해 </a:t>
             </a:r>
             <a:r>
               <a:rPr lang="en-US" sz="1500" b="1" dirty="0">
@@ -26459,7 +22539,7 @@
                 <a:ea typeface="Noto Sans KR" pitchFamily="34" charset="-122"/>
                 <a:cs typeface="Noto Sans KR" pitchFamily="34" charset="-120"/>
               </a:rPr>
-              <a:t>하고</a:t>
+              <a:t>하고 </a:t>
             </a:r>
             <a:r>
               <a:rPr lang="en-US" sz="1500" b="1" dirty="0">
@@ -26635,7 +22715,7 @@
                 <a:ea typeface="Noto Sans KR" pitchFamily="34" charset="-122"/>
                 <a:cs typeface="Noto Sans KR" pitchFamily="34" charset="-120"/>
               </a:rPr>
-              <a:t>핵심 요소 파악 (Identifying Essentials) :</a:t>
+              <a:t>핵심 요소 파악 (Identifying Essentials) : </a:t>
             </a:r>
             <a:r>
               <a:rPr lang="en-US" sz="1300" dirty="0">
@@ -26719,7 +22799,7 @@
                 <a:ea typeface="Noto Sans KR" pitchFamily="34" charset="-122"/>
                 <a:cs typeface="Noto Sans KR" pitchFamily="34" charset="-120"/>
               </a:rPr>
-              <a:t>복잡성 제거 (Removing Complexity) :</a:t>
+              <a:t>복잡성 제거 (Removing Complexity) : </a:t>
             </a:r>
             <a:r>
               <a:rPr lang="en-US" sz="1300" dirty="0">
@@ -26803,7 +22883,7 @@
                 <a:ea typeface="Noto Sans KR" pitchFamily="34" charset="-122"/>
                 <a:cs typeface="Noto Sans KR" pitchFamily="34" charset="-120"/>
               </a:rPr>
-              <a:t>모델링 (Modeling) :</a:t>
+              <a:t>모델링 (Modeling) : </a:t>
             </a:r>
             <a:r>
               <a:rPr lang="en-US" sz="1300" dirty="0">
@@ -27175,7 +23255,7 @@
                 </a:solidFill>
                 <a:latin typeface="Pretendard"/>
               </a:rPr>
-              <a:t>© 2026 이애본(드림아이티비즈) · useful-ai.dreamitbiz.com · 교육 목적 비영리 이용 · 출처 표기</a:t>
+              <a:t>© 2026 이애본 · 홍문원(洪文院) 발행 · CC BY-NC-ND 4.0 · useful-ai.dreamitbiz.com</a:t>
             </a:r>
           </a:p>
         </p:txBody>
@@ -27429,7 +23509,7 @@
                 <a:ea typeface="Noto Sans KR" pitchFamily="34" charset="-122"/>
                 <a:cs typeface="Noto Sans KR" pitchFamily="34" charset="-120"/>
               </a:rPr>
-              <a:t>이란 작게 나누어진(분해된) 하위 문제들을 해결하기 위해 수행해야 할일련의 절차를 순서대로 명확히 기술하는 것입니다.</a:t>
+              <a:t>이란 작게 나누어진(분해된) 하위 문제들을 해결하기 위해 수행해야 할 일련의 절차를 순서대로 명확히 기술하는 것입니다.</a:t>
             </a:r>
             <a:endParaRPr lang="en-US" sz="1500" dirty="0"/>
           </a:p>
@@ -28146,7 +24226,7 @@
                   <a:ea typeface="Noto Sans Mono" pitchFamily="34" charset="-122"/>
                   <a:cs typeface="Noto Sans Mono" pitchFamily="34" charset="-120"/>
                 </a:rPr>
-                <a:t>Function</a:t>
+                <a:t>Function </a:t>
               </a:r>
               <a:r>
                 <a:rPr lang="en-US" sz="1400" dirty="0">
@@ -28241,7 +24321,7 @@
                   <a:ea typeface="Noto Sans Mono" pitchFamily="34" charset="-122"/>
                   <a:cs typeface="Noto Sans Mono" pitchFamily="34" charset="-120"/>
                 </a:rPr>
-                <a:t>1.</a:t>
+                <a:t>1. List </a:t>
               </a:r>
               <a:r>
                 <a:rPr lang="en-US" sz="1400" dirty="0">
@@ -28252,7 +24332,7 @@
                   <a:ea typeface="Noto Sans Mono" pitchFamily="34" charset="-122"/>
                   <a:cs typeface="Noto Sans Mono" pitchFamily="34" charset="-120"/>
                 </a:rPr>
-                <a:t>List</a:t>
+                <a:t/>
               </a:r>
               <a:r>
                 <a:rPr lang="en-US" sz="1400" dirty="0">
@@ -28302,7 +24382,7 @@
                   <a:ea typeface="Noto Sans Mono" pitchFamily="34" charset="-122"/>
                   <a:cs typeface="Noto Sans Mono" pitchFamily="34" charset="-120"/>
                 </a:rPr>
-                <a:t>2.</a:t>
+                <a:t>2. For each option in </a:t>
               </a:r>
               <a:r>
                 <a:rPr lang="en-US" sz="1400" dirty="0">
@@ -28313,7 +24393,7 @@
                   <a:ea typeface="Noto Sans Mono" pitchFamily="34" charset="-122"/>
                   <a:cs typeface="Noto Sans Mono" pitchFamily="34" charset="-120"/>
                 </a:rPr>
-                <a:t>For each</a:t>
+                <a:t/>
               </a:r>
               <a:r>
                 <a:rPr lang="en-US" sz="1400" dirty="0">
@@ -28324,7 +24404,7 @@
                   <a:ea typeface="Noto Sans Mono" pitchFamily="34" charset="-122"/>
                   <a:cs typeface="Noto Sans Mono" pitchFamily="34" charset="-120"/>
                 </a:rPr>
-                <a:t>option</a:t>
+                <a:t/>
               </a:r>
               <a:r>
                 <a:rPr lang="en-US" sz="1400" dirty="0">
@@ -28335,7 +24415,7 @@
                   <a:ea typeface="Noto Sans Mono" pitchFamily="34" charset="-122"/>
                   <a:cs typeface="Noto Sans Mono" pitchFamily="34" charset="-120"/>
                 </a:rPr>
-                <a:t>in</a:t>
+                <a:t/>
               </a:r>
               <a:r>
                 <a:rPr lang="en-US" sz="1400" dirty="0">
@@ -28419,7 +24499,7 @@
                   <a:ea typeface="Noto Sans Mono" pitchFamily="34" charset="-122"/>
                   <a:cs typeface="Noto Sans Mono" pitchFamily="34" charset="-120"/>
                 </a:rPr>
-                <a:t>If</a:t>
+                <a:t>If (option.cost &gt; Budget) </a:t>
               </a:r>
               <a:r>
                 <a:rPr lang="en-US" sz="1400" dirty="0">
@@ -28430,7 +24510,7 @@
                   <a:ea typeface="Noto Sans Mono" pitchFamily="34" charset="-122"/>
                   <a:cs typeface="Noto Sans Mono" pitchFamily="34" charset="-120"/>
                 </a:rPr>
-                <a:t>(option.cost &gt; Budget)</a:t>
+                <a:t/>
               </a:r>
               <a:r>
                 <a:rPr lang="en-US" sz="1400" dirty="0">
@@ -28536,7 +24616,7 @@
                   <a:ea typeface="Noto Sans Mono" pitchFamily="34" charset="-122"/>
                   <a:cs typeface="Noto Sans Mono" pitchFamily="34" charset="-120"/>
                 </a:rPr>
-                <a:t>Remove</a:t>
+                <a:t>Remove </a:t>
               </a:r>
               <a:r>
                 <a:rPr lang="en-US" sz="1400" dirty="0">
@@ -28586,7 +24666,7 @@
                   <a:ea typeface="Noto Sans Mono" pitchFamily="34" charset="-122"/>
                   <a:cs typeface="Noto Sans Mono" pitchFamily="34" charset="-120"/>
                 </a:rPr>
-                <a:t>3.</a:t>
+                <a:t>3. Return option with Min(TotalCost) </a:t>
               </a:r>
               <a:r>
                 <a:rPr lang="en-US" sz="1400" dirty="0">
@@ -28597,7 +24677,7 @@
                   <a:ea typeface="Noto Sans Mono" pitchFamily="34" charset="-122"/>
                   <a:cs typeface="Noto Sans Mono" pitchFamily="34" charset="-120"/>
                 </a:rPr>
-                <a:t>Return</a:t>
+                <a:t/>
               </a:r>
               <a:r>
                 <a:rPr lang="en-US" sz="1400" dirty="0">
@@ -28608,7 +24688,7 @@
                   <a:ea typeface="Noto Sans Mono" pitchFamily="34" charset="-122"/>
                   <a:cs typeface="Noto Sans Mono" pitchFamily="34" charset="-120"/>
                 </a:rPr>
-                <a:t>option with</a:t>
+                <a:t/>
               </a:r>
               <a:r>
                 <a:rPr lang="en-US" sz="1400" dirty="0">
@@ -28619,7 +24699,7 @@
                   <a:ea typeface="Noto Sans Mono" pitchFamily="34" charset="-122"/>
                   <a:cs typeface="Noto Sans Mono" pitchFamily="34" charset="-120"/>
                 </a:rPr>
-                <a:t>Min(TotalCost)</a:t>
+                <a:t/>
               </a:r>
               <a:r>
                 <a:rPr lang="en-US" sz="1400" dirty="0">
@@ -28742,7 +24822,7 @@
                 </a:solidFill>
                 <a:latin typeface="Pretendard"/>
               </a:rPr>
-              <a:t>© 2026 이애본(드림아이티비즈) · useful-ai.dreamitbiz.com · 교육 목적 비영리 이용 · 출처 표기</a:t>
+              <a:t>© 2026 이애본 · 홍문원(洪文院) 발행 · CC BY-NC-ND 4.0 · useful-ai.dreamitbiz.com</a:t>
             </a:r>
           </a:p>
         </p:txBody>

--- a/library/b03-computational-thinking/b03-computational-thinking.pptx
+++ b/library/b03-computational-thinking/b03-computational-thinking.pptx
@@ -14053,7 +14053,7 @@
                 </a:solidFill>
                 <a:latin typeface="Pretendard"/>
               </a:rPr>
-              <a:t>1.  저작권 © 2026 이애본(드림아이티비즈 DreamIT Biz). 발행 홍문원(洪文院, 출판사 신고번호 제2026-000026호). 2026년 1월 「생성형 AI와 창의력·복합문제능력 향상 과정」 강의안을 전자출판용으로 다시 묶은 것입니다. ISBN: 등록 후 기재.</a:t>
+              <a:t>1.  저작권 © 2026 이애본(드림아이티비즈 DreamIT Biz). 발행 홍문원(洪文院, 출판사 신고번호 제2026-000026호). 이애본이 2026년 대학·기관 강의 현장에서 쓴 강의안을 전자출판용으로 다시 묶은 것입니다. ISBN: 등록 후 기재.</a:t>
             </a:r>
           </a:p>
           <a:p>
